--- a/public/course-materials/pptx/Module-05-Bitcoin-Ethereum-les-grandes-cryptos.pptx
+++ b/public/course-materials/pptx/Module-05-Bitcoin-Ethereum-les-grandes-cryptos.pptx
@@ -23,9 +23,14 @@
     <p:sldId id="271" r:id="rId17"/>
     <p:sldId id="272" r:id="rId18"/>
     <p:sldId id="273" r:id="rId19"/>
+    <p:sldId id="274" r:id="rId20"/>
+    <p:sldId id="275" r:id="rId21"/>
+    <p:sldId id="276" r:id="rId22"/>
+    <p:sldId id="277" r:id="rId23"/>
+    <p:sldId id="278" r:id="rId24"/>
   </p:sldIdLst>
   <p:notesMasterIdLst>
-    <p:notesMasterId r:id="rId20"/>
+    <p:notesMasterId r:id="rId25"/>
   </p:notesMasterIdLst>
   <p:sldSz cx="9144000" cy="5143500"/>
   <p:notesSz cx="5143500" cy="9144000"/>
@@ -1353,6 +1358,94 @@
 </p:notes>
 </file>
 
+<file path=ppt/notesSlides/notesSlide19.xml><?xml version="1.0" encoding="utf-8"?>
+<p:notes xmlns:a="http://schemas.openxmlformats.org/drawingml/2006/main" xmlns:r="http://schemas.openxmlformats.org/officeDocument/2006/relationships" xmlns:p="http://schemas.openxmlformats.org/presentationml/2006/main">
+  <p:cSld>
+    <p:spTree>
+      <p:nvGrpSpPr>
+        <p:cNvPr id="1" name=""/>
+        <p:cNvGrpSpPr/>
+        <p:nvPr/>
+      </p:nvGrpSpPr>
+      <p:grpSpPr>
+        <a:xfrm>
+          <a:off x="0" y="0"/>
+          <a:ext cx="0" cy="0"/>
+          <a:chOff x="0" y="0"/>
+          <a:chExt cx="0" cy="0"/>
+        </a:xfrm>
+      </p:grpSpPr>
+      <p:sp>
+        <p:nvSpPr>
+          <p:cNvPr id="2" name="Slide Image Placeholder 1"/>
+          <p:cNvSpPr>
+            <a:spLocks noGrp="1" noRot="1" noChangeAspect="1"/>
+          </p:cNvSpPr>
+          <p:nvPr>
+            <p:ph type="sldImg"/>
+          </p:nvPr>
+        </p:nvSpPr>
+        <p:spPr/>
+      </p:sp>
+      <p:sp>
+        <p:nvSpPr>
+          <p:cNvPr id="3" name="Notes Placeholder 2"/>
+          <p:cNvSpPr>
+            <a:spLocks noGrp="1"/>
+          </p:cNvSpPr>
+          <p:nvPr>
+            <p:ph type="body" idx="1"/>
+          </p:nvPr>
+        </p:nvSpPr>
+        <p:spPr/>
+        <p:txBody>
+          <a:bodyPr/>
+          <a:lstStyle/>
+          <a:p>
+            <a:r>
+              <a:rPr lang="en-US" dirty="0"/>
+              <a:t/>
+            </a:r>
+            <a:endParaRPr lang="en-US" dirty="0"/>
+          </a:p>
+        </p:txBody>
+      </p:sp>
+      <p:sp>
+        <p:nvSpPr>
+          <p:cNvPr id="4" name="Slide Number Placeholder 3"/>
+          <p:cNvSpPr>
+            <a:spLocks noGrp="1"/>
+          </p:cNvSpPr>
+          <p:nvPr>
+            <p:ph type="sldNum" sz="quarter" idx="10"/>
+          </p:nvPr>
+        </p:nvSpPr>
+        <p:spPr/>
+        <p:txBody>
+          <a:bodyPr/>
+          <a:lstStyle/>
+          <a:p>
+            <a:fld id="{F7021451-1387-4CA6-816F-3879F97B5CBC}" type="slidenum">
+              <a:rPr lang="en-US"/>
+              <a:t>19</a:t>
+            </a:fld>
+            <a:endParaRPr lang="en-US"/>
+          </a:p>
+        </p:txBody>
+      </p:sp>
+    </p:spTree>
+    <p:extLst>
+      <p:ext uri="{BB962C8B-B14F-4D97-AF65-F5344CB8AC3E}">
+        <p14:creationId xmlns:p14="http://schemas.microsoft.com/office/powerpoint/2010/main" val="1024086991"/>
+      </p:ext>
+    </p:extLst>
+  </p:cSld>
+  <p:clrMapOvr>
+    <a:masterClrMapping/>
+  </p:clrMapOvr>
+</p:notes>
+</file>
+
 <file path=ppt/notesSlides/notesSlide2.xml><?xml version="1.0" encoding="utf-8"?>
 <p:notes xmlns:a="http://schemas.openxmlformats.org/drawingml/2006/main" xmlns:r="http://schemas.openxmlformats.org/officeDocument/2006/relationships" xmlns:p="http://schemas.openxmlformats.org/presentationml/2006/main">
   <p:cSld>
@@ -1423,6 +1516,358 @@
             <a:fld id="{F7021451-1387-4CA6-816F-3879F97B5CBC}" type="slidenum">
               <a:rPr lang="en-US"/>
               <a:t>2</a:t>
+            </a:fld>
+            <a:endParaRPr lang="en-US"/>
+          </a:p>
+        </p:txBody>
+      </p:sp>
+    </p:spTree>
+    <p:extLst>
+      <p:ext uri="{BB962C8B-B14F-4D97-AF65-F5344CB8AC3E}">
+        <p14:creationId xmlns:p14="http://schemas.microsoft.com/office/powerpoint/2010/main" val="1024086991"/>
+      </p:ext>
+    </p:extLst>
+  </p:cSld>
+  <p:clrMapOvr>
+    <a:masterClrMapping/>
+  </p:clrMapOvr>
+</p:notes>
+</file>
+
+<file path=ppt/notesSlides/notesSlide20.xml><?xml version="1.0" encoding="utf-8"?>
+<p:notes xmlns:a="http://schemas.openxmlformats.org/drawingml/2006/main" xmlns:r="http://schemas.openxmlformats.org/officeDocument/2006/relationships" xmlns:p="http://schemas.openxmlformats.org/presentationml/2006/main">
+  <p:cSld>
+    <p:spTree>
+      <p:nvGrpSpPr>
+        <p:cNvPr id="1" name=""/>
+        <p:cNvGrpSpPr/>
+        <p:nvPr/>
+      </p:nvGrpSpPr>
+      <p:grpSpPr>
+        <a:xfrm>
+          <a:off x="0" y="0"/>
+          <a:ext cx="0" cy="0"/>
+          <a:chOff x="0" y="0"/>
+          <a:chExt cx="0" cy="0"/>
+        </a:xfrm>
+      </p:grpSpPr>
+      <p:sp>
+        <p:nvSpPr>
+          <p:cNvPr id="2" name="Slide Image Placeholder 1"/>
+          <p:cNvSpPr>
+            <a:spLocks noGrp="1" noRot="1" noChangeAspect="1"/>
+          </p:cNvSpPr>
+          <p:nvPr>
+            <p:ph type="sldImg"/>
+          </p:nvPr>
+        </p:nvSpPr>
+        <p:spPr/>
+      </p:sp>
+      <p:sp>
+        <p:nvSpPr>
+          <p:cNvPr id="3" name="Notes Placeholder 2"/>
+          <p:cNvSpPr>
+            <a:spLocks noGrp="1"/>
+          </p:cNvSpPr>
+          <p:nvPr>
+            <p:ph type="body" idx="1"/>
+          </p:nvPr>
+        </p:nvSpPr>
+        <p:spPr/>
+        <p:txBody>
+          <a:bodyPr/>
+          <a:lstStyle/>
+          <a:p>
+            <a:r>
+              <a:rPr lang="en-US" dirty="0"/>
+              <a:t/>
+            </a:r>
+            <a:endParaRPr lang="en-US" dirty="0"/>
+          </a:p>
+        </p:txBody>
+      </p:sp>
+      <p:sp>
+        <p:nvSpPr>
+          <p:cNvPr id="4" name="Slide Number Placeholder 3"/>
+          <p:cNvSpPr>
+            <a:spLocks noGrp="1"/>
+          </p:cNvSpPr>
+          <p:nvPr>
+            <p:ph type="sldNum" sz="quarter" idx="10"/>
+          </p:nvPr>
+        </p:nvSpPr>
+        <p:spPr/>
+        <p:txBody>
+          <a:bodyPr/>
+          <a:lstStyle/>
+          <a:p>
+            <a:fld id="{F7021451-1387-4CA6-816F-3879F97B5CBC}" type="slidenum">
+              <a:rPr lang="en-US"/>
+              <a:t>20</a:t>
+            </a:fld>
+            <a:endParaRPr lang="en-US"/>
+          </a:p>
+        </p:txBody>
+      </p:sp>
+    </p:spTree>
+    <p:extLst>
+      <p:ext uri="{BB962C8B-B14F-4D97-AF65-F5344CB8AC3E}">
+        <p14:creationId xmlns:p14="http://schemas.microsoft.com/office/powerpoint/2010/main" val="1024086991"/>
+      </p:ext>
+    </p:extLst>
+  </p:cSld>
+  <p:clrMapOvr>
+    <a:masterClrMapping/>
+  </p:clrMapOvr>
+</p:notes>
+</file>
+
+<file path=ppt/notesSlides/notesSlide21.xml><?xml version="1.0" encoding="utf-8"?>
+<p:notes xmlns:a="http://schemas.openxmlformats.org/drawingml/2006/main" xmlns:r="http://schemas.openxmlformats.org/officeDocument/2006/relationships" xmlns:p="http://schemas.openxmlformats.org/presentationml/2006/main">
+  <p:cSld>
+    <p:spTree>
+      <p:nvGrpSpPr>
+        <p:cNvPr id="1" name=""/>
+        <p:cNvGrpSpPr/>
+        <p:nvPr/>
+      </p:nvGrpSpPr>
+      <p:grpSpPr>
+        <a:xfrm>
+          <a:off x="0" y="0"/>
+          <a:ext cx="0" cy="0"/>
+          <a:chOff x="0" y="0"/>
+          <a:chExt cx="0" cy="0"/>
+        </a:xfrm>
+      </p:grpSpPr>
+      <p:sp>
+        <p:nvSpPr>
+          <p:cNvPr id="2" name="Slide Image Placeholder 1"/>
+          <p:cNvSpPr>
+            <a:spLocks noGrp="1" noRot="1" noChangeAspect="1"/>
+          </p:cNvSpPr>
+          <p:nvPr>
+            <p:ph type="sldImg"/>
+          </p:nvPr>
+        </p:nvSpPr>
+        <p:spPr/>
+      </p:sp>
+      <p:sp>
+        <p:nvSpPr>
+          <p:cNvPr id="3" name="Notes Placeholder 2"/>
+          <p:cNvSpPr>
+            <a:spLocks noGrp="1"/>
+          </p:cNvSpPr>
+          <p:nvPr>
+            <p:ph type="body" idx="1"/>
+          </p:nvPr>
+        </p:nvSpPr>
+        <p:spPr/>
+        <p:txBody>
+          <a:bodyPr/>
+          <a:lstStyle/>
+          <a:p>
+            <a:r>
+              <a:rPr lang="en-US" dirty="0"/>
+              <a:t/>
+            </a:r>
+            <a:endParaRPr lang="en-US" dirty="0"/>
+          </a:p>
+        </p:txBody>
+      </p:sp>
+      <p:sp>
+        <p:nvSpPr>
+          <p:cNvPr id="4" name="Slide Number Placeholder 3"/>
+          <p:cNvSpPr>
+            <a:spLocks noGrp="1"/>
+          </p:cNvSpPr>
+          <p:nvPr>
+            <p:ph type="sldNum" sz="quarter" idx="10"/>
+          </p:nvPr>
+        </p:nvSpPr>
+        <p:spPr/>
+        <p:txBody>
+          <a:bodyPr/>
+          <a:lstStyle/>
+          <a:p>
+            <a:fld id="{F7021451-1387-4CA6-816F-3879F97B5CBC}" type="slidenum">
+              <a:rPr lang="en-US"/>
+              <a:t>21</a:t>
+            </a:fld>
+            <a:endParaRPr lang="en-US"/>
+          </a:p>
+        </p:txBody>
+      </p:sp>
+    </p:spTree>
+    <p:extLst>
+      <p:ext uri="{BB962C8B-B14F-4D97-AF65-F5344CB8AC3E}">
+        <p14:creationId xmlns:p14="http://schemas.microsoft.com/office/powerpoint/2010/main" val="1024086991"/>
+      </p:ext>
+    </p:extLst>
+  </p:cSld>
+  <p:clrMapOvr>
+    <a:masterClrMapping/>
+  </p:clrMapOvr>
+</p:notes>
+</file>
+
+<file path=ppt/notesSlides/notesSlide22.xml><?xml version="1.0" encoding="utf-8"?>
+<p:notes xmlns:a="http://schemas.openxmlformats.org/drawingml/2006/main" xmlns:r="http://schemas.openxmlformats.org/officeDocument/2006/relationships" xmlns:p="http://schemas.openxmlformats.org/presentationml/2006/main">
+  <p:cSld>
+    <p:spTree>
+      <p:nvGrpSpPr>
+        <p:cNvPr id="1" name=""/>
+        <p:cNvGrpSpPr/>
+        <p:nvPr/>
+      </p:nvGrpSpPr>
+      <p:grpSpPr>
+        <a:xfrm>
+          <a:off x="0" y="0"/>
+          <a:ext cx="0" cy="0"/>
+          <a:chOff x="0" y="0"/>
+          <a:chExt cx="0" cy="0"/>
+        </a:xfrm>
+      </p:grpSpPr>
+      <p:sp>
+        <p:nvSpPr>
+          <p:cNvPr id="2" name="Slide Image Placeholder 1"/>
+          <p:cNvSpPr>
+            <a:spLocks noGrp="1" noRot="1" noChangeAspect="1"/>
+          </p:cNvSpPr>
+          <p:nvPr>
+            <p:ph type="sldImg"/>
+          </p:nvPr>
+        </p:nvSpPr>
+        <p:spPr/>
+      </p:sp>
+      <p:sp>
+        <p:nvSpPr>
+          <p:cNvPr id="3" name="Notes Placeholder 2"/>
+          <p:cNvSpPr>
+            <a:spLocks noGrp="1"/>
+          </p:cNvSpPr>
+          <p:nvPr>
+            <p:ph type="body" idx="1"/>
+          </p:nvPr>
+        </p:nvSpPr>
+        <p:spPr/>
+        <p:txBody>
+          <a:bodyPr/>
+          <a:lstStyle/>
+          <a:p>
+            <a:r>
+              <a:rPr lang="en-US" dirty="0"/>
+              <a:t/>
+            </a:r>
+            <a:endParaRPr lang="en-US" dirty="0"/>
+          </a:p>
+        </p:txBody>
+      </p:sp>
+      <p:sp>
+        <p:nvSpPr>
+          <p:cNvPr id="4" name="Slide Number Placeholder 3"/>
+          <p:cNvSpPr>
+            <a:spLocks noGrp="1"/>
+          </p:cNvSpPr>
+          <p:nvPr>
+            <p:ph type="sldNum" sz="quarter" idx="10"/>
+          </p:nvPr>
+        </p:nvSpPr>
+        <p:spPr/>
+        <p:txBody>
+          <a:bodyPr/>
+          <a:lstStyle/>
+          <a:p>
+            <a:fld id="{F7021451-1387-4CA6-816F-3879F97B5CBC}" type="slidenum">
+              <a:rPr lang="en-US"/>
+              <a:t>22</a:t>
+            </a:fld>
+            <a:endParaRPr lang="en-US"/>
+          </a:p>
+        </p:txBody>
+      </p:sp>
+    </p:spTree>
+    <p:extLst>
+      <p:ext uri="{BB962C8B-B14F-4D97-AF65-F5344CB8AC3E}">
+        <p14:creationId xmlns:p14="http://schemas.microsoft.com/office/powerpoint/2010/main" val="1024086991"/>
+      </p:ext>
+    </p:extLst>
+  </p:cSld>
+  <p:clrMapOvr>
+    <a:masterClrMapping/>
+  </p:clrMapOvr>
+</p:notes>
+</file>
+
+<file path=ppt/notesSlides/notesSlide23.xml><?xml version="1.0" encoding="utf-8"?>
+<p:notes xmlns:a="http://schemas.openxmlformats.org/drawingml/2006/main" xmlns:r="http://schemas.openxmlformats.org/officeDocument/2006/relationships" xmlns:p="http://schemas.openxmlformats.org/presentationml/2006/main">
+  <p:cSld>
+    <p:spTree>
+      <p:nvGrpSpPr>
+        <p:cNvPr id="1" name=""/>
+        <p:cNvGrpSpPr/>
+        <p:nvPr/>
+      </p:nvGrpSpPr>
+      <p:grpSpPr>
+        <a:xfrm>
+          <a:off x="0" y="0"/>
+          <a:ext cx="0" cy="0"/>
+          <a:chOff x="0" y="0"/>
+          <a:chExt cx="0" cy="0"/>
+        </a:xfrm>
+      </p:grpSpPr>
+      <p:sp>
+        <p:nvSpPr>
+          <p:cNvPr id="2" name="Slide Image Placeholder 1"/>
+          <p:cNvSpPr>
+            <a:spLocks noGrp="1" noRot="1" noChangeAspect="1"/>
+          </p:cNvSpPr>
+          <p:nvPr>
+            <p:ph type="sldImg"/>
+          </p:nvPr>
+        </p:nvSpPr>
+        <p:spPr/>
+      </p:sp>
+      <p:sp>
+        <p:nvSpPr>
+          <p:cNvPr id="3" name="Notes Placeholder 2"/>
+          <p:cNvSpPr>
+            <a:spLocks noGrp="1"/>
+          </p:cNvSpPr>
+          <p:nvPr>
+            <p:ph type="body" idx="1"/>
+          </p:nvPr>
+        </p:nvSpPr>
+        <p:spPr/>
+        <p:txBody>
+          <a:bodyPr/>
+          <a:lstStyle/>
+          <a:p>
+            <a:r>
+              <a:rPr lang="en-US" dirty="0"/>
+              <a:t/>
+            </a:r>
+            <a:endParaRPr lang="en-US" dirty="0"/>
+          </a:p>
+        </p:txBody>
+      </p:sp>
+      <p:sp>
+        <p:nvSpPr>
+          <p:cNvPr id="4" name="Slide Number Placeholder 3"/>
+          <p:cNvSpPr>
+            <a:spLocks noGrp="1"/>
+          </p:cNvSpPr>
+          <p:nvPr>
+            <p:ph type="sldNum" sz="quarter" idx="10"/>
+          </p:nvPr>
+        </p:nvSpPr>
+        <p:spPr/>
+        <p:txBody>
+          <a:bodyPr/>
+          <a:lstStyle/>
+          <a:p>
+            <a:fld id="{F7021451-1387-4CA6-816F-3879F97B5CBC}" type="slidenum">
+              <a:rPr lang="en-US"/>
+              <a:t>23</a:t>
             </a:fld>
             <a:endParaRPr lang="en-US"/>
           </a:p>
@@ -2396,28 +2841,96 @@
         </p:nvSpPr>
         <p:spPr>
           <a:xfrm>
+            <a:off x="6400800" y="-457200"/>
+            <a:ext cx="3657600" cy="3657600"/>
+          </a:xfrm>
+          <a:prstGeom prst="ellipse">
+            <a:avLst/>
+          </a:prstGeom>
+          <a:solidFill>
+            <a:srgbClr val="22C55E">
+              <a:alpha val="8000"/>
+            </a:srgbClr>
+          </a:solidFill>
+          <a:ln/>
+        </p:spPr>
+      </p:sp>
+      <p:sp>
+        <p:nvSpPr>
+          <p:cNvPr id="3" name="Shape 1"/>
+          <p:cNvSpPr/>
+          <p:nvPr/>
+        </p:nvSpPr>
+        <p:spPr>
+          <a:xfrm>
+            <a:off x="7315200" y="2286000"/>
+            <a:ext cx="2743200" cy="2743200"/>
+          </a:xfrm>
+          <a:prstGeom prst="ellipse">
+            <a:avLst/>
+          </a:prstGeom>
+          <a:solidFill>
+            <a:srgbClr val="22C55E">
+              <a:alpha val="5000"/>
+            </a:srgbClr>
+          </a:solidFill>
+          <a:ln/>
+        </p:spPr>
+      </p:sp>
+      <p:sp>
+        <p:nvSpPr>
+          <p:cNvPr id="4" name="Shape 2"/>
+          <p:cNvSpPr/>
+          <p:nvPr/>
+        </p:nvSpPr>
+        <p:spPr>
+          <a:xfrm>
             <a:off x="0" y="0"/>
-            <a:ext cx="9144000" cy="54864"/>
+            <a:ext cx="9144000" cy="45720"/>
           </a:xfrm>
           <a:prstGeom prst="rect">
             <a:avLst/>
           </a:prstGeom>
           <a:solidFill>
-            <a:srgbClr val="00BFA6"/>
+            <a:srgbClr val="22C55E"/>
           </a:solidFill>
           <a:ln/>
         </p:spPr>
       </p:sp>
-      <p:sp>
-        <p:nvSpPr>
-          <p:cNvPr id="3" name="Text 1"/>
-          <p:cNvSpPr txBox="1"/>
-          <p:nvPr/>
-        </p:nvSpPr>
-        <p:spPr>
-          <a:xfrm>
-            <a:off x="731520" y="1097280"/>
-            <a:ext cx="2286000" cy="457200"/>
+      <p:pic>
+        <p:nvPicPr>
+          <p:cNvPr id="5" name="Image 0" descr="preencoded.png">    </p:cNvPr>
+          <p:cNvPicPr>
+            <a:picLocks noChangeAspect="1"/>
+          </p:cNvPicPr>
+          <p:nvPr/>
+        </p:nvPicPr>
+        <p:blipFill>
+          <a:blip r:embed="rId1"/>
+          <a:stretch>
+            <a:fillRect/>
+          </a:stretch>
+        </p:blipFill>
+        <p:spPr>
+          <a:xfrm>
+            <a:off x="7132320" y="1097280"/>
+            <a:ext cx="1463040" cy="1463040"/>
+          </a:xfrm>
+          <a:prstGeom prst="rect">
+            <a:avLst/>
+          </a:prstGeom>
+        </p:spPr>
+      </p:pic>
+      <p:sp>
+        <p:nvSpPr>
+          <p:cNvPr id="6" name="Text 3"/>
+          <p:cNvSpPr txBox="1"/>
+          <p:nvPr/>
+        </p:nvSpPr>
+        <p:spPr>
+          <a:xfrm>
+            <a:off x="731520" y="914400"/>
+            <a:ext cx="2286000" cy="365760"/>
           </a:xfrm>
           <a:prstGeom prst="rect">
             <a:avLst/>
@@ -2433,9 +2946,9 @@
               <a:buNone/>
             </a:pPr>
             <a:r>
-              <a:rPr lang="en-US" sz="1400" b="1" spc="400" kern="0" dirty="0">
-                <a:solidFill>
-                  <a:srgbClr val="00BFA6"/>
+              <a:rPr lang="en-US" sz="1300" b="1" spc="400" kern="0" dirty="0">
+                <a:solidFill>
+                  <a:srgbClr val="22C55E"/>
                 </a:solidFill>
                 <a:latin typeface="Calibri" pitchFamily="34" charset="0"/>
                 <a:ea typeface="Calibri" pitchFamily="34" charset="-122"/>
@@ -2443,20 +2956,20 @@
               </a:rPr>
               <a:t>MODULE 5</a:t>
             </a:r>
-            <a:endParaRPr lang="en-US" sz="1400" dirty="0"/>
-          </a:p>
-        </p:txBody>
-      </p:sp>
-      <p:sp>
-        <p:nvSpPr>
-          <p:cNvPr id="4" name="Text 2"/>
-          <p:cNvSpPr txBox="1"/>
-          <p:nvPr/>
-        </p:nvSpPr>
-        <p:spPr>
-          <a:xfrm>
-            <a:off x="731520" y="1645920"/>
-            <a:ext cx="7680960" cy="1463040"/>
+            <a:endParaRPr lang="en-US" sz="1300" dirty="0"/>
+          </a:p>
+        </p:txBody>
+      </p:sp>
+      <p:sp>
+        <p:nvSpPr>
+          <p:cNvPr id="7" name="Text 4"/>
+          <p:cNvSpPr txBox="1"/>
+          <p:nvPr/>
+        </p:nvSpPr>
+        <p:spPr>
+          <a:xfrm>
+            <a:off x="731520" y="1371600"/>
+            <a:ext cx="5943600" cy="1645920"/>
           </a:xfrm>
           <a:prstGeom prst="rect">
             <a:avLst/>
@@ -2488,14 +3001,34 @@
       </p:sp>
       <p:sp>
         <p:nvSpPr>
-          <p:cNvPr id="5" name="Text 3"/>
-          <p:cNvSpPr txBox="1"/>
-          <p:nvPr/>
-        </p:nvSpPr>
-        <p:spPr>
-          <a:xfrm>
-            <a:off x="731520" y="4023360"/>
-            <a:ext cx="2743200" cy="365760"/>
+          <p:cNvPr id="8" name="Shape 5"/>
+          <p:cNvSpPr/>
+          <p:nvPr/>
+        </p:nvSpPr>
+        <p:spPr>
+          <a:xfrm>
+            <a:off x="731520" y="3291840"/>
+            <a:ext cx="1828800" cy="36576"/>
+          </a:xfrm>
+          <a:prstGeom prst="rect">
+            <a:avLst/>
+          </a:prstGeom>
+          <a:solidFill>
+            <a:srgbClr val="22C55E"/>
+          </a:solidFill>
+          <a:ln/>
+        </p:spPr>
+      </p:sp>
+      <p:sp>
+        <p:nvSpPr>
+          <p:cNvPr id="9" name="Text 6"/>
+          <p:cNvSpPr txBox="1"/>
+          <p:nvPr/>
+        </p:nvSpPr>
+        <p:spPr>
+          <a:xfrm>
+            <a:off x="731520" y="3566160"/>
+            <a:ext cx="2743200" cy="320040"/>
           </a:xfrm>
           <a:prstGeom prst="rect">
             <a:avLst/>
@@ -2511,7 +3044,7 @@
               <a:buNone/>
             </a:pPr>
             <a:r>
-              <a:rPr lang="en-US" sz="1200" spc="300" kern="0" dirty="0">
+              <a:rPr lang="en-US" sz="1100" spc="300" kern="0" dirty="0">
                 <a:solidFill>
                   <a:srgbClr val="64748B"/>
                 </a:solidFill>
@@ -2521,20 +3054,20 @@
               </a:rPr>
               <a:t>TEREX ACADEMY</a:t>
             </a:r>
-            <a:endParaRPr lang="en-US" sz="1200" dirty="0"/>
-          </a:p>
-        </p:txBody>
-      </p:sp>
-      <p:sp>
-        <p:nvSpPr>
-          <p:cNvPr id="6" name="Text 4"/>
-          <p:cNvSpPr txBox="1"/>
-          <p:nvPr/>
-        </p:nvSpPr>
-        <p:spPr>
-          <a:xfrm>
-            <a:off x="731520" y="4389120"/>
-            <a:ext cx="3657600" cy="320040"/>
+            <a:endParaRPr lang="en-US" sz="1100" dirty="0"/>
+          </a:p>
+        </p:txBody>
+      </p:sp>
+      <p:sp>
+        <p:nvSpPr>
+          <p:cNvPr id="10" name="Text 7"/>
+          <p:cNvSpPr txBox="1"/>
+          <p:nvPr/>
+        </p:nvSpPr>
+        <p:spPr>
+          <a:xfrm>
+            <a:off x="731520" y="3931920"/>
+            <a:ext cx="3657600" cy="274320"/>
           </a:xfrm>
           <a:prstGeom prst="rect">
             <a:avLst/>
@@ -2598,7 +3131,53 @@
       </p:grpSpPr>
       <p:sp>
         <p:nvSpPr>
-          <p:cNvPr id="2" name="Text 0"/>
+          <p:cNvPr id="2" name="Shape 0"/>
+          <p:cNvSpPr/>
+          <p:nvPr/>
+        </p:nvSpPr>
+        <p:spPr>
+          <a:xfrm>
+            <a:off x="7955280" y="182880"/>
+            <a:ext cx="640080" cy="640080"/>
+          </a:xfrm>
+          <a:prstGeom prst="ellipse">
+            <a:avLst/>
+          </a:prstGeom>
+          <a:solidFill>
+            <a:srgbClr val="22C55E">
+              <a:alpha val="12000"/>
+            </a:srgbClr>
+          </a:solidFill>
+          <a:ln/>
+        </p:spPr>
+      </p:sp>
+      <p:pic>
+        <p:nvPicPr>
+          <p:cNvPr id="3" name="Image 0" descr="preencoded.png">    </p:cNvPr>
+          <p:cNvPicPr>
+            <a:picLocks noChangeAspect="1"/>
+          </p:cNvPicPr>
+          <p:nvPr/>
+        </p:nvPicPr>
+        <p:blipFill>
+          <a:blip r:embed="rId1"/>
+          <a:stretch>
+            <a:fillRect/>
+          </a:stretch>
+        </p:blipFill>
+        <p:spPr>
+          <a:xfrm>
+            <a:off x="8028432" y="256032"/>
+            <a:ext cx="493776" cy="493776"/>
+          </a:xfrm>
+          <a:prstGeom prst="rect">
+            <a:avLst/>
+          </a:prstGeom>
+        </p:spPr>
+      </p:pic>
+      <p:sp>
+        <p:nvSpPr>
+          <p:cNvPr id="4" name="Text 1"/>
           <p:cNvSpPr txBox="1"/>
           <p:nvPr/>
         </p:nvSpPr>
@@ -2633,15 +3212,36 @@
                 <a:ea typeface="Calibri" pitchFamily="34" charset="-122"/>
                 <a:cs typeface="Calibri" pitchFamily="34" charset="-120"/>
               </a:rPr>
-              <a:t>Si Bitcoin est de l'or numérique, Ethereum est un ordinateur mondial décentralisé. Lancé en 2015 par Vitalik Buterin (alors âgé de 21 ans), Ethereum ne se contente pas de transf...</a:t>
+              <a:t>Si Bitcoin est de l'or numérique, Ethereum est un ordinateur mondial décentralisé.</a:t>
             </a:r>
             <a:endParaRPr lang="en-US" sz="1400" dirty="0"/>
           </a:p>
-        </p:txBody>
-      </p:sp>
-      <p:sp>
-        <p:nvSpPr>
-          <p:cNvPr id="3" name="Text 1"/>
+          <a:p>
+            <a:pPr marL="342900" indent="-342900">
+              <a:spcAft>
+                <a:spcPts val="800"/>
+              </a:spcAft>
+              <a:buSzPct val="100000"/>
+              <a:buChar char="•"/>
+            </a:pPr>
+            <a:r>
+              <a:rPr lang="en-US" sz="1400" dirty="0">
+                <a:solidFill>
+                  <a:srgbClr val="FFFFFF"/>
+                </a:solidFill>
+                <a:latin typeface="Calibri" pitchFamily="34" charset="0"/>
+                <a:ea typeface="Calibri" pitchFamily="34" charset="-122"/>
+                <a:cs typeface="Calibri" pitchFamily="34" charset="-120"/>
+              </a:rPr>
+              <a:t>Lancé en 2015 par Vitalik Buterin (alors âgé de 21 ans), Ethereum ne se contente pas de transférer de la valeur : il permet d'exécuter des programmes.</a:t>
+            </a:r>
+            <a:endParaRPr lang="en-US" sz="1400" dirty="0"/>
+          </a:p>
+        </p:txBody>
+      </p:sp>
+      <p:sp>
+        <p:nvSpPr>
+          <p:cNvPr id="5" name="Text 2"/>
           <p:cNvSpPr txBox="1"/>
           <p:nvPr/>
         </p:nvSpPr>
@@ -2672,7 +3272,7 @@
                 <a:ea typeface="Calibri" pitchFamily="34" charset="-122"/>
                 <a:cs typeface="Calibri" pitchFamily="34" charset="-120"/>
               </a:rPr>
-              <a:t>Module 5 — Lecon 2</a:t>
+              <a:t>Module 5 — Leçon 2</a:t>
             </a:r>
             <a:endParaRPr lang="en-US" sz="900" dirty="0"/>
           </a:p>
@@ -2718,8 +3318,8 @@
         </p:nvSpPr>
         <p:spPr>
           <a:xfrm>
-            <a:off x="731520" y="365760"/>
-            <a:ext cx="7680960" cy="548640"/>
+            <a:off x="731520" y="274320"/>
+            <a:ext cx="7680960" cy="502920"/>
           </a:xfrm>
           <a:prstGeom prst="rect">
             <a:avLst/>
@@ -2735,9 +3335,9 @@
               <a:buNone/>
             </a:pPr>
             <a:r>
-              <a:rPr lang="en-US" sz="2200" b="1" dirty="0">
-                <a:solidFill>
-                  <a:srgbClr val="00BFA6"/>
+              <a:rPr lang="en-US" sz="2000" b="1" dirty="0">
+                <a:solidFill>
+                  <a:srgbClr val="22C55E"/>
                 </a:solidFill>
                 <a:latin typeface="Calibri" pitchFamily="34" charset="0"/>
                 <a:ea typeface="Calibri" pitchFamily="34" charset="-122"/>
@@ -2745,7 +3345,7 @@
               </a:rPr>
               <a:t>Le concept clé : le smart contract</a:t>
             </a:r>
-            <a:endParaRPr lang="en-US" sz="2200" dirty="0"/>
+            <a:endParaRPr lang="en-US" sz="2000" dirty="0"/>
           </a:p>
         </p:txBody>
       </p:sp>
@@ -2757,8 +3357,8 @@
         </p:nvSpPr>
         <p:spPr>
           <a:xfrm>
-            <a:off x="731520" y="1051560"/>
-            <a:ext cx="7680960" cy="3657600"/>
+            <a:off x="731520" y="1005840"/>
+            <a:ext cx="4206240" cy="3474720"/>
           </a:xfrm>
           <a:prstGeom prst="rect">
             <a:avLst/>
@@ -2772,13 +3372,13 @@
           <a:p>
             <a:pPr marL="342900" indent="-342900">
               <a:spcAft>
-                <a:spcPts val="800"/>
+                <a:spcPts val="600"/>
               </a:spcAft>
               <a:buSzPct val="100000"/>
               <a:buChar char="•"/>
             </a:pPr>
             <a:r>
-              <a:rPr lang="en-US" sz="1400" dirty="0">
+              <a:rPr lang="en-US" sz="1300" dirty="0">
                 <a:solidFill>
                   <a:srgbClr val="FFFFFF"/>
                 </a:solidFill>
@@ -2786,20 +3386,20 @@
                 <a:ea typeface="Calibri" pitchFamily="34" charset="-122"/>
                 <a:cs typeface="Calibri" pitchFamily="34" charset="-120"/>
               </a:rPr>
-              <a:t>Un smart contract est un programme qui s'exécute automatiquement quand une condition est remplie. Exemple : « Si Ali envoie 100 USDT à ce contrat avant le 31 décembre, alors le ...</a:t>
-            </a:r>
-            <a:endParaRPr lang="en-US" sz="1400" dirty="0"/>
+              <a:t>Un smart contract est un programme qui s'exécute automatiquement quand une condition est remplie. Exemple : « Si Ali ...</a:t>
+            </a:r>
+            <a:endParaRPr lang="en-US" sz="1300" dirty="0"/>
           </a:p>
           <a:p>
             <a:pPr marL="342900" indent="-342900">
               <a:spcAft>
-                <a:spcPts val="800"/>
+                <a:spcPts val="600"/>
               </a:spcAft>
               <a:buSzPct val="100000"/>
               <a:buChar char="•"/>
             </a:pPr>
             <a:r>
-              <a:rPr lang="en-US" sz="1400" dirty="0">
+              <a:rPr lang="en-US" sz="1300" dirty="0">
                 <a:solidFill>
                   <a:srgbClr val="FFFFFF"/>
                 </a:solidFill>
@@ -2809,18 +3409,18 @@
               </a:rPr>
               <a:t>Une fois déployé, ce programme :</a:t>
             </a:r>
-            <a:endParaRPr lang="en-US" sz="1400" dirty="0"/>
+            <a:endParaRPr lang="en-US" sz="1300" dirty="0"/>
           </a:p>
           <a:p>
             <a:pPr marL="342900" indent="-342900">
               <a:spcAft>
-                <a:spcPts val="800"/>
+                <a:spcPts val="600"/>
               </a:spcAft>
               <a:buSzPct val="100000"/>
               <a:buChar char="•"/>
             </a:pPr>
             <a:r>
-              <a:rPr lang="en-US" sz="1400" dirty="0">
+              <a:rPr lang="en-US" sz="1300" dirty="0">
                 <a:solidFill>
                   <a:srgbClr val="FFFFFF"/>
                 </a:solidFill>
@@ -2830,18 +3430,82 @@
               </a:rPr>
               <a:t>Fonctionne sans intermédiaire.</a:t>
             </a:r>
-            <a:endParaRPr lang="en-US" sz="1400" dirty="0"/>
-          </a:p>
-          <a:p>
-            <a:pPr marL="342900" indent="-342900">
-              <a:spcAft>
-                <a:spcPts val="800"/>
-              </a:spcAft>
-              <a:buSzPct val="100000"/>
-              <a:buChar char="•"/>
-            </a:pPr>
-            <a:r>
-              <a:rPr lang="en-US" sz="1400" dirty="0">
+            <a:endParaRPr lang="en-US" sz="1300" dirty="0"/>
+          </a:p>
+        </p:txBody>
+      </p:sp>
+      <p:sp>
+        <p:nvSpPr>
+          <p:cNvPr id="4" name="Shape 2"/>
+          <p:cNvSpPr/>
+          <p:nvPr/>
+        </p:nvSpPr>
+        <p:spPr>
+          <a:xfrm>
+            <a:off x="5120640" y="1005840"/>
+            <a:ext cx="3474720" cy="640080"/>
+          </a:xfrm>
+          <a:prstGeom prst="roundRect">
+            <a:avLst>
+              <a:gd name="adj" fmla="val 14286"/>
+            </a:avLst>
+          </a:prstGeom>
+          <a:solidFill>
+            <a:srgbClr val="1A2332"/>
+          </a:solidFill>
+          <a:ln/>
+        </p:spPr>
+      </p:sp>
+      <p:pic>
+        <p:nvPicPr>
+          <p:cNvPr id="5" name="Image 0" descr="preencoded.png">    </p:cNvPr>
+          <p:cNvPicPr>
+            <a:picLocks noChangeAspect="1"/>
+          </p:cNvPicPr>
+          <p:nvPr/>
+        </p:nvPicPr>
+        <p:blipFill>
+          <a:blip r:embed="rId1"/>
+          <a:stretch>
+            <a:fillRect/>
+          </a:stretch>
+        </p:blipFill>
+        <p:spPr>
+          <a:xfrm>
+            <a:off x="5257800" y="1106424"/>
+            <a:ext cx="438912" cy="438912"/>
+          </a:xfrm>
+          <a:prstGeom prst="rect">
+            <a:avLst/>
+          </a:prstGeom>
+        </p:spPr>
+      </p:pic>
+      <p:sp>
+        <p:nvSpPr>
+          <p:cNvPr id="6" name="Text 3"/>
+          <p:cNvSpPr txBox="1"/>
+          <p:nvPr/>
+        </p:nvSpPr>
+        <p:spPr>
+          <a:xfrm>
+            <a:off x="5806440" y="1005840"/>
+            <a:ext cx="2651760" cy="640080"/>
+          </a:xfrm>
+          <a:prstGeom prst="rect">
+            <a:avLst/>
+          </a:prstGeom>
+          <a:noFill/>
+          <a:ln/>
+        </p:spPr>
+        <p:txBody>
+          <a:bodyPr wrap="square" lIns="0" tIns="0" rIns="0" bIns="0" rtlCol="0" anchor="ctr"/>
+          <a:lstStyle/>
+          <a:p>
+            <a:pPr indent="0" marL="0">
+              <a:buNone/>
+            </a:pPr>
+            <a:r>
+              <a:rPr lang="en-US" sz="1200" dirty="0">
                 <a:solidFill>
                   <a:srgbClr val="FFFFFF"/>
                 </a:solidFill>
@@ -2851,18 +3515,82 @@
               </a:rPr>
               <a:t>Ne peut pas être modifié.</a:t>
             </a:r>
-            <a:endParaRPr lang="en-US" sz="1400" dirty="0"/>
-          </a:p>
-          <a:p>
-            <a:pPr marL="342900" indent="-342900">
-              <a:spcAft>
-                <a:spcPts val="800"/>
-              </a:spcAft>
-              <a:buSzPct val="100000"/>
-              <a:buChar char="•"/>
-            </a:pPr>
-            <a:r>
-              <a:rPr lang="en-US" sz="1400" dirty="0">
+            <a:endParaRPr lang="en-US" sz="1200" dirty="0"/>
+          </a:p>
+        </p:txBody>
+      </p:sp>
+      <p:sp>
+        <p:nvSpPr>
+          <p:cNvPr id="7" name="Shape 4"/>
+          <p:cNvSpPr/>
+          <p:nvPr/>
+        </p:nvSpPr>
+        <p:spPr>
+          <a:xfrm>
+            <a:off x="5120640" y="1737360"/>
+            <a:ext cx="3474720" cy="640080"/>
+          </a:xfrm>
+          <a:prstGeom prst="roundRect">
+            <a:avLst>
+              <a:gd name="adj" fmla="val 14286"/>
+            </a:avLst>
+          </a:prstGeom>
+          <a:solidFill>
+            <a:srgbClr val="1A2332"/>
+          </a:solidFill>
+          <a:ln/>
+        </p:spPr>
+      </p:sp>
+      <p:pic>
+        <p:nvPicPr>
+          <p:cNvPr id="8" name="Image 1" descr="preencoded.png">    </p:cNvPr>
+          <p:cNvPicPr>
+            <a:picLocks noChangeAspect="1"/>
+          </p:cNvPicPr>
+          <p:nvPr/>
+        </p:nvPicPr>
+        <p:blipFill>
+          <a:blip r:embed="rId2"/>
+          <a:stretch>
+            <a:fillRect/>
+          </a:stretch>
+        </p:blipFill>
+        <p:spPr>
+          <a:xfrm>
+            <a:off x="5257800" y="1837944"/>
+            <a:ext cx="438912" cy="438912"/>
+          </a:xfrm>
+          <a:prstGeom prst="rect">
+            <a:avLst/>
+          </a:prstGeom>
+        </p:spPr>
+      </p:pic>
+      <p:sp>
+        <p:nvSpPr>
+          <p:cNvPr id="9" name="Text 5"/>
+          <p:cNvSpPr txBox="1"/>
+          <p:nvPr/>
+        </p:nvSpPr>
+        <p:spPr>
+          <a:xfrm>
+            <a:off x="5806440" y="1737360"/>
+            <a:ext cx="2651760" cy="640080"/>
+          </a:xfrm>
+          <a:prstGeom prst="rect">
+            <a:avLst/>
+          </a:prstGeom>
+          <a:noFill/>
+          <a:ln/>
+        </p:spPr>
+        <p:txBody>
+          <a:bodyPr wrap="square" lIns="0" tIns="0" rIns="0" bIns="0" rtlCol="0" anchor="ctr"/>
+          <a:lstStyle/>
+          <a:p>
+            <a:pPr indent="0" marL="0">
+              <a:buNone/>
+            </a:pPr>
+            <a:r>
+              <a:rPr lang="en-US" sz="1200" dirty="0">
                 <a:solidFill>
                   <a:srgbClr val="FFFFFF"/>
                 </a:solidFill>
@@ -2872,46 +3600,7 @@
               </a:rPr>
               <a:t>Ne peut pas être arrêté (sauf s'il a été programmé pour ça).</a:t>
             </a:r>
-            <a:endParaRPr lang="en-US" sz="1400" dirty="0"/>
-          </a:p>
-        </p:txBody>
-      </p:sp>
-      <p:sp>
-        <p:nvSpPr>
-          <p:cNvPr id="4" name="Text 2"/>
-          <p:cNvSpPr txBox="1"/>
-          <p:nvPr/>
-        </p:nvSpPr>
-        <p:spPr>
-          <a:xfrm>
-            <a:off x="731520" y="4709160"/>
-            <a:ext cx="7680960" cy="274320"/>
-          </a:xfrm>
-          <a:prstGeom prst="rect">
-            <a:avLst/>
-          </a:prstGeom>
-          <a:noFill/>
-          <a:ln/>
-        </p:spPr>
-        <p:txBody>
-          <a:bodyPr wrap="square" lIns="0" tIns="0" rIns="0" bIns="0" rtlCol="0" anchor="ctr"/>
-          <a:lstStyle/>
-          <a:p>
-            <a:pPr algn="r" indent="0" marL="0">
-              <a:buNone/>
-            </a:pPr>
-            <a:r>
-              <a:rPr lang="en-US" sz="900" dirty="0">
-                <a:solidFill>
-                  <a:srgbClr val="64748B"/>
-                </a:solidFill>
-                <a:latin typeface="Calibri" pitchFamily="34" charset="0"/>
-                <a:ea typeface="Calibri" pitchFamily="34" charset="-122"/>
-                <a:cs typeface="Calibri" pitchFamily="34" charset="-120"/>
-              </a:rPr>
-              <a:t>Module 5 — Lecon 2</a:t>
-            </a:r>
-            <a:endParaRPr lang="en-US" sz="900" dirty="0"/>
+            <a:endParaRPr lang="en-US" sz="1200" dirty="0"/>
           </a:p>
         </p:txBody>
       </p:sp>
@@ -2949,14 +3638,60 @@
       </p:grpSpPr>
       <p:sp>
         <p:nvSpPr>
-          <p:cNvPr id="2" name="Text 0"/>
-          <p:cNvSpPr txBox="1"/>
-          <p:nvPr/>
-        </p:nvSpPr>
-        <p:spPr>
-          <a:xfrm>
-            <a:off x="731520" y="365760"/>
-            <a:ext cx="7680960" cy="548640"/>
+          <p:cNvPr id="2" name="Shape 0"/>
+          <p:cNvSpPr/>
+          <p:nvPr/>
+        </p:nvSpPr>
+        <p:spPr>
+          <a:xfrm>
+            <a:off x="7955280" y="182880"/>
+            <a:ext cx="640080" cy="640080"/>
+          </a:xfrm>
+          <a:prstGeom prst="ellipse">
+            <a:avLst/>
+          </a:prstGeom>
+          <a:solidFill>
+            <a:srgbClr val="22C55E">
+              <a:alpha val="12000"/>
+            </a:srgbClr>
+          </a:solidFill>
+          <a:ln/>
+        </p:spPr>
+      </p:sp>
+      <p:pic>
+        <p:nvPicPr>
+          <p:cNvPr id="3" name="Image 0" descr="preencoded.png">    </p:cNvPr>
+          <p:cNvPicPr>
+            <a:picLocks noChangeAspect="1"/>
+          </p:cNvPicPr>
+          <p:nvPr/>
+        </p:nvPicPr>
+        <p:blipFill>
+          <a:blip r:embed="rId1"/>
+          <a:stretch>
+            <a:fillRect/>
+          </a:stretch>
+        </p:blipFill>
+        <p:spPr>
+          <a:xfrm>
+            <a:off x="8028432" y="256032"/>
+            <a:ext cx="493776" cy="493776"/>
+          </a:xfrm>
+          <a:prstGeom prst="rect">
+            <a:avLst/>
+          </a:prstGeom>
+        </p:spPr>
+      </p:pic>
+      <p:sp>
+        <p:nvSpPr>
+          <p:cNvPr id="4" name="Text 1"/>
+          <p:cNvSpPr txBox="1"/>
+          <p:nvPr/>
+        </p:nvSpPr>
+        <p:spPr>
+          <a:xfrm>
+            <a:off x="731520" y="274320"/>
+            <a:ext cx="7132320" cy="502920"/>
           </a:xfrm>
           <a:prstGeom prst="rect">
             <a:avLst/>
@@ -2972,9 +3707,9 @@
               <a:buNone/>
             </a:pPr>
             <a:r>
-              <a:rPr lang="en-US" sz="2200" b="1" dirty="0">
-                <a:solidFill>
-                  <a:srgbClr val="00BFA6"/>
+              <a:rPr lang="en-US" sz="2000" b="1" dirty="0">
+                <a:solidFill>
+                  <a:srgbClr val="22C55E"/>
                 </a:solidFill>
                 <a:latin typeface="Calibri" pitchFamily="34" charset="0"/>
                 <a:ea typeface="Calibri" pitchFamily="34" charset="-122"/>
@@ -2982,19 +3717,19 @@
               </a:rPr>
               <a:t>Ce que ça a permis de créer :</a:t>
             </a:r>
-            <a:endParaRPr lang="en-US" sz="2200" dirty="0"/>
-          </a:p>
-        </p:txBody>
-      </p:sp>
-      <p:sp>
-        <p:nvSpPr>
-          <p:cNvPr id="3" name="Text 1"/>
-          <p:cNvSpPr txBox="1"/>
-          <p:nvPr/>
-        </p:nvSpPr>
-        <p:spPr>
-          <a:xfrm>
-            <a:off x="731520" y="1051560"/>
+            <a:endParaRPr lang="en-US" sz="2000" dirty="0"/>
+          </a:p>
+        </p:txBody>
+      </p:sp>
+      <p:sp>
+        <p:nvSpPr>
+          <p:cNvPr id="5" name="Text 2"/>
+          <p:cNvSpPr txBox="1"/>
+          <p:nvPr/>
+        </p:nvSpPr>
+        <p:spPr>
+          <a:xfrm>
+            <a:off x="731520" y="960120"/>
             <a:ext cx="7680960" cy="3657600"/>
           </a:xfrm>
           <a:prstGeom prst="rect">
@@ -3157,7 +3892,7 @@
       </p:sp>
       <p:sp>
         <p:nvSpPr>
-          <p:cNvPr id="4" name="Text 2"/>
+          <p:cNvPr id="6" name="Text 3"/>
           <p:cNvSpPr txBox="1"/>
           <p:nvPr/>
         </p:nvSpPr>
@@ -3188,7 +3923,7 @@
                 <a:ea typeface="Calibri" pitchFamily="34" charset="-122"/>
                 <a:cs typeface="Calibri" pitchFamily="34" charset="-120"/>
               </a:rPr>
-              <a:t>Module 5 — Lecon 2</a:t>
+              <a:t>Module 5 — Leçon 2</a:t>
             </a:r>
             <a:endParaRPr lang="en-US" sz="900" dirty="0"/>
           </a:p>
@@ -3226,16 +3961,40 @@
           <a:chExt cx="0" cy="0"/>
         </a:xfrm>
       </p:grpSpPr>
-      <p:sp>
-        <p:nvSpPr>
-          <p:cNvPr id="2" name="Text 0"/>
-          <p:cNvSpPr txBox="1"/>
-          <p:nvPr/>
-        </p:nvSpPr>
-        <p:spPr>
-          <a:xfrm>
-            <a:off x="731520" y="457200"/>
-            <a:ext cx="2743200" cy="365760"/>
+      <p:pic>
+        <p:nvPicPr>
+          <p:cNvPr id="2" name="Image 0" descr="preencoded.png">    </p:cNvPr>
+          <p:cNvPicPr>
+            <a:picLocks noChangeAspect="1"/>
+          </p:cNvPicPr>
+          <p:nvPr/>
+        </p:nvPicPr>
+        <p:blipFill>
+          <a:blip r:embed="rId1"/>
+          <a:stretch>
+            <a:fillRect/>
+          </a:stretch>
+        </p:blipFill>
+        <p:spPr>
+          <a:xfrm>
+            <a:off x="731520" y="320040"/>
+            <a:ext cx="457200" cy="457200"/>
+          </a:xfrm>
+          <a:prstGeom prst="rect">
+            <a:avLst/>
+          </a:prstGeom>
+        </p:spPr>
+      </p:pic>
+      <p:sp>
+        <p:nvSpPr>
+          <p:cNvPr id="3" name="Text 0"/>
+          <p:cNvSpPr txBox="1"/>
+          <p:nvPr/>
+        </p:nvSpPr>
+        <p:spPr>
+          <a:xfrm>
+            <a:off x="1280160" y="365760"/>
+            <a:ext cx="2743200" cy="320040"/>
           </a:xfrm>
           <a:prstGeom prst="rect">
             <a:avLst/>
@@ -3267,14 +4026,14 @@
       </p:sp>
       <p:sp>
         <p:nvSpPr>
-          <p:cNvPr id="3" name="Text 1"/>
-          <p:cNvSpPr txBox="1"/>
-          <p:nvPr/>
-        </p:nvSpPr>
-        <p:spPr>
-          <a:xfrm>
-            <a:off x="731520" y="868680"/>
-            <a:ext cx="7680960" cy="502920"/>
+          <p:cNvPr id="4" name="Text 1"/>
+          <p:cNvSpPr txBox="1"/>
+          <p:nvPr/>
+        </p:nvSpPr>
+        <p:spPr>
+          <a:xfrm>
+            <a:off x="731520" y="822960"/>
+            <a:ext cx="7680960" cy="457200"/>
           </a:xfrm>
           <a:prstGeom prst="rect">
             <a:avLst/>
@@ -3290,7 +4049,7 @@
               <a:buNone/>
             </a:pPr>
             <a:r>
-              <a:rPr lang="en-US" sz="2200" b="1" dirty="0">
+              <a:rPr lang="en-US" sz="2000" b="1" dirty="0">
                 <a:solidFill>
                   <a:srgbClr val="FFFFFF"/>
                 </a:solidFill>
@@ -3300,28 +4059,50 @@
               </a:rPr>
               <a:t>Ethereum (ETH) — l'ordinateur mondial</a:t>
             </a:r>
-            <a:endParaRPr lang="en-US" sz="2200" dirty="0"/>
-          </a:p>
-        </p:txBody>
-      </p:sp>
-      <p:sp>
-        <p:nvSpPr>
-          <p:cNvPr id="4" name="Text 2"/>
-          <p:cNvSpPr txBox="1"/>
-          <p:nvPr/>
-        </p:nvSpPr>
-        <p:spPr>
-          <a:xfrm>
-            <a:off x="731520" y="1554480"/>
-            <a:ext cx="457200" cy="548640"/>
+            <a:endParaRPr lang="en-US" sz="2000" dirty="0"/>
+          </a:p>
+        </p:txBody>
+      </p:sp>
+      <p:sp>
+        <p:nvSpPr>
+          <p:cNvPr id="5" name="Shape 2"/>
+          <p:cNvSpPr/>
+          <p:nvPr/>
+        </p:nvSpPr>
+        <p:spPr>
+          <a:xfrm>
+            <a:off x="731520" y="1463040"/>
+            <a:ext cx="7680960" cy="548640"/>
           </a:xfrm>
           <a:prstGeom prst="roundRect">
             <a:avLst>
-              <a:gd name="adj" fmla="val 50000"/>
+              <a:gd name="adj" fmla="val 13333"/>
             </a:avLst>
           </a:prstGeom>
           <a:solidFill>
-            <a:srgbClr val="00BFA6"/>
+            <a:srgbClr val="0F1419"/>
+          </a:solidFill>
+          <a:ln/>
+        </p:spPr>
+      </p:sp>
+      <p:sp>
+        <p:nvSpPr>
+          <p:cNvPr id="6" name="Text 3"/>
+          <p:cNvSpPr txBox="1"/>
+          <p:nvPr/>
+        </p:nvSpPr>
+        <p:spPr>
+          <a:xfrm>
+            <a:off x="914400" y="1463040"/>
+            <a:ext cx="411480" cy="548640"/>
+          </a:xfrm>
+          <a:prstGeom prst="roundRect">
+            <a:avLst>
+              <a:gd name="adj" fmla="val 48889"/>
+            </a:avLst>
+          </a:prstGeom>
+          <a:solidFill>
+            <a:srgbClr val="22C55E"/>
           </a:solidFill>
           <a:ln/>
         </p:spPr>
@@ -3333,7 +4114,7 @@
               <a:buNone/>
             </a:pPr>
             <a:r>
-              <a:rPr lang="en-US" sz="1600" b="1" dirty="0">
+              <a:rPr lang="en-US" sz="1500" b="1" dirty="0">
                 <a:solidFill>
                   <a:srgbClr val="0F1419"/>
                 </a:solidFill>
@@ -3343,20 +4124,20 @@
               </a:rPr>
               <a:t>1</a:t>
             </a:r>
-            <a:endParaRPr lang="en-US" sz="1600" dirty="0"/>
-          </a:p>
-        </p:txBody>
-      </p:sp>
-      <p:sp>
-        <p:nvSpPr>
-          <p:cNvPr id="5" name="Text 3"/>
-          <p:cNvSpPr txBox="1"/>
-          <p:nvPr/>
-        </p:nvSpPr>
-        <p:spPr>
-          <a:xfrm>
-            <a:off x="1371600" y="1554480"/>
-            <a:ext cx="7040880" cy="548640"/>
+            <a:endParaRPr lang="en-US" sz="1500" dirty="0"/>
+          </a:p>
+        </p:txBody>
+      </p:sp>
+      <p:sp>
+        <p:nvSpPr>
+          <p:cNvPr id="7" name="Text 4"/>
+          <p:cNvSpPr txBox="1"/>
+          <p:nvPr/>
+        </p:nvSpPr>
+        <p:spPr>
+          <a:xfrm>
+            <a:off x="1508760" y="1463040"/>
+            <a:ext cx="6766560" cy="548640"/>
           </a:xfrm>
           <a:prstGeom prst="rect">
             <a:avLst/>
@@ -3372,7 +4153,7 @@
               <a:buNone/>
             </a:pPr>
             <a:r>
-              <a:rPr lang="en-US" sz="1400" dirty="0">
+              <a:rPr lang="en-US" sz="1300" dirty="0">
                 <a:solidFill>
                   <a:srgbClr val="FFFFFF"/>
                 </a:solidFill>
@@ -3382,28 +4163,50 @@
               </a:rPr>
               <a:t>Fonctionne sans intermédiaire.</a:t>
             </a:r>
-            <a:endParaRPr lang="en-US" sz="1400" dirty="0"/>
-          </a:p>
-        </p:txBody>
-      </p:sp>
-      <p:sp>
-        <p:nvSpPr>
-          <p:cNvPr id="6" name="Text 4"/>
-          <p:cNvSpPr txBox="1"/>
-          <p:nvPr/>
-        </p:nvSpPr>
-        <p:spPr>
-          <a:xfrm>
-            <a:off x="731520" y="2212848"/>
-            <a:ext cx="457200" cy="548640"/>
+            <a:endParaRPr lang="en-US" sz="1300" dirty="0"/>
+          </a:p>
+        </p:txBody>
+      </p:sp>
+      <p:sp>
+        <p:nvSpPr>
+          <p:cNvPr id="8" name="Shape 5"/>
+          <p:cNvSpPr/>
+          <p:nvPr/>
+        </p:nvSpPr>
+        <p:spPr>
+          <a:xfrm>
+            <a:off x="731520" y="2103120"/>
+            <a:ext cx="7680960" cy="548640"/>
           </a:xfrm>
           <a:prstGeom prst="roundRect">
             <a:avLst>
-              <a:gd name="adj" fmla="val 50000"/>
+              <a:gd name="adj" fmla="val 13333"/>
             </a:avLst>
           </a:prstGeom>
           <a:solidFill>
-            <a:srgbClr val="00BFA6"/>
+            <a:srgbClr val="0F1419"/>
+          </a:solidFill>
+          <a:ln/>
+        </p:spPr>
+      </p:sp>
+      <p:sp>
+        <p:nvSpPr>
+          <p:cNvPr id="9" name="Text 6"/>
+          <p:cNvSpPr txBox="1"/>
+          <p:nvPr/>
+        </p:nvSpPr>
+        <p:spPr>
+          <a:xfrm>
+            <a:off x="914400" y="2103120"/>
+            <a:ext cx="411480" cy="548640"/>
+          </a:xfrm>
+          <a:prstGeom prst="roundRect">
+            <a:avLst>
+              <a:gd name="adj" fmla="val 48889"/>
+            </a:avLst>
+          </a:prstGeom>
+          <a:solidFill>
+            <a:srgbClr val="22C55E"/>
           </a:solidFill>
           <a:ln/>
         </p:spPr>
@@ -3415,7 +4218,7 @@
               <a:buNone/>
             </a:pPr>
             <a:r>
-              <a:rPr lang="en-US" sz="1600" b="1" dirty="0">
+              <a:rPr lang="en-US" sz="1500" b="1" dirty="0">
                 <a:solidFill>
                   <a:srgbClr val="0F1419"/>
                 </a:solidFill>
@@ -3425,20 +4228,20 @@
               </a:rPr>
               <a:t>2</a:t>
             </a:r>
-            <a:endParaRPr lang="en-US" sz="1600" dirty="0"/>
-          </a:p>
-        </p:txBody>
-      </p:sp>
-      <p:sp>
-        <p:nvSpPr>
-          <p:cNvPr id="7" name="Text 5"/>
-          <p:cNvSpPr txBox="1"/>
-          <p:nvPr/>
-        </p:nvSpPr>
-        <p:spPr>
-          <a:xfrm>
-            <a:off x="1371600" y="2212848"/>
-            <a:ext cx="7040880" cy="548640"/>
+            <a:endParaRPr lang="en-US" sz="1500" dirty="0"/>
+          </a:p>
+        </p:txBody>
+      </p:sp>
+      <p:sp>
+        <p:nvSpPr>
+          <p:cNvPr id="10" name="Text 7"/>
+          <p:cNvSpPr txBox="1"/>
+          <p:nvPr/>
+        </p:nvSpPr>
+        <p:spPr>
+          <a:xfrm>
+            <a:off x="1508760" y="2103120"/>
+            <a:ext cx="6766560" cy="548640"/>
           </a:xfrm>
           <a:prstGeom prst="rect">
             <a:avLst/>
@@ -3454,7 +4257,7 @@
               <a:buNone/>
             </a:pPr>
             <a:r>
-              <a:rPr lang="en-US" sz="1400" dirty="0">
+              <a:rPr lang="en-US" sz="1300" dirty="0">
                 <a:solidFill>
                   <a:srgbClr val="FFFFFF"/>
                 </a:solidFill>
@@ -3464,28 +4267,50 @@
               </a:rPr>
               <a:t>Ne peut pas être modifié.</a:t>
             </a:r>
-            <a:endParaRPr lang="en-US" sz="1400" dirty="0"/>
-          </a:p>
-        </p:txBody>
-      </p:sp>
-      <p:sp>
-        <p:nvSpPr>
-          <p:cNvPr id="8" name="Text 6"/>
-          <p:cNvSpPr txBox="1"/>
-          <p:nvPr/>
-        </p:nvSpPr>
-        <p:spPr>
-          <a:xfrm>
-            <a:off x="731520" y="2871216"/>
-            <a:ext cx="457200" cy="548640"/>
+            <a:endParaRPr lang="en-US" sz="1300" dirty="0"/>
+          </a:p>
+        </p:txBody>
+      </p:sp>
+      <p:sp>
+        <p:nvSpPr>
+          <p:cNvPr id="11" name="Shape 8"/>
+          <p:cNvSpPr/>
+          <p:nvPr/>
+        </p:nvSpPr>
+        <p:spPr>
+          <a:xfrm>
+            <a:off x="731520" y="2743200"/>
+            <a:ext cx="7680960" cy="548640"/>
           </a:xfrm>
           <a:prstGeom prst="roundRect">
             <a:avLst>
-              <a:gd name="adj" fmla="val 50000"/>
+              <a:gd name="adj" fmla="val 13333"/>
             </a:avLst>
           </a:prstGeom>
           <a:solidFill>
-            <a:srgbClr val="00BFA6"/>
+            <a:srgbClr val="0F1419"/>
+          </a:solidFill>
+          <a:ln/>
+        </p:spPr>
+      </p:sp>
+      <p:sp>
+        <p:nvSpPr>
+          <p:cNvPr id="12" name="Text 9"/>
+          <p:cNvSpPr txBox="1"/>
+          <p:nvPr/>
+        </p:nvSpPr>
+        <p:spPr>
+          <a:xfrm>
+            <a:off x="914400" y="2743200"/>
+            <a:ext cx="411480" cy="548640"/>
+          </a:xfrm>
+          <a:prstGeom prst="roundRect">
+            <a:avLst>
+              <a:gd name="adj" fmla="val 48889"/>
+            </a:avLst>
+          </a:prstGeom>
+          <a:solidFill>
+            <a:srgbClr val="22C55E"/>
           </a:solidFill>
           <a:ln/>
         </p:spPr>
@@ -3497,7 +4322,7 @@
               <a:buNone/>
             </a:pPr>
             <a:r>
-              <a:rPr lang="en-US" sz="1600" b="1" dirty="0">
+              <a:rPr lang="en-US" sz="1500" b="1" dirty="0">
                 <a:solidFill>
                   <a:srgbClr val="0F1419"/>
                 </a:solidFill>
@@ -3507,20 +4332,20 @@
               </a:rPr>
               <a:t>3</a:t>
             </a:r>
-            <a:endParaRPr lang="en-US" sz="1600" dirty="0"/>
-          </a:p>
-        </p:txBody>
-      </p:sp>
-      <p:sp>
-        <p:nvSpPr>
-          <p:cNvPr id="9" name="Text 7"/>
-          <p:cNvSpPr txBox="1"/>
-          <p:nvPr/>
-        </p:nvSpPr>
-        <p:spPr>
-          <a:xfrm>
-            <a:off x="1371600" y="2871216"/>
-            <a:ext cx="7040880" cy="548640"/>
+            <a:endParaRPr lang="en-US" sz="1500" dirty="0"/>
+          </a:p>
+        </p:txBody>
+      </p:sp>
+      <p:sp>
+        <p:nvSpPr>
+          <p:cNvPr id="13" name="Text 10"/>
+          <p:cNvSpPr txBox="1"/>
+          <p:nvPr/>
+        </p:nvSpPr>
+        <p:spPr>
+          <a:xfrm>
+            <a:off x="1508760" y="2743200"/>
+            <a:ext cx="6766560" cy="548640"/>
           </a:xfrm>
           <a:prstGeom prst="rect">
             <a:avLst/>
@@ -3536,7 +4361,7 @@
               <a:buNone/>
             </a:pPr>
             <a:r>
-              <a:rPr lang="en-US" sz="1400" dirty="0">
+              <a:rPr lang="en-US" sz="1300" dirty="0">
                 <a:solidFill>
                   <a:srgbClr val="FFFFFF"/>
                 </a:solidFill>
@@ -3546,28 +4371,50 @@
               </a:rPr>
               <a:t>Ne peut pas être arrêté (sauf s'il a été programmé pour ça).</a:t>
             </a:r>
-            <a:endParaRPr lang="en-US" sz="1400" dirty="0"/>
-          </a:p>
-        </p:txBody>
-      </p:sp>
-      <p:sp>
-        <p:nvSpPr>
-          <p:cNvPr id="10" name="Text 8"/>
-          <p:cNvSpPr txBox="1"/>
-          <p:nvPr/>
-        </p:nvSpPr>
-        <p:spPr>
-          <a:xfrm>
-            <a:off x="731520" y="3529584"/>
-            <a:ext cx="457200" cy="548640"/>
+            <a:endParaRPr lang="en-US" sz="1300" dirty="0"/>
+          </a:p>
+        </p:txBody>
+      </p:sp>
+      <p:sp>
+        <p:nvSpPr>
+          <p:cNvPr id="14" name="Shape 11"/>
+          <p:cNvSpPr/>
+          <p:nvPr/>
+        </p:nvSpPr>
+        <p:spPr>
+          <a:xfrm>
+            <a:off x="731520" y="3383280"/>
+            <a:ext cx="7680960" cy="548640"/>
           </a:xfrm>
           <a:prstGeom prst="roundRect">
             <a:avLst>
-              <a:gd name="adj" fmla="val 50000"/>
+              <a:gd name="adj" fmla="val 13333"/>
             </a:avLst>
           </a:prstGeom>
           <a:solidFill>
-            <a:srgbClr val="00BFA6"/>
+            <a:srgbClr val="0F1419"/>
+          </a:solidFill>
+          <a:ln/>
+        </p:spPr>
+      </p:sp>
+      <p:sp>
+        <p:nvSpPr>
+          <p:cNvPr id="15" name="Text 12"/>
+          <p:cNvSpPr txBox="1"/>
+          <p:nvPr/>
+        </p:nvSpPr>
+        <p:spPr>
+          <a:xfrm>
+            <a:off x="914400" y="3383280"/>
+            <a:ext cx="411480" cy="548640"/>
+          </a:xfrm>
+          <a:prstGeom prst="roundRect">
+            <a:avLst>
+              <a:gd name="adj" fmla="val 48889"/>
+            </a:avLst>
+          </a:prstGeom>
+          <a:solidFill>
+            <a:srgbClr val="22C55E"/>
           </a:solidFill>
           <a:ln/>
         </p:spPr>
@@ -3579,7 +4426,7 @@
               <a:buNone/>
             </a:pPr>
             <a:r>
-              <a:rPr lang="en-US" sz="1600" b="1" dirty="0">
+              <a:rPr lang="en-US" sz="1500" b="1" dirty="0">
                 <a:solidFill>
                   <a:srgbClr val="0F1419"/>
                 </a:solidFill>
@@ -3589,20 +4436,20 @@
               </a:rPr>
               <a:t>4</a:t>
             </a:r>
-            <a:endParaRPr lang="en-US" sz="1600" dirty="0"/>
-          </a:p>
-        </p:txBody>
-      </p:sp>
-      <p:sp>
-        <p:nvSpPr>
-          <p:cNvPr id="11" name="Text 9"/>
-          <p:cNvSpPr txBox="1"/>
-          <p:nvPr/>
-        </p:nvSpPr>
-        <p:spPr>
-          <a:xfrm>
-            <a:off x="1371600" y="3529584"/>
-            <a:ext cx="7040880" cy="548640"/>
+            <a:endParaRPr lang="en-US" sz="1500" dirty="0"/>
+          </a:p>
+        </p:txBody>
+      </p:sp>
+      <p:sp>
+        <p:nvSpPr>
+          <p:cNvPr id="16" name="Text 13"/>
+          <p:cNvSpPr txBox="1"/>
+          <p:nvPr/>
+        </p:nvSpPr>
+        <p:spPr>
+          <a:xfrm>
+            <a:off x="1508760" y="3383280"/>
+            <a:ext cx="6766560" cy="548640"/>
           </a:xfrm>
           <a:prstGeom prst="rect">
             <a:avLst/>
@@ -3618,7 +4465,7 @@
               <a:buNone/>
             </a:pPr>
             <a:r>
-              <a:rPr lang="en-US" sz="1400" dirty="0">
+              <a:rPr lang="en-US" sz="1300" dirty="0">
                 <a:solidFill>
                   <a:srgbClr val="FFFFFF"/>
                 </a:solidFill>
@@ -3628,28 +4475,50 @@
               </a:rPr>
               <a:t>Les stablecoins comme USDT : un smart contract qui garantit qu'un token vaut toujours 1 dollar.</a:t>
             </a:r>
-            <a:endParaRPr lang="en-US" sz="1400" dirty="0"/>
-          </a:p>
-        </p:txBody>
-      </p:sp>
-      <p:sp>
-        <p:nvSpPr>
-          <p:cNvPr id="12" name="Text 10"/>
-          <p:cNvSpPr txBox="1"/>
-          <p:nvPr/>
-        </p:nvSpPr>
-        <p:spPr>
-          <a:xfrm>
-            <a:off x="731520" y="4187952"/>
-            <a:ext cx="457200" cy="548640"/>
+            <a:endParaRPr lang="en-US" sz="1300" dirty="0"/>
+          </a:p>
+        </p:txBody>
+      </p:sp>
+      <p:sp>
+        <p:nvSpPr>
+          <p:cNvPr id="17" name="Shape 14"/>
+          <p:cNvSpPr/>
+          <p:nvPr/>
+        </p:nvSpPr>
+        <p:spPr>
+          <a:xfrm>
+            <a:off x="731520" y="4023360"/>
+            <a:ext cx="7680960" cy="548640"/>
           </a:xfrm>
           <a:prstGeom prst="roundRect">
             <a:avLst>
-              <a:gd name="adj" fmla="val 50000"/>
+              <a:gd name="adj" fmla="val 13333"/>
             </a:avLst>
           </a:prstGeom>
           <a:solidFill>
-            <a:srgbClr val="00BFA6"/>
+            <a:srgbClr val="0F1419"/>
+          </a:solidFill>
+          <a:ln/>
+        </p:spPr>
+      </p:sp>
+      <p:sp>
+        <p:nvSpPr>
+          <p:cNvPr id="18" name="Text 15"/>
+          <p:cNvSpPr txBox="1"/>
+          <p:nvPr/>
+        </p:nvSpPr>
+        <p:spPr>
+          <a:xfrm>
+            <a:off x="914400" y="4023360"/>
+            <a:ext cx="411480" cy="548640"/>
+          </a:xfrm>
+          <a:prstGeom prst="roundRect">
+            <a:avLst>
+              <a:gd name="adj" fmla="val 48889"/>
+            </a:avLst>
+          </a:prstGeom>
+          <a:solidFill>
+            <a:srgbClr val="22C55E"/>
           </a:solidFill>
           <a:ln/>
         </p:spPr>
@@ -3661,7 +4530,7 @@
               <a:buNone/>
             </a:pPr>
             <a:r>
-              <a:rPr lang="en-US" sz="1600" b="1" dirty="0">
+              <a:rPr lang="en-US" sz="1500" b="1" dirty="0">
                 <a:solidFill>
                   <a:srgbClr val="0F1419"/>
                 </a:solidFill>
@@ -3671,20 +4540,20 @@
               </a:rPr>
               <a:t>5</a:t>
             </a:r>
-            <a:endParaRPr lang="en-US" sz="1600" dirty="0"/>
-          </a:p>
-        </p:txBody>
-      </p:sp>
-      <p:sp>
-        <p:nvSpPr>
-          <p:cNvPr id="13" name="Text 11"/>
-          <p:cNvSpPr txBox="1"/>
-          <p:nvPr/>
-        </p:nvSpPr>
-        <p:spPr>
-          <a:xfrm>
-            <a:off x="1371600" y="4187952"/>
-            <a:ext cx="7040880" cy="548640"/>
+            <a:endParaRPr lang="en-US" sz="1500" dirty="0"/>
+          </a:p>
+        </p:txBody>
+      </p:sp>
+      <p:sp>
+        <p:nvSpPr>
+          <p:cNvPr id="19" name="Text 16"/>
+          <p:cNvSpPr txBox="1"/>
+          <p:nvPr/>
+        </p:nvSpPr>
+        <p:spPr>
+          <a:xfrm>
+            <a:off x="1508760" y="4023360"/>
+            <a:ext cx="6766560" cy="548640"/>
           </a:xfrm>
           <a:prstGeom prst="rect">
             <a:avLst/>
@@ -3700,7 +4569,7 @@
               <a:buNone/>
             </a:pPr>
             <a:r>
-              <a:rPr lang="en-US" sz="1400" dirty="0">
+              <a:rPr lang="en-US" sz="1300" dirty="0">
                 <a:solidFill>
                   <a:srgbClr val="FFFFFF"/>
                 </a:solidFill>
@@ -3710,7 +4579,7 @@
               </a:rPr>
               <a:t>Les échanges décentralisés (DEX) : Uniswap, PancakeSwap. Échanger des cryptos sans passer par une plateforme centralisée.</a:t>
             </a:r>
-            <a:endParaRPr lang="en-US" sz="1400" dirty="0"/>
+            <a:endParaRPr lang="en-US" sz="1300" dirty="0"/>
           </a:p>
         </p:txBody>
       </p:sp>
@@ -3746,35 +4615,105 @@
           <a:chExt cx="0" cy="0"/>
         </a:xfrm>
       </p:grpSpPr>
-      <p:sp>
-        <p:nvSpPr>
-          <p:cNvPr id="2" name="Shape 0"/>
+      <p:pic>
+        <p:nvPicPr>
+          <p:cNvPr id="2" name="Image 0" descr="preencoded.png">    </p:cNvPr>
+          <p:cNvPicPr>
+            <a:picLocks noChangeAspect="1"/>
+          </p:cNvPicPr>
+          <p:nvPr/>
+        </p:nvPicPr>
+        <p:blipFill>
+          <a:blip r:embed="rId1"/>
+          <a:stretch>
+            <a:fillRect/>
+          </a:stretch>
+        </p:blipFill>
+        <p:spPr>
+          <a:xfrm>
+            <a:off x="7315200" y="548640"/>
+            <a:ext cx="1280160" cy="1280160"/>
+          </a:xfrm>
+          <a:prstGeom prst="rect">
+            <a:avLst/>
+          </a:prstGeom>
+        </p:spPr>
+      </p:pic>
+      <p:pic>
+        <p:nvPicPr>
+          <p:cNvPr id="3" name="Image 1" descr="preencoded.png">    </p:cNvPr>
+          <p:cNvPicPr>
+            <a:picLocks noChangeAspect="1"/>
+          </p:cNvPicPr>
+          <p:nvPr/>
+        </p:nvPicPr>
+        <p:blipFill>
+          <a:blip r:embed="rId2"/>
+          <a:stretch>
+            <a:fillRect/>
+          </a:stretch>
+        </p:blipFill>
+        <p:spPr>
+          <a:xfrm>
+            <a:off x="7772400" y="2011680"/>
+            <a:ext cx="822960" cy="822960"/>
+          </a:xfrm>
+          <a:prstGeom prst="rect">
+            <a:avLst/>
+          </a:prstGeom>
+        </p:spPr>
+      </p:pic>
+      <p:sp>
+        <p:nvSpPr>
+          <p:cNvPr id="4" name="Shape 0"/>
           <p:cNvSpPr/>
           <p:nvPr/>
         </p:nvSpPr>
         <p:spPr>
           <a:xfrm>
-            <a:off x="548640" y="914400"/>
-            <a:ext cx="45720" cy="2560320"/>
-          </a:xfrm>
-          <a:prstGeom prst="rect">
+            <a:off x="6583680" y="-274320"/>
+            <a:ext cx="3200400" cy="3200400"/>
+          </a:xfrm>
+          <a:prstGeom prst="ellipse">
             <a:avLst/>
           </a:prstGeom>
           <a:solidFill>
-            <a:srgbClr val="00BFA6"/>
+            <a:srgbClr val="22C55E">
+              <a:alpha val="6000"/>
+            </a:srgbClr>
           </a:solidFill>
           <a:ln/>
         </p:spPr>
       </p:sp>
       <p:sp>
         <p:nvSpPr>
-          <p:cNvPr id="3" name="Text 1"/>
-          <p:cNvSpPr txBox="1"/>
-          <p:nvPr/>
-        </p:nvSpPr>
-        <p:spPr>
-          <a:xfrm>
-            <a:off x="822960" y="1097280"/>
+          <p:cNvPr id="5" name="Shape 1"/>
+          <p:cNvSpPr/>
+          <p:nvPr/>
+        </p:nvSpPr>
+        <p:spPr>
+          <a:xfrm>
+            <a:off x="731520" y="914400"/>
+            <a:ext cx="45720" cy="2194560"/>
+          </a:xfrm>
+          <a:prstGeom prst="rect">
+            <a:avLst/>
+          </a:prstGeom>
+          <a:solidFill>
+            <a:srgbClr val="22C55E"/>
+          </a:solidFill>
+          <a:ln/>
+        </p:spPr>
+      </p:sp>
+      <p:sp>
+        <p:nvSpPr>
+          <p:cNvPr id="6" name="Text 2"/>
+          <p:cNvSpPr txBox="1"/>
+          <p:nvPr/>
+        </p:nvSpPr>
+        <p:spPr>
+          <a:xfrm>
+            <a:off x="960120" y="914400"/>
             <a:ext cx="2743200" cy="365760"/>
           </a:xfrm>
           <a:prstGeom prst="rect">
@@ -3793,13 +4732,13 @@
             <a:r>
               <a:rPr lang="en-US" sz="1200" b="1" spc="200" kern="0" dirty="0">
                 <a:solidFill>
-                  <a:srgbClr val="00BFA6"/>
-                </a:solidFill>
-                <a:latin typeface="Calibri" pitchFamily="34" charset="0"/>
-                <a:ea typeface="Calibri" pitchFamily="34" charset="-122"/>
-                <a:cs typeface="Calibri" pitchFamily="34" charset="-120"/>
-              </a:rPr>
-              <a:t>Lecon 3 / 3</a:t>
+                  <a:srgbClr val="22C55E"/>
+                </a:solidFill>
+                <a:latin typeface="Calibri" pitchFamily="34" charset="0"/>
+                <a:ea typeface="Calibri" pitchFamily="34" charset="-122"/>
+                <a:cs typeface="Calibri" pitchFamily="34" charset="-120"/>
+              </a:rPr>
+              <a:t>Leçon 3 / 3</a:t>
             </a:r>
             <a:endParaRPr lang="en-US" sz="1200" dirty="0"/>
           </a:p>
@@ -3807,14 +4746,14 @@
       </p:sp>
       <p:sp>
         <p:nvSpPr>
-          <p:cNvPr id="4" name="Text 2"/>
-          <p:cNvSpPr txBox="1"/>
-          <p:nvPr/>
-        </p:nvSpPr>
-        <p:spPr>
-          <a:xfrm>
-            <a:off x="822960" y="1645920"/>
-            <a:ext cx="7498080" cy="1280160"/>
+          <p:cNvPr id="7" name="Text 3"/>
+          <p:cNvSpPr txBox="1"/>
+          <p:nvPr/>
+        </p:nvSpPr>
+        <p:spPr>
+          <a:xfrm>
+            <a:off x="960120" y="1371600"/>
+            <a:ext cx="6217920" cy="1463040"/>
           </a:xfrm>
           <a:prstGeom prst="rect">
             <a:avLst/>
@@ -3830,7 +4769,7 @@
               <a:buNone/>
             </a:pPr>
             <a:r>
-              <a:rPr lang="en-US" sz="3000" b="1" dirty="0">
+              <a:rPr lang="en-US" sz="2800" b="1" dirty="0">
                 <a:solidFill>
                   <a:srgbClr val="FFFFFF"/>
                 </a:solidFill>
@@ -3840,19 +4779,19 @@
               </a:rPr>
               <a:t>BNB, Solana, Tron, Polygon — les autres écosystèmes</a:t>
             </a:r>
-            <a:endParaRPr lang="en-US" sz="3000" dirty="0"/>
-          </a:p>
-        </p:txBody>
-      </p:sp>
-      <p:sp>
-        <p:nvSpPr>
-          <p:cNvPr id="5" name="Text 3"/>
-          <p:cNvSpPr txBox="1"/>
-          <p:nvPr/>
-        </p:nvSpPr>
-        <p:spPr>
-          <a:xfrm>
-            <a:off x="822960" y="4206240"/>
+            <a:endParaRPr lang="en-US" sz="2800" dirty="0"/>
+          </a:p>
+        </p:txBody>
+      </p:sp>
+      <p:sp>
+        <p:nvSpPr>
+          <p:cNvPr id="8" name="Text 4"/>
+          <p:cNvSpPr txBox="1"/>
+          <p:nvPr/>
+        </p:nvSpPr>
+        <p:spPr>
+          <a:xfrm>
+            <a:off x="960120" y="4114800"/>
             <a:ext cx="5486400" cy="320040"/>
           </a:xfrm>
           <a:prstGeom prst="rect">
@@ -3917,7 +4856,53 @@
       </p:grpSpPr>
       <p:sp>
         <p:nvSpPr>
-          <p:cNvPr id="2" name="Text 0"/>
+          <p:cNvPr id="2" name="Shape 0"/>
+          <p:cNvSpPr/>
+          <p:nvPr/>
+        </p:nvSpPr>
+        <p:spPr>
+          <a:xfrm>
+            <a:off x="7955280" y="182880"/>
+            <a:ext cx="640080" cy="640080"/>
+          </a:xfrm>
+          <a:prstGeom prst="ellipse">
+            <a:avLst/>
+          </a:prstGeom>
+          <a:solidFill>
+            <a:srgbClr val="22C55E">
+              <a:alpha val="12000"/>
+            </a:srgbClr>
+          </a:solidFill>
+          <a:ln/>
+        </p:spPr>
+      </p:sp>
+      <p:pic>
+        <p:nvPicPr>
+          <p:cNvPr id="3" name="Image 0" descr="preencoded.png">    </p:cNvPr>
+          <p:cNvPicPr>
+            <a:picLocks noChangeAspect="1"/>
+          </p:cNvPicPr>
+          <p:nvPr/>
+        </p:nvPicPr>
+        <p:blipFill>
+          <a:blip r:embed="rId1"/>
+          <a:stretch>
+            <a:fillRect/>
+          </a:stretch>
+        </p:blipFill>
+        <p:spPr>
+          <a:xfrm>
+            <a:off x="8028432" y="256032"/>
+            <a:ext cx="493776" cy="493776"/>
+          </a:xfrm>
+          <a:prstGeom prst="rect">
+            <a:avLst/>
+          </a:prstGeom>
+        </p:spPr>
+      </p:pic>
+      <p:sp>
+        <p:nvSpPr>
+          <p:cNvPr id="4" name="Text 1"/>
           <p:cNvSpPr txBox="1"/>
           <p:nvPr/>
         </p:nvSpPr>
@@ -3956,116 +4941,11 @@
             </a:r>
             <a:endParaRPr lang="en-US" sz="1400" dirty="0"/>
           </a:p>
-          <a:p>
-            <a:pPr marL="342900" indent="-342900">
-              <a:spcAft>
-                <a:spcPts val="800"/>
-              </a:spcAft>
-              <a:buSzPct val="100000"/>
-              <a:buChar char="•"/>
-            </a:pPr>
-            <a:r>
-              <a:rPr lang="en-US" sz="1400" dirty="0">
-                <a:solidFill>
-                  <a:srgbClr val="FFFFFF"/>
-                </a:solidFill>
-                <a:latin typeface="Calibri" pitchFamily="34" charset="0"/>
-                <a:ea typeface="Calibri" pitchFamily="34" charset="-122"/>
-                <a:cs typeface="Calibri" pitchFamily="34" charset="-120"/>
-              </a:rPr>
-              <a:t>Lancée en 2017 par Justin Sun. C'est LA blockchain de choix pour envoyer de l'USDT en Afrique et en Asie du Sud-Est. Pourquoi ? Les frais sont minuscules (~1 USDT par transfert)...</a:t>
-            </a:r>
-            <a:endParaRPr lang="en-US" sz="1400" dirty="0"/>
-          </a:p>
-          <a:p>
-            <a:pPr marL="342900" indent="-342900">
-              <a:spcAft>
-                <a:spcPts val="800"/>
-              </a:spcAft>
-              <a:buSzPct val="100000"/>
-              <a:buChar char="•"/>
-            </a:pPr>
-            <a:r>
-              <a:rPr lang="en-US" sz="1400" dirty="0">
-                <a:solidFill>
-                  <a:srgbClr val="FFFFFF"/>
-                </a:solidFill>
-                <a:latin typeface="Calibri" pitchFamily="34" charset="0"/>
-                <a:ea typeface="Calibri" pitchFamily="34" charset="-122"/>
-                <a:cs typeface="Calibri" pitchFamily="34" charset="-120"/>
-              </a:rPr>
-              <a:t>Lancée en 2020 par la plateforme Binance. Compatible avec Ethereum, mais 50 fois moins chère. Utilisée pour PancakeSwap (le plus gros DEX), pour les jeux crypto, pour de nombreu...</a:t>
-            </a:r>
-            <a:endParaRPr lang="en-US" sz="1400" dirty="0"/>
-          </a:p>
-          <a:p>
-            <a:pPr marL="342900" indent="-342900">
-              <a:spcAft>
-                <a:spcPts val="800"/>
-              </a:spcAft>
-              <a:buSzPct val="100000"/>
-              <a:buChar char="•"/>
-            </a:pPr>
-            <a:r>
-              <a:rPr lang="en-US" sz="1400" dirty="0">
-                <a:solidFill>
-                  <a:srgbClr val="FFFFFF"/>
-                </a:solidFill>
-                <a:latin typeface="Calibri" pitchFamily="34" charset="0"/>
-                <a:ea typeface="Calibri" pitchFamily="34" charset="-122"/>
-                <a:cs typeface="Calibri" pitchFamily="34" charset="-120"/>
-              </a:rPr>
-              <a:t>Lancée en 2020. Une des plus rapides du monde : plus de 50 000 transactions par seconde théoriques. Frais quasi nuls (0,0001$). Très populaire pour les NFT et les paiements. Éco...</a:t>
-            </a:r>
-            <a:endParaRPr lang="en-US" sz="1400" dirty="0"/>
-          </a:p>
-          <a:p>
-            <a:pPr marL="342900" indent="-342900">
-              <a:spcAft>
-                <a:spcPts val="800"/>
-              </a:spcAft>
-              <a:buSzPct val="100000"/>
-              <a:buChar char="•"/>
-            </a:pPr>
-            <a:r>
-              <a:rPr lang="en-US" sz="1400" dirty="0">
-                <a:solidFill>
-                  <a:srgbClr val="FFFFFF"/>
-                </a:solidFill>
-                <a:latin typeface="Calibri" pitchFamily="34" charset="0"/>
-                <a:ea typeface="Calibri" pitchFamily="34" charset="-122"/>
-                <a:cs typeface="Calibri" pitchFamily="34" charset="-120"/>
-              </a:rPr>
-              <a:t>Une « couche 2 » construite au-dessus d'Ethereum. Elle hérite de la sécurité d'Ethereum mais avec des frais 1000 fois plus bas. Utilisée par Starbucks, Reddit, Nike pour leurs p...</a:t>
-            </a:r>
-            <a:endParaRPr lang="en-US" sz="1400" dirty="0"/>
-          </a:p>
-          <a:p>
-            <a:pPr marL="342900" indent="-342900">
-              <a:spcAft>
-                <a:spcPts val="800"/>
-              </a:spcAft>
-              <a:buSzPct val="100000"/>
-              <a:buChar char="•"/>
-            </a:pPr>
-            <a:r>
-              <a:rPr lang="en-US" sz="1400" dirty="0">
-                <a:solidFill>
-                  <a:srgbClr val="FFFFFF"/>
-                </a:solidFill>
-                <a:latin typeface="Calibri" pitchFamily="34" charset="0"/>
-                <a:ea typeface="Calibri" pitchFamily="34" charset="-122"/>
-                <a:cs typeface="Calibri" pitchFamily="34" charset="-120"/>
-              </a:rPr>
-              <a:t>La nouvelle génération. Aptos et Sui sont issus de l'ancien projet Diem de Facebook. TON est né de Telegram. Ils promettent des performances encore supérieures.</a:t>
-            </a:r>
-            <a:endParaRPr lang="en-US" sz="1400" dirty="0"/>
-          </a:p>
-        </p:txBody>
-      </p:sp>
-      <p:sp>
-        <p:nvSpPr>
-          <p:cNvPr id="3" name="Text 1"/>
+        </p:txBody>
+      </p:sp>
+      <p:sp>
+        <p:nvSpPr>
+          <p:cNvPr id="5" name="Text 2"/>
           <p:cNvSpPr txBox="1"/>
           <p:nvPr/>
         </p:nvSpPr>
@@ -4096,7 +4976,7 @@
                 <a:ea typeface="Calibri" pitchFamily="34" charset="-122"/>
                 <a:cs typeface="Calibri" pitchFamily="34" charset="-120"/>
               </a:rPr>
-              <a:t>Module 5 — Lecon 3</a:t>
+              <a:t>Module 5 — Leçon 3</a:t>
             </a:r>
             <a:endParaRPr lang="en-US" sz="900" dirty="0"/>
           </a:p>
@@ -4142,8 +5022,8 @@
         </p:nvSpPr>
         <p:spPr>
           <a:xfrm>
-            <a:off x="731520" y="365760"/>
-            <a:ext cx="7680960" cy="548640"/>
+            <a:off x="731520" y="274320"/>
+            <a:ext cx="7680960" cy="502920"/>
           </a:xfrm>
           <a:prstGeom prst="rect">
             <a:avLst/>
@@ -4159,17 +5039,17 @@
               <a:buNone/>
             </a:pPr>
             <a:r>
-              <a:rPr lang="en-US" sz="2200" b="1" dirty="0">
-                <a:solidFill>
-                  <a:srgbClr val="00BFA6"/>
-                </a:solidFill>
-                <a:latin typeface="Calibri" pitchFamily="34" charset="0"/>
-                <a:ea typeface="Calibri" pitchFamily="34" charset="-122"/>
-                <a:cs typeface="Calibri" pitchFamily="34" charset="-120"/>
-              </a:rPr>
-              <a:t>Ce qu'il faut retenir</a:t>
-            </a:r>
-            <a:endParaRPr lang="en-US" sz="2200" dirty="0"/>
+              <a:rPr lang="en-US" sz="2000" b="1" dirty="0">
+                <a:solidFill>
+                  <a:srgbClr val="22C55E"/>
+                </a:solidFill>
+                <a:latin typeface="Calibri" pitchFamily="34" charset="0"/>
+                <a:ea typeface="Calibri" pitchFamily="34" charset="-122"/>
+                <a:cs typeface="Calibri" pitchFamily="34" charset="-120"/>
+              </a:rPr>
+              <a:t>Tron (TRX)</a:t>
+            </a:r>
+            <a:endParaRPr lang="en-US" sz="2000" dirty="0"/>
           </a:p>
         </p:txBody>
       </p:sp>
@@ -4181,8 +5061,8 @@
         </p:nvSpPr>
         <p:spPr>
           <a:xfrm>
-            <a:off x="731520" y="1051560"/>
-            <a:ext cx="7680960" cy="3657600"/>
+            <a:off x="731520" y="1005840"/>
+            <a:ext cx="4206240" cy="3474720"/>
           </a:xfrm>
           <a:prstGeom prst="rect">
             <a:avLst/>
@@ -4196,13 +5076,13 @@
           <a:p>
             <a:pPr marL="342900" indent="-342900">
               <a:spcAft>
-                <a:spcPts val="800"/>
+                <a:spcPts val="600"/>
               </a:spcAft>
               <a:buSzPct val="100000"/>
               <a:buChar char="•"/>
             </a:pPr>
             <a:r>
-              <a:rPr lang="en-US" sz="1400" dirty="0">
+              <a:rPr lang="en-US" sz="1300" dirty="0">
                 <a:solidFill>
                   <a:srgbClr val="FFFFFF"/>
                 </a:solidFill>
@@ -4210,20 +5090,20 @@
                 <a:ea typeface="Calibri" pitchFamily="34" charset="-122"/>
                 <a:cs typeface="Calibri" pitchFamily="34" charset="-120"/>
               </a:rPr>
-              <a:t>Pour un utilisateur africain qui veut de l'USDT :</a:t>
-            </a:r>
-            <a:endParaRPr lang="en-US" sz="1400" dirty="0"/>
+              <a:t>Lancée en 2017 par Justin Sun.</a:t>
+            </a:r>
+            <a:endParaRPr lang="en-US" sz="1300" dirty="0"/>
           </a:p>
           <a:p>
             <a:pPr marL="342900" indent="-342900">
               <a:spcAft>
-                <a:spcPts val="800"/>
+                <a:spcPts val="600"/>
               </a:spcAft>
               <a:buSzPct val="100000"/>
               <a:buChar char="•"/>
             </a:pPr>
             <a:r>
-              <a:rPr lang="en-US" sz="1400" dirty="0">
+              <a:rPr lang="en-US" sz="1300" dirty="0">
                 <a:solidFill>
                   <a:srgbClr val="FFFFFF"/>
                 </a:solidFill>
@@ -4231,20 +5111,20 @@
                 <a:ea typeface="Calibri" pitchFamily="34" charset="-122"/>
                 <a:cs typeface="Calibri" pitchFamily="34" charset="-120"/>
               </a:rPr>
-              <a:t>TRC20 (Tron) = le moins cher, le plus utilisé en Afrique. Notre recommandation par défaut.</a:t>
-            </a:r>
-            <a:endParaRPr lang="en-US" sz="1400" dirty="0"/>
+              <a:t>C'est LA blockchain de choix pour envoyer de l'USDT en Afrique et en Asie du Sud-Est.</a:t>
+            </a:r>
+            <a:endParaRPr lang="en-US" sz="1300" dirty="0"/>
           </a:p>
           <a:p>
             <a:pPr marL="342900" indent="-342900">
               <a:spcAft>
-                <a:spcPts val="800"/>
+                <a:spcPts val="600"/>
               </a:spcAft>
               <a:buSzPct val="100000"/>
               <a:buChar char="•"/>
             </a:pPr>
             <a:r>
-              <a:rPr lang="en-US" sz="1400" dirty="0">
+              <a:rPr lang="en-US" sz="1300" dirty="0">
                 <a:solidFill>
                   <a:srgbClr val="FFFFFF"/>
                 </a:solidFill>
@@ -4252,20 +5132,84 @@
                 <a:ea typeface="Calibri" pitchFamily="34" charset="-122"/>
                 <a:cs typeface="Calibri" pitchFamily="34" charset="-120"/>
               </a:rPr>
-              <a:t>BEP20 (BNB Chain) = pas cher, utile si vous utilisez Binance.</a:t>
-            </a:r>
-            <a:endParaRPr lang="en-US" sz="1400" dirty="0"/>
-          </a:p>
-          <a:p>
-            <a:pPr marL="342900" indent="-342900">
-              <a:spcAft>
-                <a:spcPts val="800"/>
-              </a:spcAft>
-              <a:buSzPct val="100000"/>
-              <a:buChar char="•"/>
-            </a:pPr>
-            <a:r>
-              <a:rPr lang="en-US" sz="1400" dirty="0">
+              <a:t>Pourquoi ?</a:t>
+            </a:r>
+            <a:endParaRPr lang="en-US" sz="1300" dirty="0"/>
+          </a:p>
+        </p:txBody>
+      </p:sp>
+      <p:sp>
+        <p:nvSpPr>
+          <p:cNvPr id="4" name="Shape 2"/>
+          <p:cNvSpPr/>
+          <p:nvPr/>
+        </p:nvSpPr>
+        <p:spPr>
+          <a:xfrm>
+            <a:off x="5120640" y="1005840"/>
+            <a:ext cx="3474720" cy="640080"/>
+          </a:xfrm>
+          <a:prstGeom prst="roundRect">
+            <a:avLst>
+              <a:gd name="adj" fmla="val 14286"/>
+            </a:avLst>
+          </a:prstGeom>
+          <a:solidFill>
+            <a:srgbClr val="1A2332"/>
+          </a:solidFill>
+          <a:ln/>
+        </p:spPr>
+      </p:sp>
+      <p:pic>
+        <p:nvPicPr>
+          <p:cNvPr id="5" name="Image 0" descr="preencoded.png">    </p:cNvPr>
+          <p:cNvPicPr>
+            <a:picLocks noChangeAspect="1"/>
+          </p:cNvPicPr>
+          <p:nvPr/>
+        </p:nvPicPr>
+        <p:blipFill>
+          <a:blip r:embed="rId1"/>
+          <a:stretch>
+            <a:fillRect/>
+          </a:stretch>
+        </p:blipFill>
+        <p:spPr>
+          <a:xfrm>
+            <a:off x="5257800" y="1106424"/>
+            <a:ext cx="438912" cy="438912"/>
+          </a:xfrm>
+          <a:prstGeom prst="rect">
+            <a:avLst/>
+          </a:prstGeom>
+        </p:spPr>
+      </p:pic>
+      <p:sp>
+        <p:nvSpPr>
+          <p:cNvPr id="6" name="Text 3"/>
+          <p:cNvSpPr txBox="1"/>
+          <p:nvPr/>
+        </p:nvSpPr>
+        <p:spPr>
+          <a:xfrm>
+            <a:off x="5806440" y="1005840"/>
+            <a:ext cx="2651760" cy="640080"/>
+          </a:xfrm>
+          <a:prstGeom prst="rect">
+            <a:avLst/>
+          </a:prstGeom>
+          <a:noFill/>
+          <a:ln/>
+        </p:spPr>
+        <p:txBody>
+          <a:bodyPr wrap="square" lIns="0" tIns="0" rIns="0" bIns="0" rtlCol="0" anchor="ctr"/>
+          <a:lstStyle/>
+          <a:p>
+            <a:pPr indent="0" marL="0">
+              <a:buNone/>
+            </a:pPr>
+            <a:r>
+              <a:rPr lang="en-US" sz="1200" dirty="0">
                 <a:solidFill>
                   <a:srgbClr val="FFFFFF"/>
                 </a:solidFill>
@@ -4273,20 +5217,84 @@
                 <a:ea typeface="Calibri" pitchFamily="34" charset="-122"/>
                 <a:cs typeface="Calibri" pitchFamily="34" charset="-120"/>
               </a:rPr>
-              <a:t>ERC20 (Ethereum) = le plus universel, mais frais plus élevés.</a:t>
-            </a:r>
-            <a:endParaRPr lang="en-US" sz="1400" dirty="0"/>
-          </a:p>
-          <a:p>
-            <a:pPr marL="342900" indent="-342900">
-              <a:spcAft>
-                <a:spcPts val="800"/>
-              </a:spcAft>
-              <a:buSzPct val="100000"/>
-              <a:buChar char="•"/>
-            </a:pPr>
-            <a:r>
-              <a:rPr lang="en-US" sz="1400" dirty="0">
+              <a:t>Les frais sont minuscules (~1 USDT par transfert), et c'est très rapide (3 se...</a:t>
+            </a:r>
+            <a:endParaRPr lang="en-US" sz="1200" dirty="0"/>
+          </a:p>
+        </p:txBody>
+      </p:sp>
+      <p:sp>
+        <p:nvSpPr>
+          <p:cNvPr id="7" name="Shape 4"/>
+          <p:cNvSpPr/>
+          <p:nvPr/>
+        </p:nvSpPr>
+        <p:spPr>
+          <a:xfrm>
+            <a:off x="5120640" y="1737360"/>
+            <a:ext cx="3474720" cy="640080"/>
+          </a:xfrm>
+          <a:prstGeom prst="roundRect">
+            <a:avLst>
+              <a:gd name="adj" fmla="val 14286"/>
+            </a:avLst>
+          </a:prstGeom>
+          <a:solidFill>
+            <a:srgbClr val="1A2332"/>
+          </a:solidFill>
+          <a:ln/>
+        </p:spPr>
+      </p:sp>
+      <p:pic>
+        <p:nvPicPr>
+          <p:cNvPr id="8" name="Image 1" descr="preencoded.png">    </p:cNvPr>
+          <p:cNvPicPr>
+            <a:picLocks noChangeAspect="1"/>
+          </p:cNvPicPr>
+          <p:nvPr/>
+        </p:nvPicPr>
+        <p:blipFill>
+          <a:blip r:embed="rId2"/>
+          <a:stretch>
+            <a:fillRect/>
+          </a:stretch>
+        </p:blipFill>
+        <p:spPr>
+          <a:xfrm>
+            <a:off x="5257800" y="1837944"/>
+            <a:ext cx="438912" cy="438912"/>
+          </a:xfrm>
+          <a:prstGeom prst="rect">
+            <a:avLst/>
+          </a:prstGeom>
+        </p:spPr>
+      </p:pic>
+      <p:sp>
+        <p:nvSpPr>
+          <p:cNvPr id="9" name="Text 5"/>
+          <p:cNvSpPr txBox="1"/>
+          <p:nvPr/>
+        </p:nvSpPr>
+        <p:spPr>
+          <a:xfrm>
+            <a:off x="5806440" y="1737360"/>
+            <a:ext cx="2651760" cy="640080"/>
+          </a:xfrm>
+          <a:prstGeom prst="rect">
+            <a:avLst/>
+          </a:prstGeom>
+          <a:noFill/>
+          <a:ln/>
+        </p:spPr>
+        <p:txBody>
+          <a:bodyPr wrap="square" lIns="0" tIns="0" rIns="0" bIns="0" rtlCol="0" anchor="ctr"/>
+          <a:lstStyle/>
+          <a:p>
+            <a:pPr indent="0" marL="0">
+              <a:buNone/>
+            </a:pPr>
+            <a:r>
+              <a:rPr lang="en-US" sz="1200" dirty="0">
                 <a:solidFill>
                   <a:srgbClr val="FFFFFF"/>
                 </a:solidFill>
@@ -4294,69 +5302,9 @@
                 <a:ea typeface="Calibri" pitchFamily="34" charset="-122"/>
                 <a:cs typeface="Calibri" pitchFamily="34" charset="-120"/>
               </a:rPr>
-              <a:t>Polygon, Solana, Aptos = si votre destinataire vous demande spécifiquement ce réseau.</a:t>
-            </a:r>
-            <a:endParaRPr lang="en-US" sz="1400" dirty="0"/>
-          </a:p>
-          <a:p>
-            <a:pPr marL="342900" indent="-342900">
-              <a:spcAft>
-                <a:spcPts val="800"/>
-              </a:spcAft>
-              <a:buSzPct val="100000"/>
-              <a:buChar char="•"/>
-            </a:pPr>
-            <a:r>
-              <a:rPr lang="en-US" sz="1400" dirty="0">
-                <a:solidFill>
-                  <a:srgbClr val="FFFFFF"/>
-                </a:solidFill>
-                <a:latin typeface="Calibri" pitchFamily="34" charset="0"/>
-                <a:ea typeface="Calibri" pitchFamily="34" charset="-122"/>
-                <a:cs typeface="Calibri" pitchFamily="34" charset="-120"/>
-              </a:rPr>
-              <a:t>Règle d'or absolue : le réseau d'envoi et le réseau de réception DOIVENT être identiques. Envoyer de l'USDT-TRC20 sur une adresse ERC20 = perte définitive. Nous approfondirons c...</a:t>
-            </a:r>
-            <a:endParaRPr lang="en-US" sz="1400" dirty="0"/>
-          </a:p>
-        </p:txBody>
-      </p:sp>
-      <p:sp>
-        <p:nvSpPr>
-          <p:cNvPr id="4" name="Text 2"/>
-          <p:cNvSpPr txBox="1"/>
-          <p:nvPr/>
-        </p:nvSpPr>
-        <p:spPr>
-          <a:xfrm>
-            <a:off x="731520" y="4709160"/>
-            <a:ext cx="7680960" cy="274320"/>
-          </a:xfrm>
-          <a:prstGeom prst="rect">
-            <a:avLst/>
-          </a:prstGeom>
-          <a:noFill/>
-          <a:ln/>
-        </p:spPr>
-        <p:txBody>
-          <a:bodyPr wrap="square" lIns="0" tIns="0" rIns="0" bIns="0" rtlCol="0" anchor="ctr"/>
-          <a:lstStyle/>
-          <a:p>
-            <a:pPr algn="r" indent="0" marL="0">
-              <a:buNone/>
-            </a:pPr>
-            <a:r>
-              <a:rPr lang="en-US" sz="900" dirty="0">
-                <a:solidFill>
-                  <a:srgbClr val="64748B"/>
-                </a:solidFill>
-                <a:latin typeface="Calibri" pitchFamily="34" charset="0"/>
-                <a:ea typeface="Calibri" pitchFamily="34" charset="-122"/>
-                <a:cs typeface="Calibri" pitchFamily="34" charset="-120"/>
-              </a:rPr>
-              <a:t>Module 5 — Lecon 3</a:t>
-            </a:r>
-            <a:endParaRPr lang="en-US" sz="900" dirty="0"/>
+              <a:t>Sur Terex, le réseau TRC20 = Tron.</a:t>
+            </a:r>
+            <a:endParaRPr lang="en-US" sz="1200" dirty="0"/>
           </a:p>
         </p:txBody>
       </p:sp>
@@ -4374,7 +5322,7 @@
     <p:bg>
       <p:bgPr>
         <a:solidFill>
-          <a:srgbClr val="1A2332"/>
+          <a:srgbClr val="0F1419"/>
         </a:solidFill>
       </p:bgPr>
     </p:bg>
@@ -4400,8 +5348,8 @@
         </p:nvSpPr>
         <p:spPr>
           <a:xfrm>
-            <a:off x="731520" y="457200"/>
-            <a:ext cx="2743200" cy="365760"/>
+            <a:off x="731520" y="274320"/>
+            <a:ext cx="7680960" cy="502920"/>
           </a:xfrm>
           <a:prstGeom prst="rect">
             <a:avLst/>
@@ -4417,30 +5365,76 @@
               <a:buNone/>
             </a:pPr>
             <a:r>
-              <a:rPr lang="en-US" sz="1200" b="1" spc="300" kern="0" dirty="0">
-                <a:solidFill>
-                  <a:srgbClr val="F59E0B"/>
-                </a:solidFill>
-                <a:latin typeface="Calibri" pitchFamily="34" charset="0"/>
-                <a:ea typeface="Calibri" pitchFamily="34" charset="-122"/>
-                <a:cs typeface="Calibri" pitchFamily="34" charset="-120"/>
-              </a:rPr>
-              <a:t>A RETENIR</a:t>
-            </a:r>
-            <a:endParaRPr lang="en-US" sz="1200" dirty="0"/>
-          </a:p>
-        </p:txBody>
-      </p:sp>
-      <p:sp>
-        <p:nvSpPr>
-          <p:cNvPr id="3" name="Text 1"/>
-          <p:cNvSpPr txBox="1"/>
-          <p:nvPr/>
-        </p:nvSpPr>
-        <p:spPr>
-          <a:xfrm>
-            <a:off x="731520" y="868680"/>
-            <a:ext cx="7680960" cy="502920"/>
+              <a:rPr lang="en-US" sz="2000" b="1" dirty="0">
+                <a:solidFill>
+                  <a:srgbClr val="22C55E"/>
+                </a:solidFill>
+                <a:latin typeface="Calibri" pitchFamily="34" charset="0"/>
+                <a:ea typeface="Calibri" pitchFamily="34" charset="-122"/>
+                <a:cs typeface="Calibri" pitchFamily="34" charset="-120"/>
+              </a:rPr>
+              <a:t>BNB Chain (anciennement Binance Smart Chain)</a:t>
+            </a:r>
+            <a:endParaRPr lang="en-US" sz="2000" dirty="0"/>
+          </a:p>
+        </p:txBody>
+      </p:sp>
+      <p:sp>
+        <p:nvSpPr>
+          <p:cNvPr id="3" name="Shape 1"/>
+          <p:cNvSpPr/>
+          <p:nvPr/>
+        </p:nvSpPr>
+        <p:spPr>
+          <a:xfrm>
+            <a:off x="731520" y="1005840"/>
+            <a:ext cx="3657600" cy="1371600"/>
+          </a:xfrm>
+          <a:prstGeom prst="roundRect">
+            <a:avLst>
+              <a:gd name="adj" fmla="val 6667"/>
+            </a:avLst>
+          </a:prstGeom>
+          <a:solidFill>
+            <a:srgbClr val="1A2332"/>
+          </a:solidFill>
+          <a:ln/>
+        </p:spPr>
+      </p:sp>
+      <p:pic>
+        <p:nvPicPr>
+          <p:cNvPr id="4" name="Image 0" descr="preencoded.png">    </p:cNvPr>
+          <p:cNvPicPr>
+            <a:picLocks noChangeAspect="1"/>
+          </p:cNvPicPr>
+          <p:nvPr/>
+        </p:nvPicPr>
+        <p:blipFill>
+          <a:blip r:embed="rId1"/>
+          <a:stretch>
+            <a:fillRect/>
+          </a:stretch>
+        </p:blipFill>
+        <p:spPr>
+          <a:xfrm>
+            <a:off x="868680" y="1143000"/>
+            <a:ext cx="502920" cy="502920"/>
+          </a:xfrm>
+          <a:prstGeom prst="rect">
+            <a:avLst/>
+          </a:prstGeom>
+        </p:spPr>
+      </p:pic>
+      <p:sp>
+        <p:nvSpPr>
+          <p:cNvPr id="5" name="Text 2"/>
+          <p:cNvSpPr txBox="1"/>
+          <p:nvPr/>
+        </p:nvSpPr>
+        <p:spPr>
+          <a:xfrm>
+            <a:off x="868680" y="1719072"/>
+            <a:ext cx="3383280" cy="320040"/>
           </a:xfrm>
           <a:prstGeom prst="rect">
             <a:avLst/>
@@ -4449,14 +5443,14 @@
           <a:ln/>
         </p:spPr>
         <p:txBody>
-          <a:bodyPr wrap="square" lIns="0" tIns="0" rIns="0" bIns="0" rtlCol="0" anchor="ctr"/>
+          <a:bodyPr wrap="square" lIns="0" tIns="0" rIns="0" bIns="0" rtlCol="0" anchor="t"/>
           <a:lstStyle/>
           <a:p>
             <a:pPr indent="0" marL="0">
               <a:buNone/>
             </a:pPr>
             <a:r>
-              <a:rPr lang="en-US" sz="2200" b="1" dirty="0">
+              <a:rPr lang="en-US" sz="1100" b="1" dirty="0">
                 <a:solidFill>
                   <a:srgbClr val="FFFFFF"/>
                 </a:solidFill>
@@ -4464,65 +5458,68 @@
                 <a:ea typeface="Calibri" pitchFamily="34" charset="-122"/>
                 <a:cs typeface="Calibri" pitchFamily="34" charset="-120"/>
               </a:rPr>
-              <a:t>BNB, Solana, Tron, Polygon — les autres écosystèmes</a:t>
-            </a:r>
-            <a:endParaRPr lang="en-US" sz="2200" dirty="0"/>
-          </a:p>
-        </p:txBody>
-      </p:sp>
-      <p:sp>
-        <p:nvSpPr>
-          <p:cNvPr id="4" name="Text 2"/>
-          <p:cNvSpPr txBox="1"/>
-          <p:nvPr/>
-        </p:nvSpPr>
-        <p:spPr>
-          <a:xfrm>
-            <a:off x="731520" y="1554480"/>
-            <a:ext cx="457200" cy="548640"/>
+              <a:t>Lancée en 2020 par la plateforme Binance.</a:t>
+            </a:r>
+            <a:endParaRPr lang="en-US" sz="1100" dirty="0"/>
+          </a:p>
+        </p:txBody>
+      </p:sp>
+      <p:sp>
+        <p:nvSpPr>
+          <p:cNvPr id="6" name="Shape 3"/>
+          <p:cNvSpPr/>
+          <p:nvPr/>
+        </p:nvSpPr>
+        <p:spPr>
+          <a:xfrm>
+            <a:off x="4754880" y="1005840"/>
+            <a:ext cx="3657600" cy="1371600"/>
           </a:xfrm>
           <a:prstGeom prst="roundRect">
             <a:avLst>
-              <a:gd name="adj" fmla="val 50000"/>
+              <a:gd name="adj" fmla="val 6667"/>
             </a:avLst>
           </a:prstGeom>
           <a:solidFill>
-            <a:srgbClr val="00BFA6"/>
+            <a:srgbClr val="1A2332"/>
           </a:solidFill>
           <a:ln/>
         </p:spPr>
-        <p:txBody>
-          <a:bodyPr wrap="square" lIns="0" tIns="0" rIns="0" bIns="0" rtlCol="0" anchor="ctr"/>
-          <a:lstStyle/>
-          <a:p>
-            <a:pPr algn="ctr" indent="0" marL="0">
-              <a:buNone/>
-            </a:pPr>
-            <a:r>
-              <a:rPr lang="en-US" sz="1600" b="1" dirty="0">
-                <a:solidFill>
-                  <a:srgbClr val="0F1419"/>
-                </a:solidFill>
-                <a:latin typeface="Calibri" pitchFamily="34" charset="0"/>
-                <a:ea typeface="Calibri" pitchFamily="34" charset="-122"/>
-                <a:cs typeface="Calibri" pitchFamily="34" charset="-120"/>
-              </a:rPr>
-              <a:t>1</a:t>
-            </a:r>
-            <a:endParaRPr lang="en-US" sz="1600" dirty="0"/>
-          </a:p>
-        </p:txBody>
-      </p:sp>
-      <p:sp>
-        <p:nvSpPr>
-          <p:cNvPr id="5" name="Text 3"/>
-          <p:cNvSpPr txBox="1"/>
-          <p:nvPr/>
-        </p:nvSpPr>
-        <p:spPr>
-          <a:xfrm>
-            <a:off x="1371600" y="1554480"/>
-            <a:ext cx="7040880" cy="548640"/>
+      </p:sp>
+      <p:pic>
+        <p:nvPicPr>
+          <p:cNvPr id="7" name="Image 1" descr="preencoded.png">    </p:cNvPr>
+          <p:cNvPicPr>
+            <a:picLocks noChangeAspect="1"/>
+          </p:cNvPicPr>
+          <p:nvPr/>
+        </p:nvPicPr>
+        <p:blipFill>
+          <a:blip r:embed="rId2"/>
+          <a:stretch>
+            <a:fillRect/>
+          </a:stretch>
+        </p:blipFill>
+        <p:spPr>
+          <a:xfrm>
+            <a:off x="4892040" y="1143000"/>
+            <a:ext cx="502920" cy="502920"/>
+          </a:xfrm>
+          <a:prstGeom prst="rect">
+            <a:avLst/>
+          </a:prstGeom>
+        </p:spPr>
+      </p:pic>
+      <p:sp>
+        <p:nvSpPr>
+          <p:cNvPr id="8" name="Text 4"/>
+          <p:cNvSpPr txBox="1"/>
+          <p:nvPr/>
+        </p:nvSpPr>
+        <p:spPr>
+          <a:xfrm>
+            <a:off x="4892040" y="1719072"/>
+            <a:ext cx="3383280" cy="320040"/>
           </a:xfrm>
           <a:prstGeom prst="rect">
             <a:avLst/>
@@ -4531,14 +5528,14 @@
           <a:ln/>
         </p:spPr>
         <p:txBody>
-          <a:bodyPr wrap="square" lIns="0" tIns="0" rIns="0" bIns="0" rtlCol="0" anchor="ctr"/>
+          <a:bodyPr wrap="square" lIns="0" tIns="0" rIns="0" bIns="0" rtlCol="0" anchor="t"/>
           <a:lstStyle/>
           <a:p>
             <a:pPr indent="0" marL="0">
               <a:buNone/>
             </a:pPr>
             <a:r>
-              <a:rPr lang="en-US" sz="1400" dirty="0">
+              <a:rPr lang="en-US" sz="1100" b="1" dirty="0">
                 <a:solidFill>
                   <a:srgbClr val="FFFFFF"/>
                 </a:solidFill>
@@ -4546,65 +5543,68 @@
                 <a:ea typeface="Calibri" pitchFamily="34" charset="-122"/>
                 <a:cs typeface="Calibri" pitchFamily="34" charset="-120"/>
               </a:rPr>
-              <a:t>TRC20 (Tron) = le moins cher, le plus utilisé en Afrique. Notre recommandation par défaut.</a:t>
-            </a:r>
-            <a:endParaRPr lang="en-US" sz="1400" dirty="0"/>
-          </a:p>
-        </p:txBody>
-      </p:sp>
-      <p:sp>
-        <p:nvSpPr>
-          <p:cNvPr id="6" name="Text 4"/>
-          <p:cNvSpPr txBox="1"/>
-          <p:nvPr/>
-        </p:nvSpPr>
-        <p:spPr>
-          <a:xfrm>
-            <a:off x="731520" y="2212848"/>
-            <a:ext cx="457200" cy="548640"/>
+              <a:t>Compatible avec Ethereum, mais 50 fois moins chère.</a:t>
+            </a:r>
+            <a:endParaRPr lang="en-US" sz="1100" dirty="0"/>
+          </a:p>
+        </p:txBody>
+      </p:sp>
+      <p:sp>
+        <p:nvSpPr>
+          <p:cNvPr id="9" name="Shape 5"/>
+          <p:cNvSpPr/>
+          <p:nvPr/>
+        </p:nvSpPr>
+        <p:spPr>
+          <a:xfrm>
+            <a:off x="731520" y="2514600"/>
+            <a:ext cx="3657600" cy="1371600"/>
           </a:xfrm>
           <a:prstGeom prst="roundRect">
             <a:avLst>
-              <a:gd name="adj" fmla="val 50000"/>
+              <a:gd name="adj" fmla="val 6667"/>
             </a:avLst>
           </a:prstGeom>
           <a:solidFill>
-            <a:srgbClr val="00BFA6"/>
+            <a:srgbClr val="1A2332"/>
           </a:solidFill>
           <a:ln/>
         </p:spPr>
-        <p:txBody>
-          <a:bodyPr wrap="square" lIns="0" tIns="0" rIns="0" bIns="0" rtlCol="0" anchor="ctr"/>
-          <a:lstStyle/>
-          <a:p>
-            <a:pPr algn="ctr" indent="0" marL="0">
-              <a:buNone/>
-            </a:pPr>
-            <a:r>
-              <a:rPr lang="en-US" sz="1600" b="1" dirty="0">
-                <a:solidFill>
-                  <a:srgbClr val="0F1419"/>
-                </a:solidFill>
-                <a:latin typeface="Calibri" pitchFamily="34" charset="0"/>
-                <a:ea typeface="Calibri" pitchFamily="34" charset="-122"/>
-                <a:cs typeface="Calibri" pitchFamily="34" charset="-120"/>
-              </a:rPr>
-              <a:t>2</a:t>
-            </a:r>
-            <a:endParaRPr lang="en-US" sz="1600" dirty="0"/>
-          </a:p>
-        </p:txBody>
-      </p:sp>
-      <p:sp>
-        <p:nvSpPr>
-          <p:cNvPr id="7" name="Text 5"/>
-          <p:cNvSpPr txBox="1"/>
-          <p:nvPr/>
-        </p:nvSpPr>
-        <p:spPr>
-          <a:xfrm>
-            <a:off x="1371600" y="2212848"/>
-            <a:ext cx="7040880" cy="548640"/>
+      </p:sp>
+      <p:pic>
+        <p:nvPicPr>
+          <p:cNvPr id="10" name="Image 2" descr="preencoded.png">    </p:cNvPr>
+          <p:cNvPicPr>
+            <a:picLocks noChangeAspect="1"/>
+          </p:cNvPicPr>
+          <p:nvPr/>
+        </p:nvPicPr>
+        <p:blipFill>
+          <a:blip r:embed="rId3"/>
+          <a:stretch>
+            <a:fillRect/>
+          </a:stretch>
+        </p:blipFill>
+        <p:spPr>
+          <a:xfrm>
+            <a:off x="868680" y="2651760"/>
+            <a:ext cx="502920" cy="502920"/>
+          </a:xfrm>
+          <a:prstGeom prst="rect">
+            <a:avLst/>
+          </a:prstGeom>
+        </p:spPr>
+      </p:pic>
+      <p:sp>
+        <p:nvSpPr>
+          <p:cNvPr id="11" name="Text 6"/>
+          <p:cNvSpPr txBox="1"/>
+          <p:nvPr/>
+        </p:nvSpPr>
+        <p:spPr>
+          <a:xfrm>
+            <a:off x="868680" y="3227832"/>
+            <a:ext cx="3383280" cy="320040"/>
           </a:xfrm>
           <a:prstGeom prst="rect">
             <a:avLst/>
@@ -4613,14 +5613,14 @@
           <a:ln/>
         </p:spPr>
         <p:txBody>
-          <a:bodyPr wrap="square" lIns="0" tIns="0" rIns="0" bIns="0" rtlCol="0" anchor="ctr"/>
+          <a:bodyPr wrap="square" lIns="0" tIns="0" rIns="0" bIns="0" rtlCol="0" anchor="t"/>
           <a:lstStyle/>
           <a:p>
             <a:pPr indent="0" marL="0">
               <a:buNone/>
             </a:pPr>
             <a:r>
-              <a:rPr lang="en-US" sz="1400" dirty="0">
+              <a:rPr lang="en-US" sz="1100" b="1" dirty="0">
                 <a:solidFill>
                   <a:srgbClr val="FFFFFF"/>
                 </a:solidFill>
@@ -4628,65 +5628,107 @@
                 <a:ea typeface="Calibri" pitchFamily="34" charset="-122"/>
                 <a:cs typeface="Calibri" pitchFamily="34" charset="-120"/>
               </a:rPr>
-              <a:t>BEP20 (BNB Chain) = pas cher, utile si vous utilisez Binance.</a:t>
-            </a:r>
-            <a:endParaRPr lang="en-US" sz="1400" dirty="0"/>
-          </a:p>
-        </p:txBody>
-      </p:sp>
-      <p:sp>
-        <p:nvSpPr>
-          <p:cNvPr id="8" name="Text 6"/>
-          <p:cNvSpPr txBox="1"/>
-          <p:nvPr/>
-        </p:nvSpPr>
-        <p:spPr>
-          <a:xfrm>
-            <a:off x="731520" y="2871216"/>
-            <a:ext cx="457200" cy="548640"/>
+              <a:t>Utilisée pour PancakeSwap (le plus gros DEX), pour les je...</a:t>
+            </a:r>
+            <a:endParaRPr lang="en-US" sz="1100" dirty="0"/>
+          </a:p>
+        </p:txBody>
+      </p:sp>
+      <p:sp>
+        <p:nvSpPr>
+          <p:cNvPr id="12" name="Text 7"/>
+          <p:cNvSpPr txBox="1"/>
+          <p:nvPr/>
+        </p:nvSpPr>
+        <p:spPr>
+          <a:xfrm>
+            <a:off x="868680" y="3520440"/>
+            <a:ext cx="3383280" cy="274320"/>
+          </a:xfrm>
+          <a:prstGeom prst="rect">
+            <a:avLst/>
+          </a:prstGeom>
+          <a:noFill/>
+          <a:ln/>
+        </p:spPr>
+        <p:txBody>
+          <a:bodyPr wrap="square" lIns="0" tIns="0" rIns="0" bIns="0" rtlCol="0" anchor="t"/>
+          <a:lstStyle/>
+          <a:p>
+            <a:pPr indent="0" marL="0">
+              <a:buNone/>
+            </a:pPr>
+            <a:r>
+              <a:rPr lang="en-US" sz="900" dirty="0">
+                <a:solidFill>
+                  <a:srgbClr val="94A3B8"/>
+                </a:solidFill>
+                <a:latin typeface="Calibri" pitchFamily="34" charset="0"/>
+                <a:ea typeface="Calibri" pitchFamily="34" charset="-122"/>
+                <a:cs typeface="Calibri" pitchFamily="34" charset="-120"/>
+              </a:rPr>
+              <a:t>ur de nombreux projets africains.</a:t>
+            </a:r>
+            <a:endParaRPr lang="en-US" sz="900" dirty="0"/>
+          </a:p>
+        </p:txBody>
+      </p:sp>
+      <p:sp>
+        <p:nvSpPr>
+          <p:cNvPr id="13" name="Shape 8"/>
+          <p:cNvSpPr/>
+          <p:nvPr/>
+        </p:nvSpPr>
+        <p:spPr>
+          <a:xfrm>
+            <a:off x="4754880" y="2514600"/>
+            <a:ext cx="3657600" cy="1371600"/>
           </a:xfrm>
           <a:prstGeom prst="roundRect">
             <a:avLst>
-              <a:gd name="adj" fmla="val 50000"/>
+              <a:gd name="adj" fmla="val 6667"/>
             </a:avLst>
           </a:prstGeom>
           <a:solidFill>
-            <a:srgbClr val="00BFA6"/>
+            <a:srgbClr val="1A2332"/>
           </a:solidFill>
           <a:ln/>
         </p:spPr>
-        <p:txBody>
-          <a:bodyPr wrap="square" lIns="0" tIns="0" rIns="0" bIns="0" rtlCol="0" anchor="ctr"/>
-          <a:lstStyle/>
-          <a:p>
-            <a:pPr algn="ctr" indent="0" marL="0">
-              <a:buNone/>
-            </a:pPr>
-            <a:r>
-              <a:rPr lang="en-US" sz="1600" b="1" dirty="0">
-                <a:solidFill>
-                  <a:srgbClr val="0F1419"/>
-                </a:solidFill>
-                <a:latin typeface="Calibri" pitchFamily="34" charset="0"/>
-                <a:ea typeface="Calibri" pitchFamily="34" charset="-122"/>
-                <a:cs typeface="Calibri" pitchFamily="34" charset="-120"/>
-              </a:rPr>
-              <a:t>3</a:t>
-            </a:r>
-            <a:endParaRPr lang="en-US" sz="1600" dirty="0"/>
-          </a:p>
-        </p:txBody>
-      </p:sp>
-      <p:sp>
-        <p:nvSpPr>
-          <p:cNvPr id="9" name="Text 7"/>
-          <p:cNvSpPr txBox="1"/>
-          <p:nvPr/>
-        </p:nvSpPr>
-        <p:spPr>
-          <a:xfrm>
-            <a:off x="1371600" y="2871216"/>
-            <a:ext cx="7040880" cy="548640"/>
+      </p:sp>
+      <p:pic>
+        <p:nvPicPr>
+          <p:cNvPr id="14" name="Image 3" descr="preencoded.png">    </p:cNvPr>
+          <p:cNvPicPr>
+            <a:picLocks noChangeAspect="1"/>
+          </p:cNvPicPr>
+          <p:nvPr/>
+        </p:nvPicPr>
+        <p:blipFill>
+          <a:blip r:embed="rId4"/>
+          <a:stretch>
+            <a:fillRect/>
+          </a:stretch>
+        </p:blipFill>
+        <p:spPr>
+          <a:xfrm>
+            <a:off x="4892040" y="2651760"/>
+            <a:ext cx="502920" cy="502920"/>
+          </a:xfrm>
+          <a:prstGeom prst="rect">
+            <a:avLst/>
+          </a:prstGeom>
+        </p:spPr>
+      </p:pic>
+      <p:sp>
+        <p:nvSpPr>
+          <p:cNvPr id="15" name="Text 9"/>
+          <p:cNvSpPr txBox="1"/>
+          <p:nvPr/>
+        </p:nvSpPr>
+        <p:spPr>
+          <a:xfrm>
+            <a:off x="4892040" y="3227832"/>
+            <a:ext cx="3383280" cy="320040"/>
           </a:xfrm>
           <a:prstGeom prst="rect">
             <a:avLst/>
@@ -4695,14 +5737,14 @@
           <a:ln/>
         </p:spPr>
         <p:txBody>
-          <a:bodyPr wrap="square" lIns="0" tIns="0" rIns="0" bIns="0" rtlCol="0" anchor="ctr"/>
+          <a:bodyPr wrap="square" lIns="0" tIns="0" rIns="0" bIns="0" rtlCol="0" anchor="t"/>
           <a:lstStyle/>
           <a:p>
             <a:pPr indent="0" marL="0">
               <a:buNone/>
             </a:pPr>
             <a:r>
-              <a:rPr lang="en-US" sz="1400" dirty="0">
+              <a:rPr lang="en-US" sz="1100" b="1" dirty="0">
                 <a:solidFill>
                   <a:srgbClr val="FFFFFF"/>
                 </a:solidFill>
@@ -4710,91 +5752,9 @@
                 <a:ea typeface="Calibri" pitchFamily="34" charset="-122"/>
                 <a:cs typeface="Calibri" pitchFamily="34" charset="-120"/>
               </a:rPr>
-              <a:t>ERC20 (Ethereum) = le plus universel, mais frais plus élevés.</a:t>
-            </a:r>
-            <a:endParaRPr lang="en-US" sz="1400" dirty="0"/>
-          </a:p>
-        </p:txBody>
-      </p:sp>
-      <p:sp>
-        <p:nvSpPr>
-          <p:cNvPr id="10" name="Text 8"/>
-          <p:cNvSpPr txBox="1"/>
-          <p:nvPr/>
-        </p:nvSpPr>
-        <p:spPr>
-          <a:xfrm>
-            <a:off x="731520" y="3529584"/>
-            <a:ext cx="457200" cy="548640"/>
-          </a:xfrm>
-          <a:prstGeom prst="roundRect">
-            <a:avLst>
-              <a:gd name="adj" fmla="val 50000"/>
-            </a:avLst>
-          </a:prstGeom>
-          <a:solidFill>
-            <a:srgbClr val="00BFA6"/>
-          </a:solidFill>
-          <a:ln/>
-        </p:spPr>
-        <p:txBody>
-          <a:bodyPr wrap="square" lIns="0" tIns="0" rIns="0" bIns="0" rtlCol="0" anchor="ctr"/>
-          <a:lstStyle/>
-          <a:p>
-            <a:pPr algn="ctr" indent="0" marL="0">
-              <a:buNone/>
-            </a:pPr>
-            <a:r>
-              <a:rPr lang="en-US" sz="1600" b="1" dirty="0">
-                <a:solidFill>
-                  <a:srgbClr val="0F1419"/>
-                </a:solidFill>
-                <a:latin typeface="Calibri" pitchFamily="34" charset="0"/>
-                <a:ea typeface="Calibri" pitchFamily="34" charset="-122"/>
-                <a:cs typeface="Calibri" pitchFamily="34" charset="-120"/>
-              </a:rPr>
-              <a:t>4</a:t>
-            </a:r>
-            <a:endParaRPr lang="en-US" sz="1600" dirty="0"/>
-          </a:p>
-        </p:txBody>
-      </p:sp>
-      <p:sp>
-        <p:nvSpPr>
-          <p:cNvPr id="11" name="Text 9"/>
-          <p:cNvSpPr txBox="1"/>
-          <p:nvPr/>
-        </p:nvSpPr>
-        <p:spPr>
-          <a:xfrm>
-            <a:off x="1371600" y="3529584"/>
-            <a:ext cx="7040880" cy="548640"/>
-          </a:xfrm>
-          <a:prstGeom prst="rect">
-            <a:avLst/>
-          </a:prstGeom>
-          <a:noFill/>
-          <a:ln/>
-        </p:spPr>
-        <p:txBody>
-          <a:bodyPr wrap="square" lIns="0" tIns="0" rIns="0" bIns="0" rtlCol="0" anchor="ctr"/>
-          <a:lstStyle/>
-          <a:p>
-            <a:pPr indent="0" marL="0">
-              <a:buNone/>
-            </a:pPr>
-            <a:r>
-              <a:rPr lang="en-US" sz="1400" dirty="0">
-                <a:solidFill>
-                  <a:srgbClr val="FFFFFF"/>
-                </a:solidFill>
-                <a:latin typeface="Calibri" pitchFamily="34" charset="0"/>
-                <a:ea typeface="Calibri" pitchFamily="34" charset="-122"/>
-                <a:cs typeface="Calibri" pitchFamily="34" charset="-120"/>
-              </a:rPr>
-              <a:t>Polygon, Solana, Aptos = si votre destinataire vous demande spécifiquement ce réseau.</a:t>
-            </a:r>
-            <a:endParaRPr lang="en-US" sz="1400" dirty="0"/>
+              <a:t>Sur Terex, BEP20 = BNB Chain.</a:t>
+            </a:r>
+            <a:endParaRPr lang="en-US" sz="1100" dirty="0"/>
           </a:p>
         </p:txBody>
       </p:sp>
@@ -4832,14 +5792,297 @@
       </p:grpSpPr>
       <p:sp>
         <p:nvSpPr>
+          <p:cNvPr id="2" name="Shape 0"/>
+          <p:cNvSpPr/>
+          <p:nvPr/>
+        </p:nvSpPr>
+        <p:spPr>
+          <a:xfrm>
+            <a:off x="7955280" y="182880"/>
+            <a:ext cx="640080" cy="640080"/>
+          </a:xfrm>
+          <a:prstGeom prst="ellipse">
+            <a:avLst/>
+          </a:prstGeom>
+          <a:solidFill>
+            <a:srgbClr val="22C55E">
+              <a:alpha val="12000"/>
+            </a:srgbClr>
+          </a:solidFill>
+          <a:ln/>
+        </p:spPr>
+      </p:sp>
+      <p:pic>
+        <p:nvPicPr>
+          <p:cNvPr id="3" name="Image 0" descr="preencoded.png">    </p:cNvPr>
+          <p:cNvPicPr>
+            <a:picLocks noChangeAspect="1"/>
+          </p:cNvPicPr>
+          <p:nvPr/>
+        </p:nvPicPr>
+        <p:blipFill>
+          <a:blip r:embed="rId1"/>
+          <a:stretch>
+            <a:fillRect/>
+          </a:stretch>
+        </p:blipFill>
+        <p:spPr>
+          <a:xfrm>
+            <a:off x="8028432" y="256032"/>
+            <a:ext cx="493776" cy="493776"/>
+          </a:xfrm>
+          <a:prstGeom prst="rect">
+            <a:avLst/>
+          </a:prstGeom>
+        </p:spPr>
+      </p:pic>
+      <p:sp>
+        <p:nvSpPr>
+          <p:cNvPr id="4" name="Text 1"/>
+          <p:cNvSpPr txBox="1"/>
+          <p:nvPr/>
+        </p:nvSpPr>
+        <p:spPr>
+          <a:xfrm>
+            <a:off x="731520" y="274320"/>
+            <a:ext cx="7132320" cy="502920"/>
+          </a:xfrm>
+          <a:prstGeom prst="rect">
+            <a:avLst/>
+          </a:prstGeom>
+          <a:noFill/>
+          <a:ln/>
+        </p:spPr>
+        <p:txBody>
+          <a:bodyPr wrap="square" lIns="0" tIns="0" rIns="0" bIns="0" rtlCol="0" anchor="ctr"/>
+          <a:lstStyle/>
+          <a:p>
+            <a:pPr indent="0" marL="0">
+              <a:buNone/>
+            </a:pPr>
+            <a:r>
+              <a:rPr lang="en-US" sz="2000" b="1" dirty="0">
+                <a:solidFill>
+                  <a:srgbClr val="22C55E"/>
+                </a:solidFill>
+                <a:latin typeface="Calibri" pitchFamily="34" charset="0"/>
+                <a:ea typeface="Calibri" pitchFamily="34" charset="-122"/>
+                <a:cs typeface="Calibri" pitchFamily="34" charset="-120"/>
+              </a:rPr>
+              <a:t>Solana (SOL)</a:t>
+            </a:r>
+            <a:endParaRPr lang="en-US" sz="2000" dirty="0"/>
+          </a:p>
+        </p:txBody>
+      </p:sp>
+      <p:sp>
+        <p:nvSpPr>
+          <p:cNvPr id="5" name="Text 2"/>
+          <p:cNvSpPr txBox="1"/>
+          <p:nvPr/>
+        </p:nvSpPr>
+        <p:spPr>
+          <a:xfrm>
+            <a:off x="731520" y="960120"/>
+            <a:ext cx="7680960" cy="3657600"/>
+          </a:xfrm>
+          <a:prstGeom prst="rect">
+            <a:avLst/>
+          </a:prstGeom>
+          <a:noFill/>
+          <a:ln/>
+        </p:spPr>
+        <p:txBody>
+          <a:bodyPr wrap="square" lIns="0" tIns="0" rIns="0" bIns="0" rtlCol="0" anchor="t"/>
+          <a:lstStyle/>
+          <a:p>
+            <a:pPr marL="342900" indent="-342900">
+              <a:spcAft>
+                <a:spcPts val="800"/>
+              </a:spcAft>
+              <a:buSzPct val="100000"/>
+              <a:buChar char="•"/>
+            </a:pPr>
+            <a:r>
+              <a:rPr lang="en-US" sz="1400" dirty="0">
+                <a:solidFill>
+                  <a:srgbClr val="FFFFFF"/>
+                </a:solidFill>
+                <a:latin typeface="Calibri" pitchFamily="34" charset="0"/>
+                <a:ea typeface="Calibri" pitchFamily="34" charset="-122"/>
+                <a:cs typeface="Calibri" pitchFamily="34" charset="-120"/>
+              </a:rPr>
+              <a:t>Lancée en 2020.</a:t>
+            </a:r>
+            <a:endParaRPr lang="en-US" sz="1400" dirty="0"/>
+          </a:p>
+          <a:p>
+            <a:pPr marL="342900" indent="-342900">
+              <a:spcAft>
+                <a:spcPts val="800"/>
+              </a:spcAft>
+              <a:buSzPct val="100000"/>
+              <a:buChar char="•"/>
+            </a:pPr>
+            <a:r>
+              <a:rPr lang="en-US" sz="1400" dirty="0">
+                <a:solidFill>
+                  <a:srgbClr val="FFFFFF"/>
+                </a:solidFill>
+                <a:latin typeface="Calibri" pitchFamily="34" charset="0"/>
+                <a:ea typeface="Calibri" pitchFamily="34" charset="-122"/>
+                <a:cs typeface="Calibri" pitchFamily="34" charset="-120"/>
+              </a:rPr>
+              <a:t>Une des plus rapides du monde : plus de 50 000 transactions par seconde théoriques.</a:t>
+            </a:r>
+            <a:endParaRPr lang="en-US" sz="1400" dirty="0"/>
+          </a:p>
+          <a:p>
+            <a:pPr marL="342900" indent="-342900">
+              <a:spcAft>
+                <a:spcPts val="800"/>
+              </a:spcAft>
+              <a:buSzPct val="100000"/>
+              <a:buChar char="•"/>
+            </a:pPr>
+            <a:r>
+              <a:rPr lang="en-US" sz="1400" dirty="0">
+                <a:solidFill>
+                  <a:srgbClr val="FFFFFF"/>
+                </a:solidFill>
+                <a:latin typeface="Calibri" pitchFamily="34" charset="0"/>
+                <a:ea typeface="Calibri" pitchFamily="34" charset="-122"/>
+                <a:cs typeface="Calibri" pitchFamily="34" charset="-120"/>
+              </a:rPr>
+              <a:t>Frais quasi nuls (0,0001$).</a:t>
+            </a:r>
+            <a:endParaRPr lang="en-US" sz="1400" dirty="0"/>
+          </a:p>
+          <a:p>
+            <a:pPr marL="342900" indent="-342900">
+              <a:spcAft>
+                <a:spcPts val="800"/>
+              </a:spcAft>
+              <a:buSzPct val="100000"/>
+              <a:buChar char="•"/>
+            </a:pPr>
+            <a:r>
+              <a:rPr lang="en-US" sz="1400" dirty="0">
+                <a:solidFill>
+                  <a:srgbClr val="FFFFFF"/>
+                </a:solidFill>
+                <a:latin typeface="Calibri" pitchFamily="34" charset="0"/>
+                <a:ea typeface="Calibri" pitchFamily="34" charset="-122"/>
+                <a:cs typeface="Calibri" pitchFamily="34" charset="-120"/>
+              </a:rPr>
+              <a:t>Très populaire pour les NFT et les paiements.</a:t>
+            </a:r>
+            <a:endParaRPr lang="en-US" sz="1400" dirty="0"/>
+          </a:p>
+          <a:p>
+            <a:pPr marL="342900" indent="-342900">
+              <a:spcAft>
+                <a:spcPts val="800"/>
+              </a:spcAft>
+              <a:buSzPct val="100000"/>
+              <a:buChar char="•"/>
+            </a:pPr>
+            <a:r>
+              <a:rPr lang="en-US" sz="1400" dirty="0">
+                <a:solidFill>
+                  <a:srgbClr val="FFFFFF"/>
+                </a:solidFill>
+                <a:latin typeface="Calibri" pitchFamily="34" charset="0"/>
+                <a:ea typeface="Calibri" pitchFamily="34" charset="-122"/>
+                <a:cs typeface="Calibri" pitchFamily="34" charset="-120"/>
+              </a:rPr>
+              <a:t>Écosystème dynamique mais réseau qui a connu quelques pannes.</a:t>
+            </a:r>
+            <a:endParaRPr lang="en-US" sz="1400" dirty="0"/>
+          </a:p>
+        </p:txBody>
+      </p:sp>
+      <p:sp>
+        <p:nvSpPr>
+          <p:cNvPr id="6" name="Text 3"/>
+          <p:cNvSpPr txBox="1"/>
+          <p:nvPr/>
+        </p:nvSpPr>
+        <p:spPr>
+          <a:xfrm>
+            <a:off x="731520" y="4709160"/>
+            <a:ext cx="7680960" cy="274320"/>
+          </a:xfrm>
+          <a:prstGeom prst="rect">
+            <a:avLst/>
+          </a:prstGeom>
+          <a:noFill/>
+          <a:ln/>
+        </p:spPr>
+        <p:txBody>
+          <a:bodyPr wrap="square" lIns="0" tIns="0" rIns="0" bIns="0" rtlCol="0" anchor="ctr"/>
+          <a:lstStyle/>
+          <a:p>
+            <a:pPr algn="r" indent="0" marL="0">
+              <a:buNone/>
+            </a:pPr>
+            <a:r>
+              <a:rPr lang="en-US" sz="900" dirty="0">
+                <a:solidFill>
+                  <a:srgbClr val="64748B"/>
+                </a:solidFill>
+                <a:latin typeface="Calibri" pitchFamily="34" charset="0"/>
+                <a:ea typeface="Calibri" pitchFamily="34" charset="-122"/>
+                <a:cs typeface="Calibri" pitchFamily="34" charset="-120"/>
+              </a:rPr>
+              <a:t>Module 5 — Leçon 3</a:t>
+            </a:r>
+            <a:endParaRPr lang="en-US" sz="900" dirty="0"/>
+          </a:p>
+        </p:txBody>
+      </p:sp>
+    </p:spTree>
+  </p:cSld>
+  <p:clrMapOvr>
+    <a:masterClrMapping/>
+  </p:clrMapOvr>
+</p:sld>
+</file>
+
+<file path=ppt/slides/slide19.xml><?xml version="1.0" encoding="utf-8"?>
+<p:sld xmlns:a="http://schemas.openxmlformats.org/drawingml/2006/main" xmlns:r="http://schemas.openxmlformats.org/officeDocument/2006/relationships" xmlns:p="http://schemas.openxmlformats.org/presentationml/2006/main">
+  <p:cSld name="Slide 19">
+    <p:bg>
+      <p:bgPr>
+        <a:solidFill>
+          <a:srgbClr val="0F1419"/>
+        </a:solidFill>
+      </p:bgPr>
+    </p:bg>
+    <p:spTree>
+      <p:nvGrpSpPr>
+        <p:cNvPr id="1" name=""/>
+        <p:cNvGrpSpPr/>
+        <p:nvPr/>
+      </p:nvGrpSpPr>
+      <p:grpSpPr>
+        <a:xfrm>
+          <a:off x="0" y="0"/>
+          <a:ext cx="0" cy="0"/>
+          <a:chOff x="0" y="0"/>
+          <a:chExt cx="0" cy="0"/>
+        </a:xfrm>
+      </p:grpSpPr>
+      <p:sp>
+        <p:nvSpPr>
           <p:cNvPr id="2" name="Text 0"/>
           <p:cNvSpPr txBox="1"/>
           <p:nvPr/>
         </p:nvSpPr>
         <p:spPr>
           <a:xfrm>
-            <a:off x="731520" y="1371600"/>
-            <a:ext cx="7680960" cy="640080"/>
+            <a:off x="731520" y="274320"/>
+            <a:ext cx="7680960" cy="502920"/>
           </a:xfrm>
           <a:prstGeom prst="rect">
             <a:avLst/>
@@ -4851,11 +6094,54 @@
           <a:bodyPr wrap="square" lIns="0" tIns="0" rIns="0" bIns="0" rtlCol="0" anchor="ctr"/>
           <a:lstStyle/>
           <a:p>
-            <a:pPr algn="ctr" indent="0" marL="0">
+            <a:pPr indent="0" marL="0">
               <a:buNone/>
             </a:pPr>
             <a:r>
-              <a:rPr lang="en-US" sz="3000" b="1" dirty="0">
+              <a:rPr lang="en-US" sz="2000" b="1" dirty="0">
+                <a:solidFill>
+                  <a:srgbClr val="22C55E"/>
+                </a:solidFill>
+                <a:latin typeface="Calibri" pitchFamily="34" charset="0"/>
+                <a:ea typeface="Calibri" pitchFamily="34" charset="-122"/>
+                <a:cs typeface="Calibri" pitchFamily="34" charset="-120"/>
+              </a:rPr>
+              <a:t>Polygon (MATIC / POL)</a:t>
+            </a:r>
+            <a:endParaRPr lang="en-US" sz="2000" dirty="0"/>
+          </a:p>
+        </p:txBody>
+      </p:sp>
+      <p:sp>
+        <p:nvSpPr>
+          <p:cNvPr id="3" name="Text 1"/>
+          <p:cNvSpPr txBox="1"/>
+          <p:nvPr/>
+        </p:nvSpPr>
+        <p:spPr>
+          <a:xfrm>
+            <a:off x="731520" y="1005840"/>
+            <a:ext cx="4206240" cy="3474720"/>
+          </a:xfrm>
+          <a:prstGeom prst="rect">
+            <a:avLst/>
+          </a:prstGeom>
+          <a:noFill/>
+          <a:ln/>
+        </p:spPr>
+        <p:txBody>
+          <a:bodyPr wrap="square" lIns="0" tIns="0" rIns="0" bIns="0" rtlCol="0" anchor="t"/>
+          <a:lstStyle/>
+          <a:p>
+            <a:pPr marL="342900" indent="-342900">
+              <a:spcAft>
+                <a:spcPts val="600"/>
+              </a:spcAft>
+              <a:buSzPct val="100000"/>
+              <a:buChar char="•"/>
+            </a:pPr>
+            <a:r>
+              <a:rPr lang="en-US" sz="1300" dirty="0">
                 <a:solidFill>
                   <a:srgbClr val="FFFFFF"/>
                 </a:solidFill>
@@ -4863,48 +6149,30 @@
                 <a:ea typeface="Calibri" pitchFamily="34" charset="-122"/>
                 <a:cs typeface="Calibri" pitchFamily="34" charset="-120"/>
               </a:rPr>
-              <a:t>Module 5 termine</a:t>
-            </a:r>
-            <a:endParaRPr lang="en-US" sz="3000" dirty="0"/>
-          </a:p>
-        </p:txBody>
-      </p:sp>
-      <p:sp>
-        <p:nvSpPr>
-          <p:cNvPr id="3" name="Text 1"/>
-          <p:cNvSpPr txBox="1"/>
-          <p:nvPr/>
-        </p:nvSpPr>
-        <p:spPr>
-          <a:xfrm>
-            <a:off x="1371600" y="2194560"/>
-            <a:ext cx="6400800" cy="457200"/>
-          </a:xfrm>
-          <a:prstGeom prst="rect">
-            <a:avLst/>
-          </a:prstGeom>
-          <a:noFill/>
-          <a:ln/>
-        </p:spPr>
-        <p:txBody>
-          <a:bodyPr wrap="square" lIns="0" tIns="0" rIns="0" bIns="0" rtlCol="0" anchor="ctr"/>
-          <a:lstStyle/>
-          <a:p>
-            <a:pPr algn="ctr" indent="0" marL="0">
-              <a:buNone/>
-            </a:pPr>
-            <a:r>
-              <a:rPr lang="en-US" sz="1400" dirty="0">
-                <a:solidFill>
-                  <a:srgbClr val="94A3B8"/>
-                </a:solidFill>
-                <a:latin typeface="Calibri" pitchFamily="34" charset="0"/>
-                <a:ea typeface="Calibri" pitchFamily="34" charset="-122"/>
-                <a:cs typeface="Calibri" pitchFamily="34" charset="-120"/>
-              </a:rPr>
-              <a:t>Passez au module suivant pour continuer votre apprentissage.</a:t>
-            </a:r>
-            <a:endParaRPr lang="en-US" sz="1400" dirty="0"/>
+              <a:t>Une « couche 2 » construite au-dessus d'Ethereum.</a:t>
+            </a:r>
+            <a:endParaRPr lang="en-US" sz="1300" dirty="0"/>
+          </a:p>
+          <a:p>
+            <a:pPr marL="342900" indent="-342900">
+              <a:spcAft>
+                <a:spcPts val="600"/>
+              </a:spcAft>
+              <a:buSzPct val="100000"/>
+              <a:buChar char="•"/>
+            </a:pPr>
+            <a:r>
+              <a:rPr lang="en-US" sz="1300" dirty="0">
+                <a:solidFill>
+                  <a:srgbClr val="FFFFFF"/>
+                </a:solidFill>
+                <a:latin typeface="Calibri" pitchFamily="34" charset="0"/>
+                <a:ea typeface="Calibri" pitchFamily="34" charset="-122"/>
+                <a:cs typeface="Calibri" pitchFamily="34" charset="-120"/>
+              </a:rPr>
+              <a:t>Elle hérite de la sécurité d'Ethereum mais avec des frais 1000 fois plus bas.</a:t>
+            </a:r>
+            <a:endParaRPr lang="en-US" sz="1300" dirty="0"/>
           </a:p>
         </p:txBody>
       </p:sp>
@@ -4916,28 +6184,54 @@
         </p:nvSpPr>
         <p:spPr>
           <a:xfrm>
-            <a:off x="3200400" y="2926080"/>
-            <a:ext cx="2743200" cy="54864"/>
-          </a:xfrm>
-          <a:prstGeom prst="rect">
-            <a:avLst/>
+            <a:off x="5120640" y="1005840"/>
+            <a:ext cx="3474720" cy="640080"/>
+          </a:xfrm>
+          <a:prstGeom prst="roundRect">
+            <a:avLst>
+              <a:gd name="adj" fmla="val 14286"/>
+            </a:avLst>
           </a:prstGeom>
           <a:solidFill>
-            <a:srgbClr val="00BFA6"/>
+            <a:srgbClr val="1A2332"/>
           </a:solidFill>
           <a:ln/>
         </p:spPr>
       </p:sp>
-      <p:sp>
-        <p:nvSpPr>
-          <p:cNvPr id="5" name="Text 3"/>
-          <p:cNvSpPr txBox="1"/>
-          <p:nvPr/>
-        </p:nvSpPr>
-        <p:spPr>
-          <a:xfrm>
-            <a:off x="2286000" y="3291840"/>
-            <a:ext cx="4572000" cy="365760"/>
+      <p:pic>
+        <p:nvPicPr>
+          <p:cNvPr id="5" name="Image 0" descr="preencoded.png">    </p:cNvPr>
+          <p:cNvPicPr>
+            <a:picLocks noChangeAspect="1"/>
+          </p:cNvPicPr>
+          <p:nvPr/>
+        </p:nvPicPr>
+        <p:blipFill>
+          <a:blip r:embed="rId1"/>
+          <a:stretch>
+            <a:fillRect/>
+          </a:stretch>
+        </p:blipFill>
+        <p:spPr>
+          <a:xfrm>
+            <a:off x="5257800" y="1106424"/>
+            <a:ext cx="438912" cy="438912"/>
+          </a:xfrm>
+          <a:prstGeom prst="rect">
+            <a:avLst/>
+          </a:prstGeom>
+        </p:spPr>
+      </p:pic>
+      <p:sp>
+        <p:nvSpPr>
+          <p:cNvPr id="6" name="Text 3"/>
+          <p:cNvSpPr txBox="1"/>
+          <p:nvPr/>
+        </p:nvSpPr>
+        <p:spPr>
+          <a:xfrm>
+            <a:off x="5806440" y="1005840"/>
+            <a:ext cx="2651760" cy="640080"/>
           </a:xfrm>
           <a:prstGeom prst="rect">
             <a:avLst/>
@@ -4949,60 +6243,21 @@
           <a:bodyPr wrap="square" lIns="0" tIns="0" rIns="0" bIns="0" rtlCol="0" anchor="ctr"/>
           <a:lstStyle/>
           <a:p>
-            <a:pPr algn="ctr" indent="0" marL="0">
+            <a:pPr indent="0" marL="0">
               <a:buNone/>
             </a:pPr>
             <a:r>
-              <a:rPr lang="en-US" sz="1200" spc="300" kern="0" dirty="0">
-                <a:solidFill>
-                  <a:srgbClr val="64748B"/>
-                </a:solidFill>
-                <a:latin typeface="Calibri" pitchFamily="34" charset="0"/>
-                <a:ea typeface="Calibri" pitchFamily="34" charset="-122"/>
-                <a:cs typeface="Calibri" pitchFamily="34" charset="-120"/>
-              </a:rPr>
-              <a:t>TEREX ACADEMY</a:t>
+              <a:rPr lang="en-US" sz="1200" dirty="0">
+                <a:solidFill>
+                  <a:srgbClr val="FFFFFF"/>
+                </a:solidFill>
+                <a:latin typeface="Calibri" pitchFamily="34" charset="0"/>
+                <a:ea typeface="Calibri" pitchFamily="34" charset="-122"/>
+                <a:cs typeface="Calibri" pitchFamily="34" charset="-120"/>
+              </a:rPr>
+              <a:t>Utilisée par Starbucks, Reddit, Nike pour leurs projets NFT.</a:t>
             </a:r>
             <a:endParaRPr lang="en-US" sz="1200" dirty="0"/>
-          </a:p>
-        </p:txBody>
-      </p:sp>
-      <p:sp>
-        <p:nvSpPr>
-          <p:cNvPr id="6" name="Text 4"/>
-          <p:cNvSpPr txBox="1"/>
-          <p:nvPr/>
-        </p:nvSpPr>
-        <p:spPr>
-          <a:xfrm>
-            <a:off x="2286000" y="3657600"/>
-            <a:ext cx="4572000" cy="320040"/>
-          </a:xfrm>
-          <a:prstGeom prst="rect">
-            <a:avLst/>
-          </a:prstGeom>
-          <a:noFill/>
-          <a:ln/>
-        </p:spPr>
-        <p:txBody>
-          <a:bodyPr wrap="square" lIns="0" tIns="0" rIns="0" bIns="0" rtlCol="0" anchor="ctr"/>
-          <a:lstStyle/>
-          <a:p>
-            <a:pPr algn="ctr" indent="0" marL="0">
-              <a:buNone/>
-            </a:pPr>
-            <a:r>
-              <a:rPr lang="en-US" sz="1100" dirty="0">
-                <a:solidFill>
-                  <a:srgbClr val="009E8B"/>
-                </a:solidFill>
-                <a:latin typeface="Calibri" pitchFamily="34" charset="0"/>
-                <a:ea typeface="Calibri" pitchFamily="34" charset="-122"/>
-                <a:cs typeface="Calibri" pitchFamily="34" charset="-120"/>
-              </a:rPr>
-              <a:t>terangaexchange.com</a:t>
-            </a:r>
-            <a:endParaRPr lang="en-US" sz="1100" dirty="0"/>
           </a:p>
         </p:txBody>
       </p:sp>
@@ -5046,8 +6301,8 @@
         </p:nvSpPr>
         <p:spPr>
           <a:xfrm>
-            <a:off x="731520" y="457200"/>
-            <a:ext cx="2743200" cy="365760"/>
+            <a:off x="731520" y="365760"/>
+            <a:ext cx="2743200" cy="320040"/>
           </a:xfrm>
           <a:prstGeom prst="rect">
             <a:avLst/>
@@ -5065,7 +6320,7 @@
             <a:r>
               <a:rPr lang="en-US" sz="1200" b="1" spc="300" kern="0" dirty="0">
                 <a:solidFill>
-                  <a:srgbClr val="00BFA6"/>
+                  <a:srgbClr val="22C55E"/>
                 </a:solidFill>
                 <a:latin typeface="Calibri" pitchFamily="34" charset="0"/>
                 <a:ea typeface="Calibri" pitchFamily="34" charset="-122"/>
@@ -5085,7 +6340,7 @@
         </p:nvSpPr>
         <p:spPr>
           <a:xfrm>
-            <a:off x="731520" y="868680"/>
+            <a:off x="731520" y="731520"/>
             <a:ext cx="4572000" cy="457200"/>
           </a:xfrm>
           <a:prstGeom prst="rect">
@@ -5118,14 +6373,36 @@
       </p:sp>
       <p:sp>
         <p:nvSpPr>
-          <p:cNvPr id="4" name="Text 2"/>
-          <p:cNvSpPr txBox="1"/>
-          <p:nvPr/>
-        </p:nvSpPr>
-        <p:spPr>
-          <a:xfrm>
-            <a:off x="731520" y="1554480"/>
-            <a:ext cx="7680960" cy="3200400"/>
+          <p:cNvPr id="4" name="Shape 2"/>
+          <p:cNvSpPr/>
+          <p:nvPr/>
+        </p:nvSpPr>
+        <p:spPr>
+          <a:xfrm>
+            <a:off x="731520" y="1371600"/>
+            <a:ext cx="7680960" cy="475488"/>
+          </a:xfrm>
+          <a:prstGeom prst="roundRect">
+            <a:avLst>
+              <a:gd name="adj" fmla="val 15385"/>
+            </a:avLst>
+          </a:prstGeom>
+          <a:solidFill>
+            <a:srgbClr val="1A2332"/>
+          </a:solidFill>
+          <a:ln/>
+        </p:spPr>
+      </p:sp>
+      <p:sp>
+        <p:nvSpPr>
+          <p:cNvPr id="5" name="Text 3"/>
+          <p:cNvSpPr txBox="1"/>
+          <p:nvPr/>
+        </p:nvSpPr>
+        <p:spPr>
+          <a:xfrm>
+            <a:off x="868680" y="1371600"/>
+            <a:ext cx="320040" cy="475488"/>
           </a:xfrm>
           <a:prstGeom prst="rect">
             <a:avLst/>
@@ -5134,17 +6411,1174 @@
           <a:ln/>
         </p:spPr>
         <p:txBody>
+          <a:bodyPr wrap="square" lIns="0" tIns="0" rIns="0" bIns="0" rtlCol="0" anchor="ctr"/>
+          <a:lstStyle/>
+          <a:p>
+            <a:pPr algn="ctr" indent="0" marL="0">
+              <a:buNone/>
+            </a:pPr>
+            <a:r>
+              <a:rPr lang="en-US" sz="1300" b="1" dirty="0">
+                <a:solidFill>
+                  <a:srgbClr val="22C55E"/>
+                </a:solidFill>
+                <a:latin typeface="Calibri" pitchFamily="34" charset="0"/>
+                <a:ea typeface="Calibri" pitchFamily="34" charset="-122"/>
+                <a:cs typeface="Calibri" pitchFamily="34" charset="-120"/>
+              </a:rPr>
+              <a:t>1</a:t>
+            </a:r>
+            <a:endParaRPr lang="en-US" sz="1300" dirty="0"/>
+          </a:p>
+        </p:txBody>
+      </p:sp>
+      <p:pic>
+        <p:nvPicPr>
+          <p:cNvPr id="6" name="Image 0" descr="preencoded.png">    </p:cNvPr>
+          <p:cNvPicPr>
+            <a:picLocks noChangeAspect="1"/>
+          </p:cNvPicPr>
+          <p:nvPr/>
+        </p:nvPicPr>
+        <p:blipFill>
+          <a:blip r:embed="rId1"/>
+          <a:stretch>
+            <a:fillRect/>
+          </a:stretch>
+        </p:blipFill>
+        <p:spPr>
+          <a:xfrm>
+            <a:off x="1280160" y="1444752"/>
+            <a:ext cx="329184" cy="329184"/>
+          </a:xfrm>
+          <a:prstGeom prst="rect">
+            <a:avLst/>
+          </a:prstGeom>
+        </p:spPr>
+      </p:pic>
+      <p:sp>
+        <p:nvSpPr>
+          <p:cNvPr id="7" name="Text 4"/>
+          <p:cNvSpPr txBox="1"/>
+          <p:nvPr/>
+        </p:nvSpPr>
+        <p:spPr>
+          <a:xfrm>
+            <a:off x="1737360" y="1371600"/>
+            <a:ext cx="6492240" cy="475488"/>
+          </a:xfrm>
+          <a:prstGeom prst="rect">
+            <a:avLst/>
+          </a:prstGeom>
+          <a:noFill/>
+          <a:ln/>
+        </p:spPr>
+        <p:txBody>
+          <a:bodyPr wrap="square" lIns="0" tIns="0" rIns="0" bIns="0" rtlCol="0" anchor="ctr"/>
+          <a:lstStyle/>
+          <a:p>
+            <a:pPr indent="0" marL="0">
+              <a:buNone/>
+            </a:pPr>
+            <a:r>
+              <a:rPr lang="en-US" sz="1300" dirty="0">
+                <a:solidFill>
+                  <a:srgbClr val="FFFFFF"/>
+                </a:solidFill>
+                <a:latin typeface="Calibri" pitchFamily="34" charset="0"/>
+                <a:ea typeface="Calibri" pitchFamily="34" charset="-122"/>
+                <a:cs typeface="Calibri" pitchFamily="34" charset="-120"/>
+              </a:rPr>
+              <a:t>Bitcoin (BTC) — l'or numérique</a:t>
+            </a:r>
+            <a:endParaRPr lang="en-US" sz="1300" dirty="0"/>
+          </a:p>
+        </p:txBody>
+      </p:sp>
+      <p:sp>
+        <p:nvSpPr>
+          <p:cNvPr id="8" name="Shape 5"/>
+          <p:cNvSpPr/>
+          <p:nvPr/>
+        </p:nvSpPr>
+        <p:spPr>
+          <a:xfrm>
+            <a:off x="731520" y="1920240"/>
+            <a:ext cx="7680960" cy="475488"/>
+          </a:xfrm>
+          <a:prstGeom prst="roundRect">
+            <a:avLst>
+              <a:gd name="adj" fmla="val 15385"/>
+            </a:avLst>
+          </a:prstGeom>
+          <a:solidFill>
+            <a:srgbClr val="1A2332"/>
+          </a:solidFill>
+          <a:ln/>
+        </p:spPr>
+      </p:sp>
+      <p:sp>
+        <p:nvSpPr>
+          <p:cNvPr id="9" name="Text 6"/>
+          <p:cNvSpPr txBox="1"/>
+          <p:nvPr/>
+        </p:nvSpPr>
+        <p:spPr>
+          <a:xfrm>
+            <a:off x="868680" y="1920240"/>
+            <a:ext cx="320040" cy="475488"/>
+          </a:xfrm>
+          <a:prstGeom prst="rect">
+            <a:avLst/>
+          </a:prstGeom>
+          <a:noFill/>
+          <a:ln/>
+        </p:spPr>
+        <p:txBody>
+          <a:bodyPr wrap="square" lIns="0" tIns="0" rIns="0" bIns="0" rtlCol="0" anchor="ctr"/>
+          <a:lstStyle/>
+          <a:p>
+            <a:pPr algn="ctr" indent="0" marL="0">
+              <a:buNone/>
+            </a:pPr>
+            <a:r>
+              <a:rPr lang="en-US" sz="1300" b="1" dirty="0">
+                <a:solidFill>
+                  <a:srgbClr val="22C55E"/>
+                </a:solidFill>
+                <a:latin typeface="Calibri" pitchFamily="34" charset="0"/>
+                <a:ea typeface="Calibri" pitchFamily="34" charset="-122"/>
+                <a:cs typeface="Calibri" pitchFamily="34" charset="-120"/>
+              </a:rPr>
+              <a:t>2</a:t>
+            </a:r>
+            <a:endParaRPr lang="en-US" sz="1300" dirty="0"/>
+          </a:p>
+        </p:txBody>
+      </p:sp>
+      <p:pic>
+        <p:nvPicPr>
+          <p:cNvPr id="10" name="Image 1" descr="preencoded.png">    </p:cNvPr>
+          <p:cNvPicPr>
+            <a:picLocks noChangeAspect="1"/>
+          </p:cNvPicPr>
+          <p:nvPr/>
+        </p:nvPicPr>
+        <p:blipFill>
+          <a:blip r:embed="rId2"/>
+          <a:stretch>
+            <a:fillRect/>
+          </a:stretch>
+        </p:blipFill>
+        <p:spPr>
+          <a:xfrm>
+            <a:off x="1280160" y="1993392"/>
+            <a:ext cx="329184" cy="329184"/>
+          </a:xfrm>
+          <a:prstGeom prst="rect">
+            <a:avLst/>
+          </a:prstGeom>
+        </p:spPr>
+      </p:pic>
+      <p:sp>
+        <p:nvSpPr>
+          <p:cNvPr id="11" name="Text 7"/>
+          <p:cNvSpPr txBox="1"/>
+          <p:nvPr/>
+        </p:nvSpPr>
+        <p:spPr>
+          <a:xfrm>
+            <a:off x="1737360" y="1920240"/>
+            <a:ext cx="6492240" cy="475488"/>
+          </a:xfrm>
+          <a:prstGeom prst="rect">
+            <a:avLst/>
+          </a:prstGeom>
+          <a:noFill/>
+          <a:ln/>
+        </p:spPr>
+        <p:txBody>
+          <a:bodyPr wrap="square" lIns="0" tIns="0" rIns="0" bIns="0" rtlCol="0" anchor="ctr"/>
+          <a:lstStyle/>
+          <a:p>
+            <a:pPr indent="0" marL="0">
+              <a:buNone/>
+            </a:pPr>
+            <a:r>
+              <a:rPr lang="en-US" sz="1300" dirty="0">
+                <a:solidFill>
+                  <a:srgbClr val="FFFFFF"/>
+                </a:solidFill>
+                <a:latin typeface="Calibri" pitchFamily="34" charset="0"/>
+                <a:ea typeface="Calibri" pitchFamily="34" charset="-122"/>
+                <a:cs typeface="Calibri" pitchFamily="34" charset="-120"/>
+              </a:rPr>
+              <a:t>Ethereum (ETH) — l'ordinateur mondial</a:t>
+            </a:r>
+            <a:endParaRPr lang="en-US" sz="1300" dirty="0"/>
+          </a:p>
+        </p:txBody>
+      </p:sp>
+      <p:sp>
+        <p:nvSpPr>
+          <p:cNvPr id="12" name="Shape 8"/>
+          <p:cNvSpPr/>
+          <p:nvPr/>
+        </p:nvSpPr>
+        <p:spPr>
+          <a:xfrm>
+            <a:off x="731520" y="2468880"/>
+            <a:ext cx="7680960" cy="475488"/>
+          </a:xfrm>
+          <a:prstGeom prst="roundRect">
+            <a:avLst>
+              <a:gd name="adj" fmla="val 15385"/>
+            </a:avLst>
+          </a:prstGeom>
+          <a:solidFill>
+            <a:srgbClr val="1A2332"/>
+          </a:solidFill>
+          <a:ln/>
+        </p:spPr>
+      </p:sp>
+      <p:sp>
+        <p:nvSpPr>
+          <p:cNvPr id="13" name="Text 9"/>
+          <p:cNvSpPr txBox="1"/>
+          <p:nvPr/>
+        </p:nvSpPr>
+        <p:spPr>
+          <a:xfrm>
+            <a:off x="868680" y="2468880"/>
+            <a:ext cx="320040" cy="475488"/>
+          </a:xfrm>
+          <a:prstGeom prst="rect">
+            <a:avLst/>
+          </a:prstGeom>
+          <a:noFill/>
+          <a:ln/>
+        </p:spPr>
+        <p:txBody>
+          <a:bodyPr wrap="square" lIns="0" tIns="0" rIns="0" bIns="0" rtlCol="0" anchor="ctr"/>
+          <a:lstStyle/>
+          <a:p>
+            <a:pPr algn="ctr" indent="0" marL="0">
+              <a:buNone/>
+            </a:pPr>
+            <a:r>
+              <a:rPr lang="en-US" sz="1300" b="1" dirty="0">
+                <a:solidFill>
+                  <a:srgbClr val="22C55E"/>
+                </a:solidFill>
+                <a:latin typeface="Calibri" pitchFamily="34" charset="0"/>
+                <a:ea typeface="Calibri" pitchFamily="34" charset="-122"/>
+                <a:cs typeface="Calibri" pitchFamily="34" charset="-120"/>
+              </a:rPr>
+              <a:t>3</a:t>
+            </a:r>
+            <a:endParaRPr lang="en-US" sz="1300" dirty="0"/>
+          </a:p>
+        </p:txBody>
+      </p:sp>
+      <p:pic>
+        <p:nvPicPr>
+          <p:cNvPr id="14" name="Image 2" descr="preencoded.png">    </p:cNvPr>
+          <p:cNvPicPr>
+            <a:picLocks noChangeAspect="1"/>
+          </p:cNvPicPr>
+          <p:nvPr/>
+        </p:nvPicPr>
+        <p:blipFill>
+          <a:blip r:embed="rId3"/>
+          <a:stretch>
+            <a:fillRect/>
+          </a:stretch>
+        </p:blipFill>
+        <p:spPr>
+          <a:xfrm>
+            <a:off x="1280160" y="2542032"/>
+            <a:ext cx="329184" cy="329184"/>
+          </a:xfrm>
+          <a:prstGeom prst="rect">
+            <a:avLst/>
+          </a:prstGeom>
+        </p:spPr>
+      </p:pic>
+      <p:sp>
+        <p:nvSpPr>
+          <p:cNvPr id="15" name="Text 10"/>
+          <p:cNvSpPr txBox="1"/>
+          <p:nvPr/>
+        </p:nvSpPr>
+        <p:spPr>
+          <a:xfrm>
+            <a:off x="1737360" y="2468880"/>
+            <a:ext cx="6492240" cy="475488"/>
+          </a:xfrm>
+          <a:prstGeom prst="rect">
+            <a:avLst/>
+          </a:prstGeom>
+          <a:noFill/>
+          <a:ln/>
+        </p:spPr>
+        <p:txBody>
+          <a:bodyPr wrap="square" lIns="0" tIns="0" rIns="0" bIns="0" rtlCol="0" anchor="ctr"/>
+          <a:lstStyle/>
+          <a:p>
+            <a:pPr indent="0" marL="0">
+              <a:buNone/>
+            </a:pPr>
+            <a:r>
+              <a:rPr lang="en-US" sz="1300" dirty="0">
+                <a:solidFill>
+                  <a:srgbClr val="FFFFFF"/>
+                </a:solidFill>
+                <a:latin typeface="Calibri" pitchFamily="34" charset="0"/>
+                <a:ea typeface="Calibri" pitchFamily="34" charset="-122"/>
+                <a:cs typeface="Calibri" pitchFamily="34" charset="-120"/>
+              </a:rPr>
+              <a:t>BNB, Solana, Tron, Polygon — les autres écosystèmes</a:t>
+            </a:r>
+            <a:endParaRPr lang="en-US" sz="1300" dirty="0"/>
+          </a:p>
+        </p:txBody>
+      </p:sp>
+    </p:spTree>
+  </p:cSld>
+  <p:clrMapOvr>
+    <a:masterClrMapping/>
+  </p:clrMapOvr>
+</p:sld>
+</file>
+
+<file path=ppt/slides/slide20.xml><?xml version="1.0" encoding="utf-8"?>
+<p:sld xmlns:a="http://schemas.openxmlformats.org/drawingml/2006/main" xmlns:r="http://schemas.openxmlformats.org/officeDocument/2006/relationships" xmlns:p="http://schemas.openxmlformats.org/presentationml/2006/main">
+  <p:cSld name="Slide 20">
+    <p:bg>
+      <p:bgPr>
+        <a:solidFill>
+          <a:srgbClr val="0F1419"/>
+        </a:solidFill>
+      </p:bgPr>
+    </p:bg>
+    <p:spTree>
+      <p:nvGrpSpPr>
+        <p:cNvPr id="1" name=""/>
+        <p:cNvGrpSpPr/>
+        <p:nvPr/>
+      </p:nvGrpSpPr>
+      <p:grpSpPr>
+        <a:xfrm>
+          <a:off x="0" y="0"/>
+          <a:ext cx="0" cy="0"/>
+          <a:chOff x="0" y="0"/>
+          <a:chExt cx="0" cy="0"/>
+        </a:xfrm>
+      </p:grpSpPr>
+      <p:sp>
+        <p:nvSpPr>
+          <p:cNvPr id="2" name="Text 0"/>
+          <p:cNvSpPr txBox="1"/>
+          <p:nvPr/>
+        </p:nvSpPr>
+        <p:spPr>
+          <a:xfrm>
+            <a:off x="731520" y="274320"/>
+            <a:ext cx="7680960" cy="502920"/>
+          </a:xfrm>
+          <a:prstGeom prst="rect">
+            <a:avLst/>
+          </a:prstGeom>
+          <a:noFill/>
+          <a:ln/>
+        </p:spPr>
+        <p:txBody>
+          <a:bodyPr wrap="square" lIns="0" tIns="0" rIns="0" bIns="0" rtlCol="0" anchor="ctr"/>
+          <a:lstStyle/>
+          <a:p>
+            <a:pPr indent="0" marL="0">
+              <a:buNone/>
+            </a:pPr>
+            <a:r>
+              <a:rPr lang="en-US" sz="2000" b="1" dirty="0">
+                <a:solidFill>
+                  <a:srgbClr val="22C55E"/>
+                </a:solidFill>
+                <a:latin typeface="Calibri" pitchFamily="34" charset="0"/>
+                <a:ea typeface="Calibri" pitchFamily="34" charset="-122"/>
+                <a:cs typeface="Calibri" pitchFamily="34" charset="-120"/>
+              </a:rPr>
+              <a:t>Aptos, Sui, TON…</a:t>
+            </a:r>
+            <a:endParaRPr lang="en-US" sz="2000" dirty="0"/>
+          </a:p>
+        </p:txBody>
+      </p:sp>
+      <p:sp>
+        <p:nvSpPr>
+          <p:cNvPr id="3" name="Shape 1"/>
+          <p:cNvSpPr/>
+          <p:nvPr/>
+        </p:nvSpPr>
+        <p:spPr>
+          <a:xfrm>
+            <a:off x="731520" y="1005840"/>
+            <a:ext cx="3657600" cy="1371600"/>
+          </a:xfrm>
+          <a:prstGeom prst="roundRect">
+            <a:avLst>
+              <a:gd name="adj" fmla="val 6667"/>
+            </a:avLst>
+          </a:prstGeom>
+          <a:solidFill>
+            <a:srgbClr val="1A2332"/>
+          </a:solidFill>
+          <a:ln/>
+        </p:spPr>
+      </p:sp>
+      <p:pic>
+        <p:nvPicPr>
+          <p:cNvPr id="4" name="Image 0" descr="preencoded.png">    </p:cNvPr>
+          <p:cNvPicPr>
+            <a:picLocks noChangeAspect="1"/>
+          </p:cNvPicPr>
+          <p:nvPr/>
+        </p:nvPicPr>
+        <p:blipFill>
+          <a:blip r:embed="rId1"/>
+          <a:stretch>
+            <a:fillRect/>
+          </a:stretch>
+        </p:blipFill>
+        <p:spPr>
+          <a:xfrm>
+            <a:off x="868680" y="1143000"/>
+            <a:ext cx="502920" cy="502920"/>
+          </a:xfrm>
+          <a:prstGeom prst="rect">
+            <a:avLst/>
+          </a:prstGeom>
+        </p:spPr>
+      </p:pic>
+      <p:sp>
+        <p:nvSpPr>
+          <p:cNvPr id="5" name="Text 2"/>
+          <p:cNvSpPr txBox="1"/>
+          <p:nvPr/>
+        </p:nvSpPr>
+        <p:spPr>
+          <a:xfrm>
+            <a:off x="868680" y="1719072"/>
+            <a:ext cx="3383280" cy="320040"/>
+          </a:xfrm>
+          <a:prstGeom prst="rect">
+            <a:avLst/>
+          </a:prstGeom>
+          <a:noFill/>
+          <a:ln/>
+        </p:spPr>
+        <p:txBody>
           <a:bodyPr wrap="square" lIns="0" tIns="0" rIns="0" bIns="0" rtlCol="0" anchor="t"/>
           <a:lstStyle/>
           <a:p>
             <a:pPr indent="0" marL="0">
+              <a:buNone/>
+            </a:pPr>
+            <a:r>
+              <a:rPr lang="en-US" sz="1100" b="1" dirty="0">
+                <a:solidFill>
+                  <a:srgbClr val="FFFFFF"/>
+                </a:solidFill>
+                <a:latin typeface="Calibri" pitchFamily="34" charset="0"/>
+                <a:ea typeface="Calibri" pitchFamily="34" charset="-122"/>
+                <a:cs typeface="Calibri" pitchFamily="34" charset="-120"/>
+              </a:rPr>
+              <a:t>La nouvelle génération.</a:t>
+            </a:r>
+            <a:endParaRPr lang="en-US" sz="1100" dirty="0"/>
+          </a:p>
+        </p:txBody>
+      </p:sp>
+      <p:sp>
+        <p:nvSpPr>
+          <p:cNvPr id="6" name="Shape 3"/>
+          <p:cNvSpPr/>
+          <p:nvPr/>
+        </p:nvSpPr>
+        <p:spPr>
+          <a:xfrm>
+            <a:off x="4754880" y="1005840"/>
+            <a:ext cx="3657600" cy="1371600"/>
+          </a:xfrm>
+          <a:prstGeom prst="roundRect">
+            <a:avLst>
+              <a:gd name="adj" fmla="val 6667"/>
+            </a:avLst>
+          </a:prstGeom>
+          <a:solidFill>
+            <a:srgbClr val="1A2332"/>
+          </a:solidFill>
+          <a:ln/>
+        </p:spPr>
+      </p:sp>
+      <p:pic>
+        <p:nvPicPr>
+          <p:cNvPr id="7" name="Image 1" descr="preencoded.png">    </p:cNvPr>
+          <p:cNvPicPr>
+            <a:picLocks noChangeAspect="1"/>
+          </p:cNvPicPr>
+          <p:nvPr/>
+        </p:nvPicPr>
+        <p:blipFill>
+          <a:blip r:embed="rId2"/>
+          <a:stretch>
+            <a:fillRect/>
+          </a:stretch>
+        </p:blipFill>
+        <p:spPr>
+          <a:xfrm>
+            <a:off x="4892040" y="1143000"/>
+            <a:ext cx="502920" cy="502920"/>
+          </a:xfrm>
+          <a:prstGeom prst="rect">
+            <a:avLst/>
+          </a:prstGeom>
+        </p:spPr>
+      </p:pic>
+      <p:sp>
+        <p:nvSpPr>
+          <p:cNvPr id="8" name="Text 4"/>
+          <p:cNvSpPr txBox="1"/>
+          <p:nvPr/>
+        </p:nvSpPr>
+        <p:spPr>
+          <a:xfrm>
+            <a:off x="4892040" y="1719072"/>
+            <a:ext cx="3383280" cy="320040"/>
+          </a:xfrm>
+          <a:prstGeom prst="rect">
+            <a:avLst/>
+          </a:prstGeom>
+          <a:noFill/>
+          <a:ln/>
+        </p:spPr>
+        <p:txBody>
+          <a:bodyPr wrap="square" lIns="0" tIns="0" rIns="0" bIns="0" rtlCol="0" anchor="t"/>
+          <a:lstStyle/>
+          <a:p>
+            <a:pPr indent="0" marL="0">
+              <a:buNone/>
+            </a:pPr>
+            <a:r>
+              <a:rPr lang="en-US" sz="1100" b="1" dirty="0">
+                <a:solidFill>
+                  <a:srgbClr val="FFFFFF"/>
+                </a:solidFill>
+                <a:latin typeface="Calibri" pitchFamily="34" charset="0"/>
+                <a:ea typeface="Calibri" pitchFamily="34" charset="-122"/>
+                <a:cs typeface="Calibri" pitchFamily="34" charset="-120"/>
+              </a:rPr>
+              <a:t>Aptos et Sui sont issus de l'ancien projet Diem de Facebook.</a:t>
+            </a:r>
+            <a:endParaRPr lang="en-US" sz="1100" dirty="0"/>
+          </a:p>
+        </p:txBody>
+      </p:sp>
+      <p:sp>
+        <p:nvSpPr>
+          <p:cNvPr id="9" name="Shape 5"/>
+          <p:cNvSpPr/>
+          <p:nvPr/>
+        </p:nvSpPr>
+        <p:spPr>
+          <a:xfrm>
+            <a:off x="731520" y="2514600"/>
+            <a:ext cx="3657600" cy="1371600"/>
+          </a:xfrm>
+          <a:prstGeom prst="roundRect">
+            <a:avLst>
+              <a:gd name="adj" fmla="val 6667"/>
+            </a:avLst>
+          </a:prstGeom>
+          <a:solidFill>
+            <a:srgbClr val="1A2332"/>
+          </a:solidFill>
+          <a:ln/>
+        </p:spPr>
+      </p:sp>
+      <p:pic>
+        <p:nvPicPr>
+          <p:cNvPr id="10" name="Image 2" descr="preencoded.png">    </p:cNvPr>
+          <p:cNvPicPr>
+            <a:picLocks noChangeAspect="1"/>
+          </p:cNvPicPr>
+          <p:nvPr/>
+        </p:nvPicPr>
+        <p:blipFill>
+          <a:blip r:embed="rId3"/>
+          <a:stretch>
+            <a:fillRect/>
+          </a:stretch>
+        </p:blipFill>
+        <p:spPr>
+          <a:xfrm>
+            <a:off x="868680" y="2651760"/>
+            <a:ext cx="502920" cy="502920"/>
+          </a:xfrm>
+          <a:prstGeom prst="rect">
+            <a:avLst/>
+          </a:prstGeom>
+        </p:spPr>
+      </p:pic>
+      <p:sp>
+        <p:nvSpPr>
+          <p:cNvPr id="11" name="Text 6"/>
+          <p:cNvSpPr txBox="1"/>
+          <p:nvPr/>
+        </p:nvSpPr>
+        <p:spPr>
+          <a:xfrm>
+            <a:off x="868680" y="3227832"/>
+            <a:ext cx="3383280" cy="320040"/>
+          </a:xfrm>
+          <a:prstGeom prst="rect">
+            <a:avLst/>
+          </a:prstGeom>
+          <a:noFill/>
+          <a:ln/>
+        </p:spPr>
+        <p:txBody>
+          <a:bodyPr wrap="square" lIns="0" tIns="0" rIns="0" bIns="0" rtlCol="0" anchor="t"/>
+          <a:lstStyle/>
+          <a:p>
+            <a:pPr indent="0" marL="0">
+              <a:buNone/>
+            </a:pPr>
+            <a:r>
+              <a:rPr lang="en-US" sz="1100" b="1" dirty="0">
+                <a:solidFill>
+                  <a:srgbClr val="FFFFFF"/>
+                </a:solidFill>
+                <a:latin typeface="Calibri" pitchFamily="34" charset="0"/>
+                <a:ea typeface="Calibri" pitchFamily="34" charset="-122"/>
+                <a:cs typeface="Calibri" pitchFamily="34" charset="-120"/>
+              </a:rPr>
+              <a:t>TON est né de Telegram.</a:t>
+            </a:r>
+            <a:endParaRPr lang="en-US" sz="1100" dirty="0"/>
+          </a:p>
+        </p:txBody>
+      </p:sp>
+      <p:sp>
+        <p:nvSpPr>
+          <p:cNvPr id="12" name="Shape 7"/>
+          <p:cNvSpPr/>
+          <p:nvPr/>
+        </p:nvSpPr>
+        <p:spPr>
+          <a:xfrm>
+            <a:off x="4754880" y="2514600"/>
+            <a:ext cx="3657600" cy="1371600"/>
+          </a:xfrm>
+          <a:prstGeom prst="roundRect">
+            <a:avLst>
+              <a:gd name="adj" fmla="val 6667"/>
+            </a:avLst>
+          </a:prstGeom>
+          <a:solidFill>
+            <a:srgbClr val="1A2332"/>
+          </a:solidFill>
+          <a:ln/>
+        </p:spPr>
+      </p:sp>
+      <p:pic>
+        <p:nvPicPr>
+          <p:cNvPr id="13" name="Image 3" descr="preencoded.png">    </p:cNvPr>
+          <p:cNvPicPr>
+            <a:picLocks noChangeAspect="1"/>
+          </p:cNvPicPr>
+          <p:nvPr/>
+        </p:nvPicPr>
+        <p:blipFill>
+          <a:blip r:embed="rId4"/>
+          <a:stretch>
+            <a:fillRect/>
+          </a:stretch>
+        </p:blipFill>
+        <p:spPr>
+          <a:xfrm>
+            <a:off x="4892040" y="2651760"/>
+            <a:ext cx="502920" cy="502920"/>
+          </a:xfrm>
+          <a:prstGeom prst="rect">
+            <a:avLst/>
+          </a:prstGeom>
+        </p:spPr>
+      </p:pic>
+      <p:sp>
+        <p:nvSpPr>
+          <p:cNvPr id="14" name="Text 8"/>
+          <p:cNvSpPr txBox="1"/>
+          <p:nvPr/>
+        </p:nvSpPr>
+        <p:spPr>
+          <a:xfrm>
+            <a:off x="4892040" y="3227832"/>
+            <a:ext cx="3383280" cy="320040"/>
+          </a:xfrm>
+          <a:prstGeom prst="rect">
+            <a:avLst/>
+          </a:prstGeom>
+          <a:noFill/>
+          <a:ln/>
+        </p:spPr>
+        <p:txBody>
+          <a:bodyPr wrap="square" lIns="0" tIns="0" rIns="0" bIns="0" rtlCol="0" anchor="t"/>
+          <a:lstStyle/>
+          <a:p>
+            <a:pPr indent="0" marL="0">
+              <a:buNone/>
+            </a:pPr>
+            <a:r>
+              <a:rPr lang="en-US" sz="1100" b="1" dirty="0">
+                <a:solidFill>
+                  <a:srgbClr val="FFFFFF"/>
+                </a:solidFill>
+                <a:latin typeface="Calibri" pitchFamily="34" charset="0"/>
+                <a:ea typeface="Calibri" pitchFamily="34" charset="-122"/>
+                <a:cs typeface="Calibri" pitchFamily="34" charset="-120"/>
+              </a:rPr>
+              <a:t>Ils promettent des performances encore supérieures.</a:t>
+            </a:r>
+            <a:endParaRPr lang="en-US" sz="1100" dirty="0"/>
+          </a:p>
+        </p:txBody>
+      </p:sp>
+    </p:spTree>
+  </p:cSld>
+  <p:clrMapOvr>
+    <a:masterClrMapping/>
+  </p:clrMapOvr>
+</p:sld>
+</file>
+
+<file path=ppt/slides/slide21.xml><?xml version="1.0" encoding="utf-8"?>
+<p:sld xmlns:a="http://schemas.openxmlformats.org/drawingml/2006/main" xmlns:r="http://schemas.openxmlformats.org/officeDocument/2006/relationships" xmlns:p="http://schemas.openxmlformats.org/presentationml/2006/main">
+  <p:cSld name="Slide 21">
+    <p:bg>
+      <p:bgPr>
+        <a:solidFill>
+          <a:srgbClr val="0F1419"/>
+        </a:solidFill>
+      </p:bgPr>
+    </p:bg>
+    <p:spTree>
+      <p:nvGrpSpPr>
+        <p:cNvPr id="1" name=""/>
+        <p:cNvGrpSpPr/>
+        <p:nvPr/>
+      </p:nvGrpSpPr>
+      <p:grpSpPr>
+        <a:xfrm>
+          <a:off x="0" y="0"/>
+          <a:ext cx="0" cy="0"/>
+          <a:chOff x="0" y="0"/>
+          <a:chExt cx="0" cy="0"/>
+        </a:xfrm>
+      </p:grpSpPr>
+      <p:sp>
+        <p:nvSpPr>
+          <p:cNvPr id="2" name="Shape 0"/>
+          <p:cNvSpPr/>
+          <p:nvPr/>
+        </p:nvSpPr>
+        <p:spPr>
+          <a:xfrm>
+            <a:off x="7955280" y="182880"/>
+            <a:ext cx="640080" cy="640080"/>
+          </a:xfrm>
+          <a:prstGeom prst="ellipse">
+            <a:avLst/>
+          </a:prstGeom>
+          <a:solidFill>
+            <a:srgbClr val="22C55E">
+              <a:alpha val="12000"/>
+            </a:srgbClr>
+          </a:solidFill>
+          <a:ln/>
+        </p:spPr>
+      </p:sp>
+      <p:pic>
+        <p:nvPicPr>
+          <p:cNvPr id="3" name="Image 0" descr="preencoded.png">    </p:cNvPr>
+          <p:cNvPicPr>
+            <a:picLocks noChangeAspect="1"/>
+          </p:cNvPicPr>
+          <p:nvPr/>
+        </p:nvPicPr>
+        <p:blipFill>
+          <a:blip r:embed="rId1"/>
+          <a:stretch>
+            <a:fillRect/>
+          </a:stretch>
+        </p:blipFill>
+        <p:spPr>
+          <a:xfrm>
+            <a:off x="8028432" y="256032"/>
+            <a:ext cx="493776" cy="493776"/>
+          </a:xfrm>
+          <a:prstGeom prst="rect">
+            <a:avLst/>
+          </a:prstGeom>
+        </p:spPr>
+      </p:pic>
+      <p:sp>
+        <p:nvSpPr>
+          <p:cNvPr id="4" name="Text 1"/>
+          <p:cNvSpPr txBox="1"/>
+          <p:nvPr/>
+        </p:nvSpPr>
+        <p:spPr>
+          <a:xfrm>
+            <a:off x="731520" y="274320"/>
+            <a:ext cx="7132320" cy="502920"/>
+          </a:xfrm>
+          <a:prstGeom prst="rect">
+            <a:avLst/>
+          </a:prstGeom>
+          <a:noFill/>
+          <a:ln/>
+        </p:spPr>
+        <p:txBody>
+          <a:bodyPr wrap="square" lIns="0" tIns="0" rIns="0" bIns="0" rtlCol="0" anchor="ctr"/>
+          <a:lstStyle/>
+          <a:p>
+            <a:pPr indent="0" marL="0">
+              <a:buNone/>
+            </a:pPr>
+            <a:r>
+              <a:rPr lang="en-US" sz="2000" b="1" dirty="0">
+                <a:solidFill>
+                  <a:srgbClr val="22C55E"/>
+                </a:solidFill>
+                <a:latin typeface="Calibri" pitchFamily="34" charset="0"/>
+                <a:ea typeface="Calibri" pitchFamily="34" charset="-122"/>
+                <a:cs typeface="Calibri" pitchFamily="34" charset="-120"/>
+              </a:rPr>
+              <a:t>Ce qu'il faut retenir</a:t>
+            </a:r>
+            <a:endParaRPr lang="en-US" sz="2000" dirty="0"/>
+          </a:p>
+        </p:txBody>
+      </p:sp>
+      <p:sp>
+        <p:nvSpPr>
+          <p:cNvPr id="5" name="Text 2"/>
+          <p:cNvSpPr txBox="1"/>
+          <p:nvPr/>
+        </p:nvSpPr>
+        <p:spPr>
+          <a:xfrm>
+            <a:off x="731520" y="960120"/>
+            <a:ext cx="7680960" cy="3657600"/>
+          </a:xfrm>
+          <a:prstGeom prst="rect">
+            <a:avLst/>
+          </a:prstGeom>
+          <a:noFill/>
+          <a:ln/>
+        </p:spPr>
+        <p:txBody>
+          <a:bodyPr wrap="square" lIns="0" tIns="0" rIns="0" bIns="0" rtlCol="0" anchor="t"/>
+          <a:lstStyle/>
+          <a:p>
+            <a:pPr marL="342900" indent="-342900">
               <a:spcAft>
-                <a:spcPts val="1000"/>
+                <a:spcPts val="800"/>
               </a:spcAft>
+              <a:buSzPct val="100000"/>
+              <a:buChar char="•"/>
+            </a:pPr>
+            <a:r>
+              <a:rPr lang="en-US" sz="1400" dirty="0">
+                <a:solidFill>
+                  <a:srgbClr val="FFFFFF"/>
+                </a:solidFill>
+                <a:latin typeface="Calibri" pitchFamily="34" charset="0"/>
+                <a:ea typeface="Calibri" pitchFamily="34" charset="-122"/>
+                <a:cs typeface="Calibri" pitchFamily="34" charset="-120"/>
+              </a:rPr>
+              <a:t>Pour un utilisateur africain qui veut de l'USDT :</a:t>
+            </a:r>
+            <a:endParaRPr lang="en-US" sz="1400" dirty="0"/>
+          </a:p>
+          <a:p>
+            <a:pPr marL="342900" indent="-342900">
+              <a:spcAft>
+                <a:spcPts val="800"/>
+              </a:spcAft>
+              <a:buSzPct val="100000"/>
+              <a:buChar char="•"/>
+            </a:pPr>
+            <a:r>
+              <a:rPr lang="en-US" sz="1400" dirty="0">
+                <a:solidFill>
+                  <a:srgbClr val="FFFFFF"/>
+                </a:solidFill>
+                <a:latin typeface="Calibri" pitchFamily="34" charset="0"/>
+                <a:ea typeface="Calibri" pitchFamily="34" charset="-122"/>
+                <a:cs typeface="Calibri" pitchFamily="34" charset="-120"/>
+              </a:rPr>
+              <a:t>TRC20 (Tron) = le moins cher, le plus utilisé en Afrique. Notre recommandation par défaut.</a:t>
+            </a:r>
+            <a:endParaRPr lang="en-US" sz="1400" dirty="0"/>
+          </a:p>
+          <a:p>
+            <a:pPr marL="342900" indent="-342900">
+              <a:spcAft>
+                <a:spcPts val="800"/>
+              </a:spcAft>
+              <a:buSzPct val="100000"/>
+              <a:buChar char="•"/>
+            </a:pPr>
+            <a:r>
+              <a:rPr lang="en-US" sz="1400" dirty="0">
+                <a:solidFill>
+                  <a:srgbClr val="FFFFFF"/>
+                </a:solidFill>
+                <a:latin typeface="Calibri" pitchFamily="34" charset="0"/>
+                <a:ea typeface="Calibri" pitchFamily="34" charset="-122"/>
+                <a:cs typeface="Calibri" pitchFamily="34" charset="-120"/>
+              </a:rPr>
+              <a:t>BEP20 (BNB Chain) = pas cher, utile si vous utilisez Binance.</a:t>
+            </a:r>
+            <a:endParaRPr lang="en-US" sz="1400" dirty="0"/>
+          </a:p>
+          <a:p>
+            <a:pPr marL="342900" indent="-342900">
+              <a:spcAft>
+                <a:spcPts val="800"/>
+              </a:spcAft>
+              <a:buSzPct val="100000"/>
+              <a:buChar char="•"/>
+            </a:pPr>
+            <a:r>
+              <a:rPr lang="en-US" sz="1400" dirty="0">
+                <a:solidFill>
+                  <a:srgbClr val="FFFFFF"/>
+                </a:solidFill>
+                <a:latin typeface="Calibri" pitchFamily="34" charset="0"/>
+                <a:ea typeface="Calibri" pitchFamily="34" charset="-122"/>
+                <a:cs typeface="Calibri" pitchFamily="34" charset="-120"/>
+              </a:rPr>
+              <a:t>ERC20 (Ethereum) = le plus universel, mais frais plus élevés.</a:t>
+            </a:r>
+            <a:endParaRPr lang="en-US" sz="1400" dirty="0"/>
+          </a:p>
+          <a:p>
+            <a:pPr marL="342900" indent="-342900">
+              <a:spcAft>
+                <a:spcPts val="800"/>
+              </a:spcAft>
+              <a:buSzPct val="100000"/>
+              <a:buChar char="•"/>
+            </a:pPr>
+            <a:r>
+              <a:rPr lang="en-US" sz="1400" dirty="0">
+                <a:solidFill>
+                  <a:srgbClr val="FFFFFF"/>
+                </a:solidFill>
+                <a:latin typeface="Calibri" pitchFamily="34" charset="0"/>
+                <a:ea typeface="Calibri" pitchFamily="34" charset="-122"/>
+                <a:cs typeface="Calibri" pitchFamily="34" charset="-120"/>
+              </a:rPr>
+              <a:t>Polygon, Solana, Aptos = si votre destinataire vous demande spécifiquement ce réseau.</a:t>
+            </a:r>
+            <a:endParaRPr lang="en-US" sz="1400" dirty="0"/>
+          </a:p>
+          <a:p>
+            <a:pPr marL="342900" indent="-342900">
+              <a:spcAft>
+                <a:spcPts val="800"/>
+              </a:spcAft>
+              <a:buSzPct val="100000"/>
+              <a:buChar char="•"/>
+            </a:pPr>
+            <a:r>
+              <a:rPr lang="en-US" sz="1400" dirty="0">
+                <a:solidFill>
+                  <a:srgbClr val="FFFFFF"/>
+                </a:solidFill>
+                <a:latin typeface="Calibri" pitchFamily="34" charset="0"/>
+                <a:ea typeface="Calibri" pitchFamily="34" charset="-122"/>
+                <a:cs typeface="Calibri" pitchFamily="34" charset="-120"/>
+              </a:rPr>
+              <a:t>Règle d'or absolue : le réseau d'envoi et le réseau de réception DOIVENT être identiques. Envoyer de l'USDT-TRC20 sur une adresse ERC20 = perte définitive. Nous approfondirons c...</a:t>
+            </a:r>
+            <a:endParaRPr lang="en-US" sz="1400" dirty="0"/>
+          </a:p>
+        </p:txBody>
+      </p:sp>
+      <p:sp>
+        <p:nvSpPr>
+          <p:cNvPr id="6" name="Text 3"/>
+          <p:cNvSpPr txBox="1"/>
+          <p:nvPr/>
+        </p:nvSpPr>
+        <p:spPr>
+          <a:xfrm>
+            <a:off x="731520" y="4709160"/>
+            <a:ext cx="7680960" cy="274320"/>
+          </a:xfrm>
+          <a:prstGeom prst="rect">
+            <a:avLst/>
+          </a:prstGeom>
+          <a:noFill/>
+          <a:ln/>
+        </p:spPr>
+        <p:txBody>
+          <a:bodyPr wrap="square" lIns="0" tIns="0" rIns="0" bIns="0" rtlCol="0" anchor="ctr"/>
+          <a:lstStyle/>
+          <a:p>
+            <a:pPr algn="r" indent="0" marL="0">
               <a:buNone/>
             </a:pPr>
             <a:r>
-              <a:rPr lang="en-US" sz="1500" dirty="0">
+              <a:rPr lang="en-US" sz="900" dirty="0">
+                <a:solidFill>
+                  <a:srgbClr val="64748B"/>
+                </a:solidFill>
+                <a:latin typeface="Calibri" pitchFamily="34" charset="0"/>
+                <a:ea typeface="Calibri" pitchFamily="34" charset="-122"/>
+                <a:cs typeface="Calibri" pitchFamily="34" charset="-120"/>
+              </a:rPr>
+              <a:t>Module 5 — Leçon 3</a:t>
+            </a:r>
+            <a:endParaRPr lang="en-US" sz="900" dirty="0"/>
+          </a:p>
+        </p:txBody>
+      </p:sp>
+    </p:spTree>
+  </p:cSld>
+  <p:clrMapOvr>
+    <a:masterClrMapping/>
+  </p:clrMapOvr>
+</p:sld>
+</file>
+
+<file path=ppt/slides/slide22.xml><?xml version="1.0" encoding="utf-8"?>
+<p:sld xmlns:a="http://schemas.openxmlformats.org/drawingml/2006/main" xmlns:r="http://schemas.openxmlformats.org/officeDocument/2006/relationships" xmlns:p="http://schemas.openxmlformats.org/presentationml/2006/main">
+  <p:cSld name="Slide 22">
+    <p:bg>
+      <p:bgPr>
+        <a:solidFill>
+          <a:srgbClr val="1A2332"/>
+        </a:solidFill>
+      </p:bgPr>
+    </p:bg>
+    <p:spTree>
+      <p:nvGrpSpPr>
+        <p:cNvPr id="1" name=""/>
+        <p:cNvGrpSpPr/>
+        <p:nvPr/>
+      </p:nvGrpSpPr>
+      <p:grpSpPr>
+        <a:xfrm>
+          <a:off x="0" y="0"/>
+          <a:ext cx="0" cy="0"/>
+          <a:chOff x="0" y="0"/>
+          <a:chExt cx="0" cy="0"/>
+        </a:xfrm>
+      </p:grpSpPr>
+      <p:pic>
+        <p:nvPicPr>
+          <p:cNvPr id="2" name="Image 0" descr="preencoded.png">    </p:cNvPr>
+          <p:cNvPicPr>
+            <a:picLocks noChangeAspect="1"/>
+          </p:cNvPicPr>
+          <p:nvPr/>
+        </p:nvPicPr>
+        <p:blipFill>
+          <a:blip r:embed="rId1"/>
+          <a:stretch>
+            <a:fillRect/>
+          </a:stretch>
+        </p:blipFill>
+        <p:spPr>
+          <a:xfrm>
+            <a:off x="731520" y="320040"/>
+            <a:ext cx="457200" cy="457200"/>
+          </a:xfrm>
+          <a:prstGeom prst="rect">
+            <a:avLst/>
+          </a:prstGeom>
+        </p:spPr>
+      </p:pic>
+      <p:sp>
+        <p:nvSpPr>
+          <p:cNvPr id="3" name="Text 0"/>
+          <p:cNvSpPr txBox="1"/>
+          <p:nvPr/>
+        </p:nvSpPr>
+        <p:spPr>
+          <a:xfrm>
+            <a:off x="1280160" y="365760"/>
+            <a:ext cx="2743200" cy="320040"/>
+          </a:xfrm>
+          <a:prstGeom prst="rect">
+            <a:avLst/>
+          </a:prstGeom>
+          <a:noFill/>
+          <a:ln/>
+        </p:spPr>
+        <p:txBody>
+          <a:bodyPr wrap="square" lIns="0" tIns="0" rIns="0" bIns="0" rtlCol="0" anchor="ctr"/>
+          <a:lstStyle/>
+          <a:p>
+            <a:pPr indent="0" marL="0">
+              <a:buNone/>
+            </a:pPr>
+            <a:r>
+              <a:rPr lang="en-US" sz="1200" b="1" spc="300" kern="0" dirty="0">
+                <a:solidFill>
+                  <a:srgbClr val="F59E0B"/>
+                </a:solidFill>
+                <a:latin typeface="Calibri" pitchFamily="34" charset="0"/>
+                <a:ea typeface="Calibri" pitchFamily="34" charset="-122"/>
+                <a:cs typeface="Calibri" pitchFamily="34" charset="-120"/>
+              </a:rPr>
+              <a:t>A RETENIR</a:t>
+            </a:r>
+            <a:endParaRPr lang="en-US" sz="1200" dirty="0"/>
+          </a:p>
+        </p:txBody>
+      </p:sp>
+      <p:sp>
+        <p:nvSpPr>
+          <p:cNvPr id="4" name="Text 1"/>
+          <p:cNvSpPr txBox="1"/>
+          <p:nvPr/>
+        </p:nvSpPr>
+        <p:spPr>
+          <a:xfrm>
+            <a:off x="731520" y="822960"/>
+            <a:ext cx="7680960" cy="457200"/>
+          </a:xfrm>
+          <a:prstGeom prst="rect">
+            <a:avLst/>
+          </a:prstGeom>
+          <a:noFill/>
+          <a:ln/>
+        </p:spPr>
+        <p:txBody>
+          <a:bodyPr wrap="square" lIns="0" tIns="0" rIns="0" bIns="0" rtlCol="0" anchor="ctr"/>
+          <a:lstStyle/>
+          <a:p>
+            <a:pPr indent="0" marL="0">
+              <a:buNone/>
+            </a:pPr>
+            <a:r>
+              <a:rPr lang="en-US" sz="2000" b="1" dirty="0">
                 <a:solidFill>
                   <a:srgbClr val="FFFFFF"/>
                 </a:solidFill>
@@ -5152,19 +7586,103 @@
                 <a:ea typeface="Calibri" pitchFamily="34" charset="-122"/>
                 <a:cs typeface="Calibri" pitchFamily="34" charset="-120"/>
               </a:rPr>
-              <a:t>1.  Bitcoin (BTC) — l'or numérique</a:t>
+              <a:t>BNB, Solana, Tron, Polygon — les autres écosystèmes</a:t>
+            </a:r>
+            <a:endParaRPr lang="en-US" sz="2000" dirty="0"/>
+          </a:p>
+        </p:txBody>
+      </p:sp>
+      <p:sp>
+        <p:nvSpPr>
+          <p:cNvPr id="5" name="Shape 2"/>
+          <p:cNvSpPr/>
+          <p:nvPr/>
+        </p:nvSpPr>
+        <p:spPr>
+          <a:xfrm>
+            <a:off x="731520" y="1463040"/>
+            <a:ext cx="7680960" cy="548640"/>
+          </a:xfrm>
+          <a:prstGeom prst="roundRect">
+            <a:avLst>
+              <a:gd name="adj" fmla="val 13333"/>
+            </a:avLst>
+          </a:prstGeom>
+          <a:solidFill>
+            <a:srgbClr val="0F1419"/>
+          </a:solidFill>
+          <a:ln/>
+        </p:spPr>
+      </p:sp>
+      <p:sp>
+        <p:nvSpPr>
+          <p:cNvPr id="6" name="Text 3"/>
+          <p:cNvSpPr txBox="1"/>
+          <p:nvPr/>
+        </p:nvSpPr>
+        <p:spPr>
+          <a:xfrm>
+            <a:off x="914400" y="1463040"/>
+            <a:ext cx="411480" cy="548640"/>
+          </a:xfrm>
+          <a:prstGeom prst="roundRect">
+            <a:avLst>
+              <a:gd name="adj" fmla="val 48889"/>
+            </a:avLst>
+          </a:prstGeom>
+          <a:solidFill>
+            <a:srgbClr val="22C55E"/>
+          </a:solidFill>
+          <a:ln/>
+        </p:spPr>
+        <p:txBody>
+          <a:bodyPr wrap="square" lIns="0" tIns="0" rIns="0" bIns="0" rtlCol="0" anchor="ctr"/>
+          <a:lstStyle/>
+          <a:p>
+            <a:pPr algn="ctr" indent="0" marL="0">
+              <a:buNone/>
+            </a:pPr>
+            <a:r>
+              <a:rPr lang="en-US" sz="1500" b="1" dirty="0">
+                <a:solidFill>
+                  <a:srgbClr val="0F1419"/>
+                </a:solidFill>
+                <a:latin typeface="Calibri" pitchFamily="34" charset="0"/>
+                <a:ea typeface="Calibri" pitchFamily="34" charset="-122"/>
+                <a:cs typeface="Calibri" pitchFamily="34" charset="-120"/>
+              </a:rPr>
+              <a:t>1</a:t>
             </a:r>
             <a:endParaRPr lang="en-US" sz="1500" dirty="0"/>
           </a:p>
+        </p:txBody>
+      </p:sp>
+      <p:sp>
+        <p:nvSpPr>
+          <p:cNvPr id="7" name="Text 4"/>
+          <p:cNvSpPr txBox="1"/>
+          <p:nvPr/>
+        </p:nvSpPr>
+        <p:spPr>
+          <a:xfrm>
+            <a:off x="1508760" y="1463040"/>
+            <a:ext cx="6766560" cy="548640"/>
+          </a:xfrm>
+          <a:prstGeom prst="rect">
+            <a:avLst/>
+          </a:prstGeom>
+          <a:noFill/>
+          <a:ln/>
+        </p:spPr>
+        <p:txBody>
+          <a:bodyPr wrap="square" lIns="0" tIns="0" rIns="0" bIns="0" rtlCol="0" anchor="ctr"/>
+          <a:lstStyle/>
           <a:p>
             <a:pPr indent="0" marL="0">
-              <a:spcAft>
-                <a:spcPts val="1000"/>
-              </a:spcAft>
               <a:buNone/>
             </a:pPr>
             <a:r>
-              <a:rPr lang="en-US" sz="1500" dirty="0">
+              <a:rPr lang="en-US" sz="1300" dirty="0">
                 <a:solidFill>
                   <a:srgbClr val="FFFFFF"/>
                 </a:solidFill>
@@ -5172,19 +7690,103 @@
                 <a:ea typeface="Calibri" pitchFamily="34" charset="-122"/>
                 <a:cs typeface="Calibri" pitchFamily="34" charset="-120"/>
               </a:rPr>
-              <a:t>2.  Ethereum (ETH) — l'ordinateur mondial</a:t>
+              <a:t>TRC20 (Tron) = le moins cher, le plus utilisé en Afrique. Notre recommandation par défaut.</a:t>
+            </a:r>
+            <a:endParaRPr lang="en-US" sz="1300" dirty="0"/>
+          </a:p>
+        </p:txBody>
+      </p:sp>
+      <p:sp>
+        <p:nvSpPr>
+          <p:cNvPr id="8" name="Shape 5"/>
+          <p:cNvSpPr/>
+          <p:nvPr/>
+        </p:nvSpPr>
+        <p:spPr>
+          <a:xfrm>
+            <a:off x="731520" y="2103120"/>
+            <a:ext cx="7680960" cy="548640"/>
+          </a:xfrm>
+          <a:prstGeom prst="roundRect">
+            <a:avLst>
+              <a:gd name="adj" fmla="val 13333"/>
+            </a:avLst>
+          </a:prstGeom>
+          <a:solidFill>
+            <a:srgbClr val="0F1419"/>
+          </a:solidFill>
+          <a:ln/>
+        </p:spPr>
+      </p:sp>
+      <p:sp>
+        <p:nvSpPr>
+          <p:cNvPr id="9" name="Text 6"/>
+          <p:cNvSpPr txBox="1"/>
+          <p:nvPr/>
+        </p:nvSpPr>
+        <p:spPr>
+          <a:xfrm>
+            <a:off x="914400" y="2103120"/>
+            <a:ext cx="411480" cy="548640"/>
+          </a:xfrm>
+          <a:prstGeom prst="roundRect">
+            <a:avLst>
+              <a:gd name="adj" fmla="val 48889"/>
+            </a:avLst>
+          </a:prstGeom>
+          <a:solidFill>
+            <a:srgbClr val="22C55E"/>
+          </a:solidFill>
+          <a:ln/>
+        </p:spPr>
+        <p:txBody>
+          <a:bodyPr wrap="square" lIns="0" tIns="0" rIns="0" bIns="0" rtlCol="0" anchor="ctr"/>
+          <a:lstStyle/>
+          <a:p>
+            <a:pPr algn="ctr" indent="0" marL="0">
+              <a:buNone/>
+            </a:pPr>
+            <a:r>
+              <a:rPr lang="en-US" sz="1500" b="1" dirty="0">
+                <a:solidFill>
+                  <a:srgbClr val="0F1419"/>
+                </a:solidFill>
+                <a:latin typeface="Calibri" pitchFamily="34" charset="0"/>
+                <a:ea typeface="Calibri" pitchFamily="34" charset="-122"/>
+                <a:cs typeface="Calibri" pitchFamily="34" charset="-120"/>
+              </a:rPr>
+              <a:t>2</a:t>
             </a:r>
             <a:endParaRPr lang="en-US" sz="1500" dirty="0"/>
           </a:p>
+        </p:txBody>
+      </p:sp>
+      <p:sp>
+        <p:nvSpPr>
+          <p:cNvPr id="10" name="Text 7"/>
+          <p:cNvSpPr txBox="1"/>
+          <p:nvPr/>
+        </p:nvSpPr>
+        <p:spPr>
+          <a:xfrm>
+            <a:off x="1508760" y="2103120"/>
+            <a:ext cx="6766560" cy="548640"/>
+          </a:xfrm>
+          <a:prstGeom prst="rect">
+            <a:avLst/>
+          </a:prstGeom>
+          <a:noFill/>
+          <a:ln/>
+        </p:spPr>
+        <p:txBody>
+          <a:bodyPr wrap="square" lIns="0" tIns="0" rIns="0" bIns="0" rtlCol="0" anchor="ctr"/>
+          <a:lstStyle/>
           <a:p>
             <a:pPr indent="0" marL="0">
-              <a:spcAft>
-                <a:spcPts val="1000"/>
-              </a:spcAft>
               <a:buNone/>
             </a:pPr>
             <a:r>
-              <a:rPr lang="en-US" sz="1500" dirty="0">
+              <a:rPr lang="en-US" sz="1300" dirty="0">
                 <a:solidFill>
                   <a:srgbClr val="FFFFFF"/>
                 </a:solidFill>
@@ -5192,9 +7794,471 @@
                 <a:ea typeface="Calibri" pitchFamily="34" charset="-122"/>
                 <a:cs typeface="Calibri" pitchFamily="34" charset="-120"/>
               </a:rPr>
-              <a:t>3.  BNB, Solana, Tron, Polygon — les autres écosystèmes</a:t>
+              <a:t>BEP20 (BNB Chain) = pas cher, utile si vous utilisez Binance.</a:t>
+            </a:r>
+            <a:endParaRPr lang="en-US" sz="1300" dirty="0"/>
+          </a:p>
+        </p:txBody>
+      </p:sp>
+      <p:sp>
+        <p:nvSpPr>
+          <p:cNvPr id="11" name="Shape 8"/>
+          <p:cNvSpPr/>
+          <p:nvPr/>
+        </p:nvSpPr>
+        <p:spPr>
+          <a:xfrm>
+            <a:off x="731520" y="2743200"/>
+            <a:ext cx="7680960" cy="548640"/>
+          </a:xfrm>
+          <a:prstGeom prst="roundRect">
+            <a:avLst>
+              <a:gd name="adj" fmla="val 13333"/>
+            </a:avLst>
+          </a:prstGeom>
+          <a:solidFill>
+            <a:srgbClr val="0F1419"/>
+          </a:solidFill>
+          <a:ln/>
+        </p:spPr>
+      </p:sp>
+      <p:sp>
+        <p:nvSpPr>
+          <p:cNvPr id="12" name="Text 9"/>
+          <p:cNvSpPr txBox="1"/>
+          <p:nvPr/>
+        </p:nvSpPr>
+        <p:spPr>
+          <a:xfrm>
+            <a:off x="914400" y="2743200"/>
+            <a:ext cx="411480" cy="548640"/>
+          </a:xfrm>
+          <a:prstGeom prst="roundRect">
+            <a:avLst>
+              <a:gd name="adj" fmla="val 48889"/>
+            </a:avLst>
+          </a:prstGeom>
+          <a:solidFill>
+            <a:srgbClr val="22C55E"/>
+          </a:solidFill>
+          <a:ln/>
+        </p:spPr>
+        <p:txBody>
+          <a:bodyPr wrap="square" lIns="0" tIns="0" rIns="0" bIns="0" rtlCol="0" anchor="ctr"/>
+          <a:lstStyle/>
+          <a:p>
+            <a:pPr algn="ctr" indent="0" marL="0">
+              <a:buNone/>
+            </a:pPr>
+            <a:r>
+              <a:rPr lang="en-US" sz="1500" b="1" dirty="0">
+                <a:solidFill>
+                  <a:srgbClr val="0F1419"/>
+                </a:solidFill>
+                <a:latin typeface="Calibri" pitchFamily="34" charset="0"/>
+                <a:ea typeface="Calibri" pitchFamily="34" charset="-122"/>
+                <a:cs typeface="Calibri" pitchFamily="34" charset="-120"/>
+              </a:rPr>
+              <a:t>3</a:t>
             </a:r>
             <a:endParaRPr lang="en-US" sz="1500" dirty="0"/>
+          </a:p>
+        </p:txBody>
+      </p:sp>
+      <p:sp>
+        <p:nvSpPr>
+          <p:cNvPr id="13" name="Text 10"/>
+          <p:cNvSpPr txBox="1"/>
+          <p:nvPr/>
+        </p:nvSpPr>
+        <p:spPr>
+          <a:xfrm>
+            <a:off x="1508760" y="2743200"/>
+            <a:ext cx="6766560" cy="548640"/>
+          </a:xfrm>
+          <a:prstGeom prst="rect">
+            <a:avLst/>
+          </a:prstGeom>
+          <a:noFill/>
+          <a:ln/>
+        </p:spPr>
+        <p:txBody>
+          <a:bodyPr wrap="square" lIns="0" tIns="0" rIns="0" bIns="0" rtlCol="0" anchor="ctr"/>
+          <a:lstStyle/>
+          <a:p>
+            <a:pPr indent="0" marL="0">
+              <a:buNone/>
+            </a:pPr>
+            <a:r>
+              <a:rPr lang="en-US" sz="1300" dirty="0">
+                <a:solidFill>
+                  <a:srgbClr val="FFFFFF"/>
+                </a:solidFill>
+                <a:latin typeface="Calibri" pitchFamily="34" charset="0"/>
+                <a:ea typeface="Calibri" pitchFamily="34" charset="-122"/>
+                <a:cs typeface="Calibri" pitchFamily="34" charset="-120"/>
+              </a:rPr>
+              <a:t>ERC20 (Ethereum) = le plus universel, mais frais plus élevés.</a:t>
+            </a:r>
+            <a:endParaRPr lang="en-US" sz="1300" dirty="0"/>
+          </a:p>
+        </p:txBody>
+      </p:sp>
+      <p:sp>
+        <p:nvSpPr>
+          <p:cNvPr id="14" name="Shape 11"/>
+          <p:cNvSpPr/>
+          <p:nvPr/>
+        </p:nvSpPr>
+        <p:spPr>
+          <a:xfrm>
+            <a:off x="731520" y="3383280"/>
+            <a:ext cx="7680960" cy="548640"/>
+          </a:xfrm>
+          <a:prstGeom prst="roundRect">
+            <a:avLst>
+              <a:gd name="adj" fmla="val 13333"/>
+            </a:avLst>
+          </a:prstGeom>
+          <a:solidFill>
+            <a:srgbClr val="0F1419"/>
+          </a:solidFill>
+          <a:ln/>
+        </p:spPr>
+      </p:sp>
+      <p:sp>
+        <p:nvSpPr>
+          <p:cNvPr id="15" name="Text 12"/>
+          <p:cNvSpPr txBox="1"/>
+          <p:nvPr/>
+        </p:nvSpPr>
+        <p:spPr>
+          <a:xfrm>
+            <a:off x="914400" y="3383280"/>
+            <a:ext cx="411480" cy="548640"/>
+          </a:xfrm>
+          <a:prstGeom prst="roundRect">
+            <a:avLst>
+              <a:gd name="adj" fmla="val 48889"/>
+            </a:avLst>
+          </a:prstGeom>
+          <a:solidFill>
+            <a:srgbClr val="22C55E"/>
+          </a:solidFill>
+          <a:ln/>
+        </p:spPr>
+        <p:txBody>
+          <a:bodyPr wrap="square" lIns="0" tIns="0" rIns="0" bIns="0" rtlCol="0" anchor="ctr"/>
+          <a:lstStyle/>
+          <a:p>
+            <a:pPr algn="ctr" indent="0" marL="0">
+              <a:buNone/>
+            </a:pPr>
+            <a:r>
+              <a:rPr lang="en-US" sz="1500" b="1" dirty="0">
+                <a:solidFill>
+                  <a:srgbClr val="0F1419"/>
+                </a:solidFill>
+                <a:latin typeface="Calibri" pitchFamily="34" charset="0"/>
+                <a:ea typeface="Calibri" pitchFamily="34" charset="-122"/>
+                <a:cs typeface="Calibri" pitchFamily="34" charset="-120"/>
+              </a:rPr>
+              <a:t>4</a:t>
+            </a:r>
+            <a:endParaRPr lang="en-US" sz="1500" dirty="0"/>
+          </a:p>
+        </p:txBody>
+      </p:sp>
+      <p:sp>
+        <p:nvSpPr>
+          <p:cNvPr id="16" name="Text 13"/>
+          <p:cNvSpPr txBox="1"/>
+          <p:nvPr/>
+        </p:nvSpPr>
+        <p:spPr>
+          <a:xfrm>
+            <a:off x="1508760" y="3383280"/>
+            <a:ext cx="6766560" cy="548640"/>
+          </a:xfrm>
+          <a:prstGeom prst="rect">
+            <a:avLst/>
+          </a:prstGeom>
+          <a:noFill/>
+          <a:ln/>
+        </p:spPr>
+        <p:txBody>
+          <a:bodyPr wrap="square" lIns="0" tIns="0" rIns="0" bIns="0" rtlCol="0" anchor="ctr"/>
+          <a:lstStyle/>
+          <a:p>
+            <a:pPr indent="0" marL="0">
+              <a:buNone/>
+            </a:pPr>
+            <a:r>
+              <a:rPr lang="en-US" sz="1300" dirty="0">
+                <a:solidFill>
+                  <a:srgbClr val="FFFFFF"/>
+                </a:solidFill>
+                <a:latin typeface="Calibri" pitchFamily="34" charset="0"/>
+                <a:ea typeface="Calibri" pitchFamily="34" charset="-122"/>
+                <a:cs typeface="Calibri" pitchFamily="34" charset="-120"/>
+              </a:rPr>
+              <a:t>Polygon, Solana, Aptos = si votre destinataire vous demande spécifiquement ce réseau.</a:t>
+            </a:r>
+            <a:endParaRPr lang="en-US" sz="1300" dirty="0"/>
+          </a:p>
+        </p:txBody>
+      </p:sp>
+    </p:spTree>
+  </p:cSld>
+  <p:clrMapOvr>
+    <a:masterClrMapping/>
+  </p:clrMapOvr>
+</p:sld>
+</file>
+
+<file path=ppt/slides/slide23.xml><?xml version="1.0" encoding="utf-8"?>
+<p:sld xmlns:a="http://schemas.openxmlformats.org/drawingml/2006/main" xmlns:r="http://schemas.openxmlformats.org/officeDocument/2006/relationships" xmlns:p="http://schemas.openxmlformats.org/presentationml/2006/main">
+  <p:cSld name="Slide 23">
+    <p:bg>
+      <p:bgPr>
+        <a:solidFill>
+          <a:srgbClr val="0F1419"/>
+        </a:solidFill>
+      </p:bgPr>
+    </p:bg>
+    <p:spTree>
+      <p:nvGrpSpPr>
+        <p:cNvPr id="1" name=""/>
+        <p:cNvGrpSpPr/>
+        <p:nvPr/>
+      </p:nvGrpSpPr>
+      <p:grpSpPr>
+        <a:xfrm>
+          <a:off x="0" y="0"/>
+          <a:ext cx="0" cy="0"/>
+          <a:chOff x="0" y="0"/>
+          <a:chExt cx="0" cy="0"/>
+        </a:xfrm>
+      </p:grpSpPr>
+      <p:sp>
+        <p:nvSpPr>
+          <p:cNvPr id="2" name="Shape 0"/>
+          <p:cNvSpPr/>
+          <p:nvPr/>
+        </p:nvSpPr>
+        <p:spPr>
+          <a:xfrm>
+            <a:off x="2743200" y="457200"/>
+            <a:ext cx="3657600" cy="3657600"/>
+          </a:xfrm>
+          <a:prstGeom prst="ellipse">
+            <a:avLst/>
+          </a:prstGeom>
+          <a:solidFill>
+            <a:srgbClr val="22C55E">
+              <a:alpha val="6000"/>
+            </a:srgbClr>
+          </a:solidFill>
+          <a:ln/>
+        </p:spPr>
+      </p:sp>
+      <p:pic>
+        <p:nvPicPr>
+          <p:cNvPr id="3" name="Image 0" descr="preencoded.png">    </p:cNvPr>
+          <p:cNvPicPr>
+            <a:picLocks noChangeAspect="1"/>
+          </p:cNvPicPr>
+          <p:nvPr/>
+        </p:nvPicPr>
+        <p:blipFill>
+          <a:blip r:embed="rId1"/>
+          <a:stretch>
+            <a:fillRect/>
+          </a:stretch>
+        </p:blipFill>
+        <p:spPr>
+          <a:xfrm>
+            <a:off x="3931920" y="914400"/>
+            <a:ext cx="1280160" cy="1280160"/>
+          </a:xfrm>
+          <a:prstGeom prst="rect">
+            <a:avLst/>
+          </a:prstGeom>
+        </p:spPr>
+      </p:pic>
+      <p:sp>
+        <p:nvSpPr>
+          <p:cNvPr id="4" name="Text 1"/>
+          <p:cNvSpPr txBox="1"/>
+          <p:nvPr/>
+        </p:nvSpPr>
+        <p:spPr>
+          <a:xfrm>
+            <a:off x="731520" y="2377440"/>
+            <a:ext cx="7680960" cy="548640"/>
+          </a:xfrm>
+          <a:prstGeom prst="rect">
+            <a:avLst/>
+          </a:prstGeom>
+          <a:noFill/>
+          <a:ln/>
+        </p:spPr>
+        <p:txBody>
+          <a:bodyPr wrap="square" lIns="0" tIns="0" rIns="0" bIns="0" rtlCol="0" anchor="ctr"/>
+          <a:lstStyle/>
+          <a:p>
+            <a:pPr algn="ctr" indent="0" marL="0">
+              <a:buNone/>
+            </a:pPr>
+            <a:r>
+              <a:rPr lang="en-US" sz="2800" b="1" dirty="0">
+                <a:solidFill>
+                  <a:srgbClr val="FFFFFF"/>
+                </a:solidFill>
+                <a:latin typeface="Calibri" pitchFamily="34" charset="0"/>
+                <a:ea typeface="Calibri" pitchFamily="34" charset="-122"/>
+                <a:cs typeface="Calibri" pitchFamily="34" charset="-120"/>
+              </a:rPr>
+              <a:t>Module 5 termine</a:t>
+            </a:r>
+            <a:endParaRPr lang="en-US" sz="2800" dirty="0"/>
+          </a:p>
+        </p:txBody>
+      </p:sp>
+      <p:sp>
+        <p:nvSpPr>
+          <p:cNvPr id="5" name="Text 2"/>
+          <p:cNvSpPr txBox="1"/>
+          <p:nvPr/>
+        </p:nvSpPr>
+        <p:spPr>
+          <a:xfrm>
+            <a:off x="1371600" y="3017520"/>
+            <a:ext cx="6400800" cy="365760"/>
+          </a:xfrm>
+          <a:prstGeom prst="rect">
+            <a:avLst/>
+          </a:prstGeom>
+          <a:noFill/>
+          <a:ln/>
+        </p:spPr>
+        <p:txBody>
+          <a:bodyPr wrap="square" lIns="0" tIns="0" rIns="0" bIns="0" rtlCol="0" anchor="ctr"/>
+          <a:lstStyle/>
+          <a:p>
+            <a:pPr algn="ctr" indent="0" marL="0">
+              <a:buNone/>
+            </a:pPr>
+            <a:r>
+              <a:rPr lang="en-US" sz="1300" dirty="0">
+                <a:solidFill>
+                  <a:srgbClr val="94A3B8"/>
+                </a:solidFill>
+                <a:latin typeface="Calibri" pitchFamily="34" charset="0"/>
+                <a:ea typeface="Calibri" pitchFamily="34" charset="-122"/>
+                <a:cs typeface="Calibri" pitchFamily="34" charset="-120"/>
+              </a:rPr>
+              <a:t>Passez au module suivant pour continuer votre apprentissage.</a:t>
+            </a:r>
+            <a:endParaRPr lang="en-US" sz="1300" dirty="0"/>
+          </a:p>
+        </p:txBody>
+      </p:sp>
+      <p:sp>
+        <p:nvSpPr>
+          <p:cNvPr id="6" name="Shape 3"/>
+          <p:cNvSpPr/>
+          <p:nvPr/>
+        </p:nvSpPr>
+        <p:spPr>
+          <a:xfrm>
+            <a:off x="3200400" y="3657600"/>
+            <a:ext cx="2743200" cy="36576"/>
+          </a:xfrm>
+          <a:prstGeom prst="rect">
+            <a:avLst/>
+          </a:prstGeom>
+          <a:solidFill>
+            <a:srgbClr val="22C55E"/>
+          </a:solidFill>
+          <a:ln/>
+        </p:spPr>
+      </p:sp>
+      <p:sp>
+        <p:nvSpPr>
+          <p:cNvPr id="7" name="Text 4"/>
+          <p:cNvSpPr txBox="1"/>
+          <p:nvPr/>
+        </p:nvSpPr>
+        <p:spPr>
+          <a:xfrm>
+            <a:off x="2286000" y="3931920"/>
+            <a:ext cx="4572000" cy="320040"/>
+          </a:xfrm>
+          <a:prstGeom prst="rect">
+            <a:avLst/>
+          </a:prstGeom>
+          <a:noFill/>
+          <a:ln/>
+        </p:spPr>
+        <p:txBody>
+          <a:bodyPr wrap="square" lIns="0" tIns="0" rIns="0" bIns="0" rtlCol="0" anchor="ctr"/>
+          <a:lstStyle/>
+          <a:p>
+            <a:pPr algn="ctr" indent="0" marL="0">
+              <a:buNone/>
+            </a:pPr>
+            <a:r>
+              <a:rPr lang="en-US" sz="1100" spc="300" kern="0" dirty="0">
+                <a:solidFill>
+                  <a:srgbClr val="64748B"/>
+                </a:solidFill>
+                <a:latin typeface="Calibri" pitchFamily="34" charset="0"/>
+                <a:ea typeface="Calibri" pitchFamily="34" charset="-122"/>
+                <a:cs typeface="Calibri" pitchFamily="34" charset="-120"/>
+              </a:rPr>
+              <a:t>TEREX ACADEMY</a:t>
+            </a:r>
+            <a:endParaRPr lang="en-US" sz="1100" dirty="0"/>
+          </a:p>
+        </p:txBody>
+      </p:sp>
+      <p:sp>
+        <p:nvSpPr>
+          <p:cNvPr id="8" name="Text 5"/>
+          <p:cNvSpPr txBox="1"/>
+          <p:nvPr/>
+        </p:nvSpPr>
+        <p:spPr>
+          <a:xfrm>
+            <a:off x="2286000" y="4251960"/>
+            <a:ext cx="4572000" cy="274320"/>
+          </a:xfrm>
+          <a:prstGeom prst="rect">
+            <a:avLst/>
+          </a:prstGeom>
+          <a:noFill/>
+          <a:ln/>
+        </p:spPr>
+        <p:txBody>
+          <a:bodyPr wrap="square" lIns="0" tIns="0" rIns="0" bIns="0" rtlCol="0" anchor="ctr"/>
+          <a:lstStyle/>
+          <a:p>
+            <a:pPr algn="ctr" indent="0" marL="0">
+              <a:buNone/>
+            </a:pPr>
+            <a:r>
+              <a:rPr lang="en-US" sz="1100" dirty="0">
+                <a:solidFill>
+                  <a:srgbClr val="009E8B"/>
+                </a:solidFill>
+                <a:latin typeface="Calibri" pitchFamily="34" charset="0"/>
+                <a:ea typeface="Calibri" pitchFamily="34" charset="-122"/>
+                <a:cs typeface="Calibri" pitchFamily="34" charset="-120"/>
+              </a:rPr>
+              <a:t>terangaexchange.com</a:t>
+            </a:r>
+            <a:endParaRPr lang="en-US" sz="1100" dirty="0"/>
           </a:p>
         </p:txBody>
       </p:sp>
@@ -5230,35 +8294,105 @@
           <a:chExt cx="0" cy="0"/>
         </a:xfrm>
       </p:grpSpPr>
-      <p:sp>
-        <p:nvSpPr>
-          <p:cNvPr id="2" name="Shape 0"/>
+      <p:pic>
+        <p:nvPicPr>
+          <p:cNvPr id="2" name="Image 0" descr="preencoded.png">    </p:cNvPr>
+          <p:cNvPicPr>
+            <a:picLocks noChangeAspect="1"/>
+          </p:cNvPicPr>
+          <p:nvPr/>
+        </p:nvPicPr>
+        <p:blipFill>
+          <a:blip r:embed="rId1"/>
+          <a:stretch>
+            <a:fillRect/>
+          </a:stretch>
+        </p:blipFill>
+        <p:spPr>
+          <a:xfrm>
+            <a:off x="7315200" y="548640"/>
+            <a:ext cx="1280160" cy="1280160"/>
+          </a:xfrm>
+          <a:prstGeom prst="rect">
+            <a:avLst/>
+          </a:prstGeom>
+        </p:spPr>
+      </p:pic>
+      <p:pic>
+        <p:nvPicPr>
+          <p:cNvPr id="3" name="Image 1" descr="preencoded.png">    </p:cNvPr>
+          <p:cNvPicPr>
+            <a:picLocks noChangeAspect="1"/>
+          </p:cNvPicPr>
+          <p:nvPr/>
+        </p:nvPicPr>
+        <p:blipFill>
+          <a:blip r:embed="rId2"/>
+          <a:stretch>
+            <a:fillRect/>
+          </a:stretch>
+        </p:blipFill>
+        <p:spPr>
+          <a:xfrm>
+            <a:off x="7772400" y="2011680"/>
+            <a:ext cx="822960" cy="822960"/>
+          </a:xfrm>
+          <a:prstGeom prst="rect">
+            <a:avLst/>
+          </a:prstGeom>
+        </p:spPr>
+      </p:pic>
+      <p:sp>
+        <p:nvSpPr>
+          <p:cNvPr id="4" name="Shape 0"/>
           <p:cNvSpPr/>
           <p:nvPr/>
         </p:nvSpPr>
         <p:spPr>
           <a:xfrm>
-            <a:off x="548640" y="914400"/>
-            <a:ext cx="45720" cy="2560320"/>
-          </a:xfrm>
-          <a:prstGeom prst="rect">
+            <a:off x="6583680" y="-274320"/>
+            <a:ext cx="3200400" cy="3200400"/>
+          </a:xfrm>
+          <a:prstGeom prst="ellipse">
             <a:avLst/>
           </a:prstGeom>
           <a:solidFill>
-            <a:srgbClr val="00BFA6"/>
+            <a:srgbClr val="22C55E">
+              <a:alpha val="6000"/>
+            </a:srgbClr>
           </a:solidFill>
           <a:ln/>
         </p:spPr>
       </p:sp>
       <p:sp>
         <p:nvSpPr>
-          <p:cNvPr id="3" name="Text 1"/>
-          <p:cNvSpPr txBox="1"/>
-          <p:nvPr/>
-        </p:nvSpPr>
-        <p:spPr>
-          <a:xfrm>
-            <a:off x="822960" y="1097280"/>
+          <p:cNvPr id="5" name="Shape 1"/>
+          <p:cNvSpPr/>
+          <p:nvPr/>
+        </p:nvSpPr>
+        <p:spPr>
+          <a:xfrm>
+            <a:off x="731520" y="914400"/>
+            <a:ext cx="45720" cy="2194560"/>
+          </a:xfrm>
+          <a:prstGeom prst="rect">
+            <a:avLst/>
+          </a:prstGeom>
+          <a:solidFill>
+            <a:srgbClr val="22C55E"/>
+          </a:solidFill>
+          <a:ln/>
+        </p:spPr>
+      </p:sp>
+      <p:sp>
+        <p:nvSpPr>
+          <p:cNvPr id="6" name="Text 2"/>
+          <p:cNvSpPr txBox="1"/>
+          <p:nvPr/>
+        </p:nvSpPr>
+        <p:spPr>
+          <a:xfrm>
+            <a:off x="960120" y="914400"/>
             <a:ext cx="2743200" cy="365760"/>
           </a:xfrm>
           <a:prstGeom prst="rect">
@@ -5277,13 +8411,13 @@
             <a:r>
               <a:rPr lang="en-US" sz="1200" b="1" spc="200" kern="0" dirty="0">
                 <a:solidFill>
-                  <a:srgbClr val="00BFA6"/>
-                </a:solidFill>
-                <a:latin typeface="Calibri" pitchFamily="34" charset="0"/>
-                <a:ea typeface="Calibri" pitchFamily="34" charset="-122"/>
-                <a:cs typeface="Calibri" pitchFamily="34" charset="-120"/>
-              </a:rPr>
-              <a:t>Lecon 1 / 3</a:t>
+                  <a:srgbClr val="22C55E"/>
+                </a:solidFill>
+                <a:latin typeface="Calibri" pitchFamily="34" charset="0"/>
+                <a:ea typeface="Calibri" pitchFamily="34" charset="-122"/>
+                <a:cs typeface="Calibri" pitchFamily="34" charset="-120"/>
+              </a:rPr>
+              <a:t>Leçon 1 / 3</a:t>
             </a:r>
             <a:endParaRPr lang="en-US" sz="1200" dirty="0"/>
           </a:p>
@@ -5291,14 +8425,14 @@
       </p:sp>
       <p:sp>
         <p:nvSpPr>
-          <p:cNvPr id="4" name="Text 2"/>
-          <p:cNvSpPr txBox="1"/>
-          <p:nvPr/>
-        </p:nvSpPr>
-        <p:spPr>
-          <a:xfrm>
-            <a:off x="822960" y="1645920"/>
-            <a:ext cx="7498080" cy="1280160"/>
+          <p:cNvPr id="7" name="Text 3"/>
+          <p:cNvSpPr txBox="1"/>
+          <p:nvPr/>
+        </p:nvSpPr>
+        <p:spPr>
+          <a:xfrm>
+            <a:off x="960120" y="1371600"/>
+            <a:ext cx="6217920" cy="1463040"/>
           </a:xfrm>
           <a:prstGeom prst="rect">
             <a:avLst/>
@@ -5314,7 +8448,7 @@
               <a:buNone/>
             </a:pPr>
             <a:r>
-              <a:rPr lang="en-US" sz="3000" b="1" dirty="0">
+              <a:rPr lang="en-US" sz="2800" b="1" dirty="0">
                 <a:solidFill>
                   <a:srgbClr val="FFFFFF"/>
                 </a:solidFill>
@@ -5324,19 +8458,19 @@
               </a:rPr>
               <a:t>Bitcoin (BTC) — l'or numérique</a:t>
             </a:r>
-            <a:endParaRPr lang="en-US" sz="3000" dirty="0"/>
-          </a:p>
-        </p:txBody>
-      </p:sp>
-      <p:sp>
-        <p:nvSpPr>
-          <p:cNvPr id="5" name="Text 3"/>
-          <p:cNvSpPr txBox="1"/>
-          <p:nvPr/>
-        </p:nvSpPr>
-        <p:spPr>
-          <a:xfrm>
-            <a:off x="822960" y="4206240"/>
+            <a:endParaRPr lang="en-US" sz="2800" dirty="0"/>
+          </a:p>
+        </p:txBody>
+      </p:sp>
+      <p:sp>
+        <p:nvSpPr>
+          <p:cNvPr id="8" name="Text 4"/>
+          <p:cNvSpPr txBox="1"/>
+          <p:nvPr/>
+        </p:nvSpPr>
+        <p:spPr>
+          <a:xfrm>
+            <a:off x="960120" y="4114800"/>
             <a:ext cx="5486400" cy="320040"/>
           </a:xfrm>
           <a:prstGeom prst="rect">
@@ -5401,7 +8535,53 @@
       </p:grpSpPr>
       <p:sp>
         <p:nvSpPr>
-          <p:cNvPr id="2" name="Text 0"/>
+          <p:cNvPr id="2" name="Shape 0"/>
+          <p:cNvSpPr/>
+          <p:nvPr/>
+        </p:nvSpPr>
+        <p:spPr>
+          <a:xfrm>
+            <a:off x="7955280" y="182880"/>
+            <a:ext cx="640080" cy="640080"/>
+          </a:xfrm>
+          <a:prstGeom prst="ellipse">
+            <a:avLst/>
+          </a:prstGeom>
+          <a:solidFill>
+            <a:srgbClr val="22C55E">
+              <a:alpha val="12000"/>
+            </a:srgbClr>
+          </a:solidFill>
+          <a:ln/>
+        </p:spPr>
+      </p:sp>
+      <p:pic>
+        <p:nvPicPr>
+          <p:cNvPr id="3" name="Image 0" descr="preencoded.png">    </p:cNvPr>
+          <p:cNvPicPr>
+            <a:picLocks noChangeAspect="1"/>
+          </p:cNvPicPr>
+          <p:nvPr/>
+        </p:nvPicPr>
+        <p:blipFill>
+          <a:blip r:embed="rId1"/>
+          <a:stretch>
+            <a:fillRect/>
+          </a:stretch>
+        </p:blipFill>
+        <p:spPr>
+          <a:xfrm>
+            <a:off x="8028432" y="256032"/>
+            <a:ext cx="493776" cy="493776"/>
+          </a:xfrm>
+          <a:prstGeom prst="rect">
+            <a:avLst/>
+          </a:prstGeom>
+        </p:spPr>
+      </p:pic>
+      <p:sp>
+        <p:nvSpPr>
+          <p:cNvPr id="4" name="Text 1"/>
           <p:cNvSpPr txBox="1"/>
           <p:nvPr/>
         </p:nvSpPr>
@@ -5436,15 +8616,36 @@
                 <a:ea typeface="Calibri" pitchFamily="34" charset="-122"/>
                 <a:cs typeface="Calibri" pitchFamily="34" charset="-120"/>
               </a:rPr>
-              <a:t>Bitcoin est la crypto originelle, la plus ancienne (2009) et de loin la plus valorisée. On l'appelle souvent « l'or numérique » — et pour de bonnes raisons.</a:t>
+              <a:t>Bitcoin est la crypto originelle, la plus ancienne (2009) et de loin la plus valorisée.</a:t>
             </a:r>
             <a:endParaRPr lang="en-US" sz="1400" dirty="0"/>
           </a:p>
-        </p:txBody>
-      </p:sp>
-      <p:sp>
-        <p:nvSpPr>
-          <p:cNvPr id="3" name="Text 1"/>
+          <a:p>
+            <a:pPr marL="342900" indent="-342900">
+              <a:spcAft>
+                <a:spcPts val="800"/>
+              </a:spcAft>
+              <a:buSzPct val="100000"/>
+              <a:buChar char="•"/>
+            </a:pPr>
+            <a:r>
+              <a:rPr lang="en-US" sz="1400" dirty="0">
+                <a:solidFill>
+                  <a:srgbClr val="FFFFFF"/>
+                </a:solidFill>
+                <a:latin typeface="Calibri" pitchFamily="34" charset="0"/>
+                <a:ea typeface="Calibri" pitchFamily="34" charset="-122"/>
+                <a:cs typeface="Calibri" pitchFamily="34" charset="-120"/>
+              </a:rPr>
+              <a:t>On l'appelle souvent « l'or numérique » — et pour de bonnes raisons.</a:t>
+            </a:r>
+            <a:endParaRPr lang="en-US" sz="1400" dirty="0"/>
+          </a:p>
+        </p:txBody>
+      </p:sp>
+      <p:sp>
+        <p:nvSpPr>
+          <p:cNvPr id="5" name="Text 2"/>
           <p:cNvSpPr txBox="1"/>
           <p:nvPr/>
         </p:nvSpPr>
@@ -5475,7 +8676,7 @@
                 <a:ea typeface="Calibri" pitchFamily="34" charset="-122"/>
                 <a:cs typeface="Calibri" pitchFamily="34" charset="-120"/>
               </a:rPr>
-              <a:t>Module 5 — Lecon 1</a:t>
+              <a:t>Module 5 — Leçon 1</a:t>
             </a:r>
             <a:endParaRPr lang="en-US" sz="900" dirty="0"/>
           </a:p>
@@ -5521,8 +8722,8 @@
         </p:nvSpPr>
         <p:spPr>
           <a:xfrm>
-            <a:off x="731520" y="365760"/>
-            <a:ext cx="7680960" cy="548640"/>
+            <a:off x="731520" y="274320"/>
+            <a:ext cx="7680960" cy="502920"/>
           </a:xfrm>
           <a:prstGeom prst="rect">
             <a:avLst/>
@@ -5538,9 +8739,9 @@
               <a:buNone/>
             </a:pPr>
             <a:r>
-              <a:rPr lang="en-US" sz="2200" b="1" dirty="0">
-                <a:solidFill>
-                  <a:srgbClr val="00BFA6"/>
+              <a:rPr lang="en-US" sz="2000" b="1" dirty="0">
+                <a:solidFill>
+                  <a:srgbClr val="22C55E"/>
                 </a:solidFill>
                 <a:latin typeface="Calibri" pitchFamily="34" charset="0"/>
                 <a:ea typeface="Calibri" pitchFamily="34" charset="-122"/>
@@ -5548,7 +8749,7 @@
               </a:rPr>
               <a:t>Ses caractéristiques uniques :</a:t>
             </a:r>
-            <a:endParaRPr lang="en-US" sz="2200" dirty="0"/>
+            <a:endParaRPr lang="en-US" sz="2000" dirty="0"/>
           </a:p>
         </p:txBody>
       </p:sp>
@@ -5560,8 +8761,8 @@
         </p:nvSpPr>
         <p:spPr>
           <a:xfrm>
-            <a:off x="731520" y="1051560"/>
-            <a:ext cx="7680960" cy="3657600"/>
+            <a:off x="731520" y="1005840"/>
+            <a:ext cx="4206240" cy="3474720"/>
           </a:xfrm>
           <a:prstGeom prst="rect">
             <a:avLst/>
@@ -5575,13 +8776,13 @@
           <a:p>
             <a:pPr marL="342900" indent="-342900">
               <a:spcAft>
-                <a:spcPts val="800"/>
+                <a:spcPts val="600"/>
               </a:spcAft>
               <a:buSzPct val="100000"/>
               <a:buChar char="•"/>
             </a:pPr>
             <a:r>
-              <a:rPr lang="en-US" sz="1400" dirty="0">
+              <a:rPr lang="en-US" sz="1300" dirty="0">
                 <a:solidFill>
                   <a:srgbClr val="FFFFFF"/>
                 </a:solidFill>
@@ -5589,20 +8790,20 @@
                 <a:ea typeface="Calibri" pitchFamily="34" charset="-122"/>
                 <a:cs typeface="Calibri" pitchFamily="34" charset="-120"/>
               </a:rPr>
-              <a:t>Rareté programmée : il n'y aura jamais plus de 21 millions de BTC. Aucune autorité ne peut en créer davantage. Cette rareté est inscrite dans le code.</a:t>
-            </a:r>
-            <a:endParaRPr lang="en-US" sz="1400" dirty="0"/>
+              <a:t>Rareté programmée : il n'y aura jamais plus de 21 millions de BTC. Aucune autorité ne peut en créer davantage. Cette ...</a:t>
+            </a:r>
+            <a:endParaRPr lang="en-US" sz="1300" dirty="0"/>
           </a:p>
           <a:p>
             <a:pPr marL="342900" indent="-342900">
               <a:spcAft>
-                <a:spcPts val="800"/>
+                <a:spcPts val="600"/>
               </a:spcAft>
               <a:buSzPct val="100000"/>
               <a:buChar char="•"/>
             </a:pPr>
             <a:r>
-              <a:rPr lang="en-US" sz="1400" dirty="0">
+              <a:rPr lang="en-US" sz="1300" dirty="0">
                 <a:solidFill>
                   <a:srgbClr val="FFFFFF"/>
                 </a:solidFill>
@@ -5610,20 +8811,84 @@
                 <a:ea typeface="Calibri" pitchFamily="34" charset="-122"/>
                 <a:cs typeface="Calibri" pitchFamily="34" charset="-120"/>
               </a:rPr>
-              <a:t>Émission décroissante (le halving) : tous les 4 ans environ, la récompense reçue par les mineurs est divisée par deux. Résultat : de moins en moins de bitcoins sont créés chaque...</a:t>
-            </a:r>
-            <a:endParaRPr lang="en-US" sz="1400" dirty="0"/>
-          </a:p>
-          <a:p>
-            <a:pPr marL="342900" indent="-342900">
-              <a:spcAft>
-                <a:spcPts val="800"/>
-              </a:spcAft>
-              <a:buSzPct val="100000"/>
-              <a:buChar char="•"/>
-            </a:pPr>
-            <a:r>
-              <a:rPr lang="en-US" sz="1400" dirty="0">
+              <a:t>Émission décroissante (le halving) : tous les 4 ans environ, la récompense reçue par les mineurs est divisée par deux...</a:t>
+            </a:r>
+            <a:endParaRPr lang="en-US" sz="1300" dirty="0"/>
+          </a:p>
+        </p:txBody>
+      </p:sp>
+      <p:sp>
+        <p:nvSpPr>
+          <p:cNvPr id="4" name="Shape 2"/>
+          <p:cNvSpPr/>
+          <p:nvPr/>
+        </p:nvSpPr>
+        <p:spPr>
+          <a:xfrm>
+            <a:off x="5120640" y="1005840"/>
+            <a:ext cx="3474720" cy="640080"/>
+          </a:xfrm>
+          <a:prstGeom prst="roundRect">
+            <a:avLst>
+              <a:gd name="adj" fmla="val 14286"/>
+            </a:avLst>
+          </a:prstGeom>
+          <a:solidFill>
+            <a:srgbClr val="1A2332"/>
+          </a:solidFill>
+          <a:ln/>
+        </p:spPr>
+      </p:sp>
+      <p:pic>
+        <p:nvPicPr>
+          <p:cNvPr id="5" name="Image 0" descr="preencoded.png">    </p:cNvPr>
+          <p:cNvPicPr>
+            <a:picLocks noChangeAspect="1"/>
+          </p:cNvPicPr>
+          <p:nvPr/>
+        </p:nvPicPr>
+        <p:blipFill>
+          <a:blip r:embed="rId1"/>
+          <a:stretch>
+            <a:fillRect/>
+          </a:stretch>
+        </p:blipFill>
+        <p:spPr>
+          <a:xfrm>
+            <a:off x="5257800" y="1106424"/>
+            <a:ext cx="438912" cy="438912"/>
+          </a:xfrm>
+          <a:prstGeom prst="rect">
+            <a:avLst/>
+          </a:prstGeom>
+        </p:spPr>
+      </p:pic>
+      <p:sp>
+        <p:nvSpPr>
+          <p:cNvPr id="6" name="Text 3"/>
+          <p:cNvSpPr txBox="1"/>
+          <p:nvPr/>
+        </p:nvSpPr>
+        <p:spPr>
+          <a:xfrm>
+            <a:off x="5806440" y="1005840"/>
+            <a:ext cx="2651760" cy="640080"/>
+          </a:xfrm>
+          <a:prstGeom prst="rect">
+            <a:avLst/>
+          </a:prstGeom>
+          <a:noFill/>
+          <a:ln/>
+        </p:spPr>
+        <p:txBody>
+          <a:bodyPr wrap="square" lIns="0" tIns="0" rIns="0" bIns="0" rtlCol="0" anchor="ctr"/>
+          <a:lstStyle/>
+          <a:p>
+            <a:pPr indent="0" marL="0">
+              <a:buNone/>
+            </a:pPr>
+            <a:r>
+              <a:rPr lang="en-US" sz="1200" dirty="0">
                 <a:solidFill>
                   <a:srgbClr val="FFFFFF"/>
                 </a:solidFill>
@@ -5631,20 +8896,84 @@
                 <a:ea typeface="Calibri" pitchFamily="34" charset="-122"/>
                 <a:cs typeface="Calibri" pitchFamily="34" charset="-120"/>
               </a:rPr>
-              <a:t>Sécurité imbattable : le réseau Bitcoin est protégé par une quantité d'énergie colossale. L'attaquer coûterait des dizaines de milliards de dollars — et ne rapporterait rien à c...</a:t>
-            </a:r>
-            <a:endParaRPr lang="en-US" sz="1400" dirty="0"/>
-          </a:p>
-          <a:p>
-            <a:pPr marL="342900" indent="-342900">
-              <a:spcAft>
-                <a:spcPts val="800"/>
-              </a:spcAft>
-              <a:buSzPct val="100000"/>
-              <a:buChar char="•"/>
-            </a:pPr>
-            <a:r>
-              <a:rPr lang="en-US" sz="1400" dirty="0">
+              <a:t>Sécurité imbattable : le réseau Bitcoin est protégé par une quantité d'énergi...</a:t>
+            </a:r>
+            <a:endParaRPr lang="en-US" sz="1200" dirty="0"/>
+          </a:p>
+        </p:txBody>
+      </p:sp>
+      <p:sp>
+        <p:nvSpPr>
+          <p:cNvPr id="7" name="Shape 4"/>
+          <p:cNvSpPr/>
+          <p:nvPr/>
+        </p:nvSpPr>
+        <p:spPr>
+          <a:xfrm>
+            <a:off x="5120640" y="1737360"/>
+            <a:ext cx="3474720" cy="640080"/>
+          </a:xfrm>
+          <a:prstGeom prst="roundRect">
+            <a:avLst>
+              <a:gd name="adj" fmla="val 14286"/>
+            </a:avLst>
+          </a:prstGeom>
+          <a:solidFill>
+            <a:srgbClr val="1A2332"/>
+          </a:solidFill>
+          <a:ln/>
+        </p:spPr>
+      </p:sp>
+      <p:pic>
+        <p:nvPicPr>
+          <p:cNvPr id="8" name="Image 1" descr="preencoded.png">    </p:cNvPr>
+          <p:cNvPicPr>
+            <a:picLocks noChangeAspect="1"/>
+          </p:cNvPicPr>
+          <p:nvPr/>
+        </p:nvPicPr>
+        <p:blipFill>
+          <a:blip r:embed="rId2"/>
+          <a:stretch>
+            <a:fillRect/>
+          </a:stretch>
+        </p:blipFill>
+        <p:spPr>
+          <a:xfrm>
+            <a:off x="5257800" y="1837944"/>
+            <a:ext cx="438912" cy="438912"/>
+          </a:xfrm>
+          <a:prstGeom prst="rect">
+            <a:avLst/>
+          </a:prstGeom>
+        </p:spPr>
+      </p:pic>
+      <p:sp>
+        <p:nvSpPr>
+          <p:cNvPr id="9" name="Text 5"/>
+          <p:cNvSpPr txBox="1"/>
+          <p:nvPr/>
+        </p:nvSpPr>
+        <p:spPr>
+          <a:xfrm>
+            <a:off x="5806440" y="1737360"/>
+            <a:ext cx="2651760" cy="640080"/>
+          </a:xfrm>
+          <a:prstGeom prst="rect">
+            <a:avLst/>
+          </a:prstGeom>
+          <a:noFill/>
+          <a:ln/>
+        </p:spPr>
+        <p:txBody>
+          <a:bodyPr wrap="square" lIns="0" tIns="0" rIns="0" bIns="0" rtlCol="0" anchor="ctr"/>
+          <a:lstStyle/>
+          <a:p>
+            <a:pPr indent="0" marL="0">
+              <a:buNone/>
+            </a:pPr>
+            <a:r>
+              <a:rPr lang="en-US" sz="1200" dirty="0">
                 <a:solidFill>
                   <a:srgbClr val="FFFFFF"/>
                 </a:solidFill>
@@ -5652,48 +8981,9 @@
                 <a:ea typeface="Calibri" pitchFamily="34" charset="-122"/>
                 <a:cs typeface="Calibri" pitchFamily="34" charset="-120"/>
               </a:rPr>
-              <a:t>Simplicité voulue : Bitcoin ne fait qu'une chose, mais il la fait bien : transférer de la valeur. Il n'y a pas de « smart contracts » complexes. C'est un choix.</a:t>
-            </a:r>
-            <a:endParaRPr lang="en-US" sz="1400" dirty="0"/>
-          </a:p>
-        </p:txBody>
-      </p:sp>
-      <p:sp>
-        <p:nvSpPr>
-          <p:cNvPr id="4" name="Text 2"/>
-          <p:cNvSpPr txBox="1"/>
-          <p:nvPr/>
-        </p:nvSpPr>
-        <p:spPr>
-          <a:xfrm>
-            <a:off x="731520" y="4709160"/>
-            <a:ext cx="7680960" cy="274320"/>
-          </a:xfrm>
-          <a:prstGeom prst="rect">
-            <a:avLst/>
-          </a:prstGeom>
-          <a:noFill/>
-          <a:ln/>
-        </p:spPr>
-        <p:txBody>
-          <a:bodyPr wrap="square" lIns="0" tIns="0" rIns="0" bIns="0" rtlCol="0" anchor="ctr"/>
-          <a:lstStyle/>
-          <a:p>
-            <a:pPr algn="r" indent="0" marL="0">
-              <a:buNone/>
-            </a:pPr>
-            <a:r>
-              <a:rPr lang="en-US" sz="900" dirty="0">
-                <a:solidFill>
-                  <a:srgbClr val="64748B"/>
-                </a:solidFill>
-                <a:latin typeface="Calibri" pitchFamily="34" charset="0"/>
-                <a:ea typeface="Calibri" pitchFamily="34" charset="-122"/>
-                <a:cs typeface="Calibri" pitchFamily="34" charset="-120"/>
-              </a:rPr>
-              <a:t>Module 5 — Lecon 1</a:t>
-            </a:r>
-            <a:endParaRPr lang="en-US" sz="900" dirty="0"/>
+              <a:t>Simplicité voulue : Bitcoin ne fait qu'une chose, mais il la fait bien : tran...</a:t>
+            </a:r>
+            <a:endParaRPr lang="en-US" sz="1200" dirty="0"/>
           </a:p>
         </p:txBody>
       </p:sp>
@@ -5737,8 +9027,8 @@
         </p:nvSpPr>
         <p:spPr>
           <a:xfrm>
-            <a:off x="731520" y="365760"/>
-            <a:ext cx="7680960" cy="548640"/>
+            <a:off x="731520" y="274320"/>
+            <a:ext cx="7680960" cy="502920"/>
           </a:xfrm>
           <a:prstGeom prst="rect">
             <a:avLst/>
@@ -5754,9 +9044,9 @@
               <a:buNone/>
             </a:pPr>
             <a:r>
-              <a:rPr lang="en-US" sz="2200" b="1" dirty="0">
-                <a:solidFill>
-                  <a:srgbClr val="00BFA6"/>
+              <a:rPr lang="en-US" sz="2000" b="1" dirty="0">
+                <a:solidFill>
+                  <a:srgbClr val="22C55E"/>
                 </a:solidFill>
                 <a:latin typeface="Calibri" pitchFamily="34" charset="0"/>
                 <a:ea typeface="Calibri" pitchFamily="34" charset="-122"/>
@@ -5764,20 +9054,66 @@
               </a:rPr>
               <a:t>À quoi ça sert concrètement ?</a:t>
             </a:r>
-            <a:endParaRPr lang="en-US" sz="2200" dirty="0"/>
-          </a:p>
-        </p:txBody>
-      </p:sp>
-      <p:sp>
-        <p:nvSpPr>
-          <p:cNvPr id="3" name="Text 1"/>
-          <p:cNvSpPr txBox="1"/>
-          <p:nvPr/>
-        </p:nvSpPr>
-        <p:spPr>
-          <a:xfrm>
-            <a:off x="731520" y="1051560"/>
-            <a:ext cx="7680960" cy="3657600"/>
+            <a:endParaRPr lang="en-US" sz="2000" dirty="0"/>
+          </a:p>
+        </p:txBody>
+      </p:sp>
+      <p:sp>
+        <p:nvSpPr>
+          <p:cNvPr id="3" name="Shape 1"/>
+          <p:cNvSpPr/>
+          <p:nvPr/>
+        </p:nvSpPr>
+        <p:spPr>
+          <a:xfrm>
+            <a:off x="731520" y="1005840"/>
+            <a:ext cx="3657600" cy="1371600"/>
+          </a:xfrm>
+          <a:prstGeom prst="roundRect">
+            <a:avLst>
+              <a:gd name="adj" fmla="val 6667"/>
+            </a:avLst>
+          </a:prstGeom>
+          <a:solidFill>
+            <a:srgbClr val="1A2332"/>
+          </a:solidFill>
+          <a:ln/>
+        </p:spPr>
+      </p:sp>
+      <p:pic>
+        <p:nvPicPr>
+          <p:cNvPr id="4" name="Image 0" descr="preencoded.png">    </p:cNvPr>
+          <p:cNvPicPr>
+            <a:picLocks noChangeAspect="1"/>
+          </p:cNvPicPr>
+          <p:nvPr/>
+        </p:nvPicPr>
+        <p:blipFill>
+          <a:blip r:embed="rId1"/>
+          <a:stretch>
+            <a:fillRect/>
+          </a:stretch>
+        </p:blipFill>
+        <p:spPr>
+          <a:xfrm>
+            <a:off x="868680" y="1143000"/>
+            <a:ext cx="502920" cy="502920"/>
+          </a:xfrm>
+          <a:prstGeom prst="rect">
+            <a:avLst/>
+          </a:prstGeom>
+        </p:spPr>
+      </p:pic>
+      <p:sp>
+        <p:nvSpPr>
+          <p:cNvPr id="5" name="Text 2"/>
+          <p:cNvSpPr txBox="1"/>
+          <p:nvPr/>
+        </p:nvSpPr>
+        <p:spPr>
+          <a:xfrm>
+            <a:off x="868680" y="1719072"/>
+            <a:ext cx="3383280" cy="320040"/>
           </a:xfrm>
           <a:prstGeom prst="rect">
             <a:avLst/>
@@ -5789,15 +9125,11 @@
           <a:bodyPr wrap="square" lIns="0" tIns="0" rIns="0" bIns="0" rtlCol="0" anchor="t"/>
           <a:lstStyle/>
           <a:p>
-            <a:pPr marL="342900" indent="-342900">
-              <a:spcAft>
-                <a:spcPts val="800"/>
-              </a:spcAft>
-              <a:buSzPct val="100000"/>
-              <a:buChar char="•"/>
-            </a:pPr>
-            <a:r>
-              <a:rPr lang="en-US" sz="1400" dirty="0">
+            <a:pPr indent="0" marL="0">
+              <a:buNone/>
+            </a:pPr>
+            <a:r>
+              <a:rPr lang="en-US" sz="1100" b="1" dirty="0">
                 <a:solidFill>
                   <a:srgbClr val="FFFFFF"/>
                 </a:solidFill>
@@ -5805,20 +9137,123 @@
                 <a:ea typeface="Calibri" pitchFamily="34" charset="-122"/>
                 <a:cs typeface="Calibri" pitchFamily="34" charset="-120"/>
               </a:rPr>
-              <a:t>Réserve de valeur à long terme : de plus en plus d'entreprises et de particuliers en détiennent comme protection contre l'inflation.</a:t>
-            </a:r>
-            <a:endParaRPr lang="en-US" sz="1400" dirty="0"/>
-          </a:p>
-          <a:p>
-            <a:pPr marL="342900" indent="-342900">
-              <a:spcAft>
-                <a:spcPts val="800"/>
-              </a:spcAft>
-              <a:buSzPct val="100000"/>
-              <a:buChar char="•"/>
-            </a:pPr>
-            <a:r>
-              <a:rPr lang="en-US" sz="1400" dirty="0">
+              <a:t>Réserve de valeur à long terme : de plus en plus d'entrep...</a:t>
+            </a:r>
+            <a:endParaRPr lang="en-US" sz="1100" dirty="0"/>
+          </a:p>
+        </p:txBody>
+      </p:sp>
+      <p:sp>
+        <p:nvSpPr>
+          <p:cNvPr id="6" name="Text 3"/>
+          <p:cNvSpPr txBox="1"/>
+          <p:nvPr/>
+        </p:nvSpPr>
+        <p:spPr>
+          <a:xfrm>
+            <a:off x="868680" y="2011680"/>
+            <a:ext cx="3383280" cy="274320"/>
+          </a:xfrm>
+          <a:prstGeom prst="rect">
+            <a:avLst/>
+          </a:prstGeom>
+          <a:noFill/>
+          <a:ln/>
+        </p:spPr>
+        <p:txBody>
+          <a:bodyPr wrap="square" lIns="0" tIns="0" rIns="0" bIns="0" rtlCol="0" anchor="t"/>
+          <a:lstStyle/>
+          <a:p>
+            <a:pPr indent="0" marL="0">
+              <a:buNone/>
+            </a:pPr>
+            <a:r>
+              <a:rPr lang="en-US" sz="900" dirty="0">
+                <a:solidFill>
+                  <a:srgbClr val="94A3B8"/>
+                </a:solidFill>
+                <a:latin typeface="Calibri" pitchFamily="34" charset="0"/>
+                <a:ea typeface="Calibri" pitchFamily="34" charset="-122"/>
+                <a:cs typeface="Calibri" pitchFamily="34" charset="-120"/>
+              </a:rPr>
+              <a:t>articuliers en détiennent comme protection contre l'inflation.</a:t>
+            </a:r>
+            <a:endParaRPr lang="en-US" sz="900" dirty="0"/>
+          </a:p>
+        </p:txBody>
+      </p:sp>
+      <p:sp>
+        <p:nvSpPr>
+          <p:cNvPr id="7" name="Shape 4"/>
+          <p:cNvSpPr/>
+          <p:nvPr/>
+        </p:nvSpPr>
+        <p:spPr>
+          <a:xfrm>
+            <a:off x="4754880" y="1005840"/>
+            <a:ext cx="3657600" cy="1371600"/>
+          </a:xfrm>
+          <a:prstGeom prst="roundRect">
+            <a:avLst>
+              <a:gd name="adj" fmla="val 6667"/>
+            </a:avLst>
+          </a:prstGeom>
+          <a:solidFill>
+            <a:srgbClr val="1A2332"/>
+          </a:solidFill>
+          <a:ln/>
+        </p:spPr>
+      </p:sp>
+      <p:pic>
+        <p:nvPicPr>
+          <p:cNvPr id="8" name="Image 1" descr="preencoded.png">    </p:cNvPr>
+          <p:cNvPicPr>
+            <a:picLocks noChangeAspect="1"/>
+          </p:cNvPicPr>
+          <p:nvPr/>
+        </p:nvPicPr>
+        <p:blipFill>
+          <a:blip r:embed="rId2"/>
+          <a:stretch>
+            <a:fillRect/>
+          </a:stretch>
+        </p:blipFill>
+        <p:spPr>
+          <a:xfrm>
+            <a:off x="4892040" y="1143000"/>
+            <a:ext cx="502920" cy="502920"/>
+          </a:xfrm>
+          <a:prstGeom prst="rect">
+            <a:avLst/>
+          </a:prstGeom>
+        </p:spPr>
+      </p:pic>
+      <p:sp>
+        <p:nvSpPr>
+          <p:cNvPr id="9" name="Text 5"/>
+          <p:cNvSpPr txBox="1"/>
+          <p:nvPr/>
+        </p:nvSpPr>
+        <p:spPr>
+          <a:xfrm>
+            <a:off x="4892040" y="1719072"/>
+            <a:ext cx="3383280" cy="320040"/>
+          </a:xfrm>
+          <a:prstGeom prst="rect">
+            <a:avLst/>
+          </a:prstGeom>
+          <a:noFill/>
+          <a:ln/>
+        </p:spPr>
+        <p:txBody>
+          <a:bodyPr wrap="square" lIns="0" tIns="0" rIns="0" bIns="0" rtlCol="0" anchor="t"/>
+          <a:lstStyle/>
+          <a:p>
+            <a:pPr indent="0" marL="0">
+              <a:buNone/>
+            </a:pPr>
+            <a:r>
+              <a:rPr lang="en-US" sz="1100" b="1" dirty="0">
                 <a:solidFill>
                   <a:srgbClr val="FFFFFF"/>
                 </a:solidFill>
@@ -5826,20 +9261,123 @@
                 <a:ea typeface="Calibri" pitchFamily="34" charset="-122"/>
                 <a:cs typeface="Calibri" pitchFamily="34" charset="-120"/>
               </a:rPr>
-              <a:t>Envoi international : envoyer 10 000$ à Dubaï en 20 minutes, pour 2$ de frais, sans passer par une banque.</a:t>
-            </a:r>
-            <a:endParaRPr lang="en-US" sz="1400" dirty="0"/>
-          </a:p>
-          <a:p>
-            <a:pPr marL="342900" indent="-342900">
-              <a:spcAft>
-                <a:spcPts val="800"/>
-              </a:spcAft>
-              <a:buSzPct val="100000"/>
-              <a:buChar char="•"/>
-            </a:pPr>
-            <a:r>
-              <a:rPr lang="en-US" sz="1400" dirty="0">
+              <a:t>Envoi international : envoyer 10 000$ à Dubaï en 20 minut...</a:t>
+            </a:r>
+            <a:endParaRPr lang="en-US" sz="1100" dirty="0"/>
+          </a:p>
+        </p:txBody>
+      </p:sp>
+      <p:sp>
+        <p:nvSpPr>
+          <p:cNvPr id="10" name="Text 6"/>
+          <p:cNvSpPr txBox="1"/>
+          <p:nvPr/>
+        </p:nvSpPr>
+        <p:spPr>
+          <a:xfrm>
+            <a:off x="4892040" y="2011680"/>
+            <a:ext cx="3383280" cy="274320"/>
+          </a:xfrm>
+          <a:prstGeom prst="rect">
+            <a:avLst/>
+          </a:prstGeom>
+          <a:noFill/>
+          <a:ln/>
+        </p:spPr>
+        <p:txBody>
+          <a:bodyPr wrap="square" lIns="0" tIns="0" rIns="0" bIns="0" rtlCol="0" anchor="t"/>
+          <a:lstStyle/>
+          <a:p>
+            <a:pPr indent="0" marL="0">
+              <a:buNone/>
+            </a:pPr>
+            <a:r>
+              <a:rPr lang="en-US" sz="900" dirty="0">
+                <a:solidFill>
+                  <a:srgbClr val="94A3B8"/>
+                </a:solidFill>
+                <a:latin typeface="Calibri" pitchFamily="34" charset="0"/>
+                <a:ea typeface="Calibri" pitchFamily="34" charset="-122"/>
+                <a:cs typeface="Calibri" pitchFamily="34" charset="-120"/>
+              </a:rPr>
+              <a:t>e frais, sans passer par une banque.</a:t>
+            </a:r>
+            <a:endParaRPr lang="en-US" sz="900" dirty="0"/>
+          </a:p>
+        </p:txBody>
+      </p:sp>
+      <p:sp>
+        <p:nvSpPr>
+          <p:cNvPr id="11" name="Shape 7"/>
+          <p:cNvSpPr/>
+          <p:nvPr/>
+        </p:nvSpPr>
+        <p:spPr>
+          <a:xfrm>
+            <a:off x="731520" y="2514600"/>
+            <a:ext cx="3657600" cy="1371600"/>
+          </a:xfrm>
+          <a:prstGeom prst="roundRect">
+            <a:avLst>
+              <a:gd name="adj" fmla="val 6667"/>
+            </a:avLst>
+          </a:prstGeom>
+          <a:solidFill>
+            <a:srgbClr val="1A2332"/>
+          </a:solidFill>
+          <a:ln/>
+        </p:spPr>
+      </p:sp>
+      <p:pic>
+        <p:nvPicPr>
+          <p:cNvPr id="12" name="Image 2" descr="preencoded.png">    </p:cNvPr>
+          <p:cNvPicPr>
+            <a:picLocks noChangeAspect="1"/>
+          </p:cNvPicPr>
+          <p:nvPr/>
+        </p:nvPicPr>
+        <p:blipFill>
+          <a:blip r:embed="rId3"/>
+          <a:stretch>
+            <a:fillRect/>
+          </a:stretch>
+        </p:blipFill>
+        <p:spPr>
+          <a:xfrm>
+            <a:off x="868680" y="2651760"/>
+            <a:ext cx="502920" cy="502920"/>
+          </a:xfrm>
+          <a:prstGeom prst="rect">
+            <a:avLst/>
+          </a:prstGeom>
+        </p:spPr>
+      </p:pic>
+      <p:sp>
+        <p:nvSpPr>
+          <p:cNvPr id="13" name="Text 8"/>
+          <p:cNvSpPr txBox="1"/>
+          <p:nvPr/>
+        </p:nvSpPr>
+        <p:spPr>
+          <a:xfrm>
+            <a:off x="868680" y="3227832"/>
+            <a:ext cx="3383280" cy="320040"/>
+          </a:xfrm>
+          <a:prstGeom prst="rect">
+            <a:avLst/>
+          </a:prstGeom>
+          <a:noFill/>
+          <a:ln/>
+        </p:spPr>
+        <p:txBody>
+          <a:bodyPr wrap="square" lIns="0" tIns="0" rIns="0" bIns="0" rtlCol="0" anchor="t"/>
+          <a:lstStyle/>
+          <a:p>
+            <a:pPr indent="0" marL="0">
+              <a:buNone/>
+            </a:pPr>
+            <a:r>
+              <a:rPr lang="en-US" sz="1100" b="1" dirty="0">
                 <a:solidFill>
                   <a:srgbClr val="FFFFFF"/>
                 </a:solidFill>
@@ -5847,20 +9385,123 @@
                 <a:ea typeface="Calibri" pitchFamily="34" charset="-122"/>
                 <a:cs typeface="Calibri" pitchFamily="34" charset="-120"/>
               </a:rPr>
-              <a:t>Actif spéculatif : son prix bouge beaucoup, ce qui attire les traders (mais rend son achat risqué à court terme).</a:t>
-            </a:r>
-            <a:endParaRPr lang="en-US" sz="1400" dirty="0"/>
-          </a:p>
-          <a:p>
-            <a:pPr marL="342900" indent="-342900">
-              <a:spcAft>
-                <a:spcPts val="800"/>
-              </a:spcAft>
-              <a:buSzPct val="100000"/>
-              <a:buChar char="•"/>
-            </a:pPr>
-            <a:r>
-              <a:rPr lang="en-US" sz="1400" dirty="0">
+              <a:t>Actif spéculatif : son prix bouge beaucoup, ce qui attire...</a:t>
+            </a:r>
+            <a:endParaRPr lang="en-US" sz="1100" dirty="0"/>
+          </a:p>
+        </p:txBody>
+      </p:sp>
+      <p:sp>
+        <p:nvSpPr>
+          <p:cNvPr id="14" name="Text 9"/>
+          <p:cNvSpPr txBox="1"/>
+          <p:nvPr/>
+        </p:nvSpPr>
+        <p:spPr>
+          <a:xfrm>
+            <a:off x="868680" y="3520440"/>
+            <a:ext cx="3383280" cy="274320"/>
+          </a:xfrm>
+          <a:prstGeom prst="rect">
+            <a:avLst/>
+          </a:prstGeom>
+          <a:noFill/>
+          <a:ln/>
+        </p:spPr>
+        <p:txBody>
+          <a:bodyPr wrap="square" lIns="0" tIns="0" rIns="0" bIns="0" rtlCol="0" anchor="t"/>
+          <a:lstStyle/>
+          <a:p>
+            <a:pPr indent="0" marL="0">
+              <a:buNone/>
+            </a:pPr>
+            <a:r>
+              <a:rPr lang="en-US" sz="900" dirty="0">
+                <a:solidFill>
+                  <a:srgbClr val="94A3B8"/>
+                </a:solidFill>
+                <a:latin typeface="Calibri" pitchFamily="34" charset="0"/>
+                <a:ea typeface="Calibri" pitchFamily="34" charset="-122"/>
+                <a:cs typeface="Calibri" pitchFamily="34" charset="-120"/>
+              </a:rPr>
+              <a:t>(mais rend son achat risqué à court terme).</a:t>
+            </a:r>
+            <a:endParaRPr lang="en-US" sz="900" dirty="0"/>
+          </a:p>
+        </p:txBody>
+      </p:sp>
+      <p:sp>
+        <p:nvSpPr>
+          <p:cNvPr id="15" name="Shape 10"/>
+          <p:cNvSpPr/>
+          <p:nvPr/>
+        </p:nvSpPr>
+        <p:spPr>
+          <a:xfrm>
+            <a:off x="4754880" y="2514600"/>
+            <a:ext cx="3657600" cy="1371600"/>
+          </a:xfrm>
+          <a:prstGeom prst="roundRect">
+            <a:avLst>
+              <a:gd name="adj" fmla="val 6667"/>
+            </a:avLst>
+          </a:prstGeom>
+          <a:solidFill>
+            <a:srgbClr val="1A2332"/>
+          </a:solidFill>
+          <a:ln/>
+        </p:spPr>
+      </p:sp>
+      <p:pic>
+        <p:nvPicPr>
+          <p:cNvPr id="16" name="Image 3" descr="preencoded.png">    </p:cNvPr>
+          <p:cNvPicPr>
+            <a:picLocks noChangeAspect="1"/>
+          </p:cNvPicPr>
+          <p:nvPr/>
+        </p:nvPicPr>
+        <p:blipFill>
+          <a:blip r:embed="rId4"/>
+          <a:stretch>
+            <a:fillRect/>
+          </a:stretch>
+        </p:blipFill>
+        <p:spPr>
+          <a:xfrm>
+            <a:off x="4892040" y="2651760"/>
+            <a:ext cx="502920" cy="502920"/>
+          </a:xfrm>
+          <a:prstGeom prst="rect">
+            <a:avLst/>
+          </a:prstGeom>
+        </p:spPr>
+      </p:pic>
+      <p:sp>
+        <p:nvSpPr>
+          <p:cNvPr id="17" name="Text 11"/>
+          <p:cNvSpPr txBox="1"/>
+          <p:nvPr/>
+        </p:nvSpPr>
+        <p:spPr>
+          <a:xfrm>
+            <a:off x="4892040" y="3227832"/>
+            <a:ext cx="3383280" cy="320040"/>
+          </a:xfrm>
+          <a:prstGeom prst="rect">
+            <a:avLst/>
+          </a:prstGeom>
+          <a:noFill/>
+          <a:ln/>
+        </p:spPr>
+        <p:txBody>
+          <a:bodyPr wrap="square" lIns="0" tIns="0" rIns="0" bIns="0" rtlCol="0" anchor="t"/>
+          <a:lstStyle/>
+          <a:p>
+            <a:pPr indent="0" marL="0">
+              <a:buNone/>
+            </a:pPr>
+            <a:r>
+              <a:rPr lang="en-US" sz="1100" b="1" dirty="0">
                 <a:solidFill>
                   <a:srgbClr val="FFFFFF"/>
                 </a:solidFill>
@@ -5868,22 +9509,22 @@
                 <a:ea typeface="Calibri" pitchFamily="34" charset="-122"/>
                 <a:cs typeface="Calibri" pitchFamily="34" charset="-120"/>
               </a:rPr>
-              <a:t>Attention : Bitcoin n'est PAS adapté pour les paiements du quotidien. Trop lent, frais qui varient, prix volatil. Pour ça, les stablecoins (Module 5) sont beaucoup mieux.</a:t>
-            </a:r>
-            <a:endParaRPr lang="en-US" sz="1400" dirty="0"/>
-          </a:p>
-        </p:txBody>
-      </p:sp>
-      <p:sp>
-        <p:nvSpPr>
-          <p:cNvPr id="4" name="Text 2"/>
-          <p:cNvSpPr txBox="1"/>
-          <p:nvPr/>
-        </p:nvSpPr>
-        <p:spPr>
-          <a:xfrm>
-            <a:off x="731520" y="4709160"/>
-            <a:ext cx="7680960" cy="274320"/>
+              <a:t>Attention : Bitcoin n'est PAS adapté pour les paiements d...</a:t>
+            </a:r>
+            <a:endParaRPr lang="en-US" sz="1100" dirty="0"/>
+          </a:p>
+        </p:txBody>
+      </p:sp>
+      <p:sp>
+        <p:nvSpPr>
+          <p:cNvPr id="18" name="Text 12"/>
+          <p:cNvSpPr txBox="1"/>
+          <p:nvPr/>
+        </p:nvSpPr>
+        <p:spPr>
+          <a:xfrm>
+            <a:off x="4892040" y="3520440"/>
+            <a:ext cx="3383280" cy="274320"/>
           </a:xfrm>
           <a:prstGeom prst="rect">
             <a:avLst/>
@@ -5892,22 +9533,22 @@
           <a:ln/>
         </p:spPr>
         <p:txBody>
-          <a:bodyPr wrap="square" lIns="0" tIns="0" rIns="0" bIns="0" rtlCol="0" anchor="ctr"/>
-          <a:lstStyle/>
-          <a:p>
-            <a:pPr algn="r" indent="0" marL="0">
+          <a:bodyPr wrap="square" lIns="0" tIns="0" rIns="0" bIns="0" rtlCol="0" anchor="t"/>
+          <a:lstStyle/>
+          <a:p>
+            <a:pPr indent="0" marL="0">
               <a:buNone/>
             </a:pPr>
             <a:r>
               <a:rPr lang="en-US" sz="900" dirty="0">
                 <a:solidFill>
-                  <a:srgbClr val="64748B"/>
-                </a:solidFill>
-                <a:latin typeface="Calibri" pitchFamily="34" charset="0"/>
-                <a:ea typeface="Calibri" pitchFamily="34" charset="-122"/>
-                <a:cs typeface="Calibri" pitchFamily="34" charset="-120"/>
-              </a:rPr>
-              <a:t>Module 5 — Lecon 1</a:t>
+                  <a:srgbClr val="94A3B8"/>
+                </a:solidFill>
+                <a:latin typeface="Calibri" pitchFamily="34" charset="0"/>
+                <a:ea typeface="Calibri" pitchFamily="34" charset="-122"/>
+                <a:cs typeface="Calibri" pitchFamily="34" charset="-120"/>
+              </a:rPr>
+              <a:t>Trop lent, frais qui varient, prix volatil. Pour ça, les stablecoins (Module 5) </a:t>
             </a:r>
             <a:endParaRPr lang="en-US" sz="900" dirty="0"/>
           </a:p>
@@ -5945,16 +9586,40 @@
           <a:chExt cx="0" cy="0"/>
         </a:xfrm>
       </p:grpSpPr>
-      <p:sp>
-        <p:nvSpPr>
-          <p:cNvPr id="2" name="Text 0"/>
-          <p:cNvSpPr txBox="1"/>
-          <p:nvPr/>
-        </p:nvSpPr>
-        <p:spPr>
-          <a:xfrm>
-            <a:off x="731520" y="457200"/>
-            <a:ext cx="2743200" cy="365760"/>
+      <p:pic>
+        <p:nvPicPr>
+          <p:cNvPr id="2" name="Image 0" descr="preencoded.png">    </p:cNvPr>
+          <p:cNvPicPr>
+            <a:picLocks noChangeAspect="1"/>
+          </p:cNvPicPr>
+          <p:nvPr/>
+        </p:nvPicPr>
+        <p:blipFill>
+          <a:blip r:embed="rId1"/>
+          <a:stretch>
+            <a:fillRect/>
+          </a:stretch>
+        </p:blipFill>
+        <p:spPr>
+          <a:xfrm>
+            <a:off x="731520" y="320040"/>
+            <a:ext cx="457200" cy="457200"/>
+          </a:xfrm>
+          <a:prstGeom prst="rect">
+            <a:avLst/>
+          </a:prstGeom>
+        </p:spPr>
+      </p:pic>
+      <p:sp>
+        <p:nvSpPr>
+          <p:cNvPr id="3" name="Text 0"/>
+          <p:cNvSpPr txBox="1"/>
+          <p:nvPr/>
+        </p:nvSpPr>
+        <p:spPr>
+          <a:xfrm>
+            <a:off x="1280160" y="365760"/>
+            <a:ext cx="2743200" cy="320040"/>
           </a:xfrm>
           <a:prstGeom prst="rect">
             <a:avLst/>
@@ -5986,14 +9651,14 @@
       </p:sp>
       <p:sp>
         <p:nvSpPr>
-          <p:cNvPr id="3" name="Text 1"/>
-          <p:cNvSpPr txBox="1"/>
-          <p:nvPr/>
-        </p:nvSpPr>
-        <p:spPr>
-          <a:xfrm>
-            <a:off x="731520" y="868680"/>
-            <a:ext cx="7680960" cy="502920"/>
+          <p:cNvPr id="4" name="Text 1"/>
+          <p:cNvSpPr txBox="1"/>
+          <p:nvPr/>
+        </p:nvSpPr>
+        <p:spPr>
+          <a:xfrm>
+            <a:off x="731520" y="822960"/>
+            <a:ext cx="7680960" cy="457200"/>
           </a:xfrm>
           <a:prstGeom prst="rect">
             <a:avLst/>
@@ -6009,7 +9674,7 @@
               <a:buNone/>
             </a:pPr>
             <a:r>
-              <a:rPr lang="en-US" sz="2200" b="1" dirty="0">
+              <a:rPr lang="en-US" sz="2000" b="1" dirty="0">
                 <a:solidFill>
                   <a:srgbClr val="FFFFFF"/>
                 </a:solidFill>
@@ -6019,28 +9684,50 @@
               </a:rPr>
               <a:t>Bitcoin (BTC) — l'or numérique</a:t>
             </a:r>
-            <a:endParaRPr lang="en-US" sz="2200" dirty="0"/>
-          </a:p>
-        </p:txBody>
-      </p:sp>
-      <p:sp>
-        <p:nvSpPr>
-          <p:cNvPr id="4" name="Text 2"/>
-          <p:cNvSpPr txBox="1"/>
-          <p:nvPr/>
-        </p:nvSpPr>
-        <p:spPr>
-          <a:xfrm>
-            <a:off x="731520" y="1554480"/>
-            <a:ext cx="457200" cy="548640"/>
+            <a:endParaRPr lang="en-US" sz="2000" dirty="0"/>
+          </a:p>
+        </p:txBody>
+      </p:sp>
+      <p:sp>
+        <p:nvSpPr>
+          <p:cNvPr id="5" name="Shape 2"/>
+          <p:cNvSpPr/>
+          <p:nvPr/>
+        </p:nvSpPr>
+        <p:spPr>
+          <a:xfrm>
+            <a:off x="731520" y="1463040"/>
+            <a:ext cx="7680960" cy="548640"/>
           </a:xfrm>
           <a:prstGeom prst="roundRect">
             <a:avLst>
-              <a:gd name="adj" fmla="val 50000"/>
+              <a:gd name="adj" fmla="val 13333"/>
             </a:avLst>
           </a:prstGeom>
           <a:solidFill>
-            <a:srgbClr val="00BFA6"/>
+            <a:srgbClr val="0F1419"/>
+          </a:solidFill>
+          <a:ln/>
+        </p:spPr>
+      </p:sp>
+      <p:sp>
+        <p:nvSpPr>
+          <p:cNvPr id="6" name="Text 3"/>
+          <p:cNvSpPr txBox="1"/>
+          <p:nvPr/>
+        </p:nvSpPr>
+        <p:spPr>
+          <a:xfrm>
+            <a:off x="914400" y="1463040"/>
+            <a:ext cx="411480" cy="548640"/>
+          </a:xfrm>
+          <a:prstGeom prst="roundRect">
+            <a:avLst>
+              <a:gd name="adj" fmla="val 48889"/>
+            </a:avLst>
+          </a:prstGeom>
+          <a:solidFill>
+            <a:srgbClr val="22C55E"/>
           </a:solidFill>
           <a:ln/>
         </p:spPr>
@@ -6052,7 +9739,7 @@
               <a:buNone/>
             </a:pPr>
             <a:r>
-              <a:rPr lang="en-US" sz="1600" b="1" dirty="0">
+              <a:rPr lang="en-US" sz="1500" b="1" dirty="0">
                 <a:solidFill>
                   <a:srgbClr val="0F1419"/>
                 </a:solidFill>
@@ -6062,20 +9749,20 @@
               </a:rPr>
               <a:t>1</a:t>
             </a:r>
-            <a:endParaRPr lang="en-US" sz="1600" dirty="0"/>
-          </a:p>
-        </p:txBody>
-      </p:sp>
-      <p:sp>
-        <p:nvSpPr>
-          <p:cNvPr id="5" name="Text 3"/>
-          <p:cNvSpPr txBox="1"/>
-          <p:nvPr/>
-        </p:nvSpPr>
-        <p:spPr>
-          <a:xfrm>
-            <a:off x="1371600" y="1554480"/>
-            <a:ext cx="7040880" cy="548640"/>
+            <a:endParaRPr lang="en-US" sz="1500" dirty="0"/>
+          </a:p>
+        </p:txBody>
+      </p:sp>
+      <p:sp>
+        <p:nvSpPr>
+          <p:cNvPr id="7" name="Text 4"/>
+          <p:cNvSpPr txBox="1"/>
+          <p:nvPr/>
+        </p:nvSpPr>
+        <p:spPr>
+          <a:xfrm>
+            <a:off x="1508760" y="1463040"/>
+            <a:ext cx="6766560" cy="548640"/>
           </a:xfrm>
           <a:prstGeom prst="rect">
             <a:avLst/>
@@ -6091,7 +9778,7 @@
               <a:buNone/>
             </a:pPr>
             <a:r>
-              <a:rPr lang="en-US" sz="1400" dirty="0">
+              <a:rPr lang="en-US" sz="1300" dirty="0">
                 <a:solidFill>
                   <a:srgbClr val="FFFFFF"/>
                 </a:solidFill>
@@ -6101,28 +9788,50 @@
               </a:rPr>
               <a:t>Rareté programmée : il n'y aura jamais plus de 21 millions de BTC. Aucune autorité ne peut en créer davantage. Cette rareté est inscrite dans le code.</a:t>
             </a:r>
-            <a:endParaRPr lang="en-US" sz="1400" dirty="0"/>
-          </a:p>
-        </p:txBody>
-      </p:sp>
-      <p:sp>
-        <p:nvSpPr>
-          <p:cNvPr id="6" name="Text 4"/>
-          <p:cNvSpPr txBox="1"/>
-          <p:nvPr/>
-        </p:nvSpPr>
-        <p:spPr>
-          <a:xfrm>
-            <a:off x="731520" y="2212848"/>
-            <a:ext cx="457200" cy="548640"/>
+            <a:endParaRPr lang="en-US" sz="1300" dirty="0"/>
+          </a:p>
+        </p:txBody>
+      </p:sp>
+      <p:sp>
+        <p:nvSpPr>
+          <p:cNvPr id="8" name="Shape 5"/>
+          <p:cNvSpPr/>
+          <p:nvPr/>
+        </p:nvSpPr>
+        <p:spPr>
+          <a:xfrm>
+            <a:off x="731520" y="2103120"/>
+            <a:ext cx="7680960" cy="548640"/>
           </a:xfrm>
           <a:prstGeom prst="roundRect">
             <a:avLst>
-              <a:gd name="adj" fmla="val 50000"/>
+              <a:gd name="adj" fmla="val 13333"/>
             </a:avLst>
           </a:prstGeom>
           <a:solidFill>
-            <a:srgbClr val="00BFA6"/>
+            <a:srgbClr val="0F1419"/>
+          </a:solidFill>
+          <a:ln/>
+        </p:spPr>
+      </p:sp>
+      <p:sp>
+        <p:nvSpPr>
+          <p:cNvPr id="9" name="Text 6"/>
+          <p:cNvSpPr txBox="1"/>
+          <p:nvPr/>
+        </p:nvSpPr>
+        <p:spPr>
+          <a:xfrm>
+            <a:off x="914400" y="2103120"/>
+            <a:ext cx="411480" cy="548640"/>
+          </a:xfrm>
+          <a:prstGeom prst="roundRect">
+            <a:avLst>
+              <a:gd name="adj" fmla="val 48889"/>
+            </a:avLst>
+          </a:prstGeom>
+          <a:solidFill>
+            <a:srgbClr val="22C55E"/>
           </a:solidFill>
           <a:ln/>
         </p:spPr>
@@ -6134,7 +9843,7 @@
               <a:buNone/>
             </a:pPr>
             <a:r>
-              <a:rPr lang="en-US" sz="1600" b="1" dirty="0">
+              <a:rPr lang="en-US" sz="1500" b="1" dirty="0">
                 <a:solidFill>
                   <a:srgbClr val="0F1419"/>
                 </a:solidFill>
@@ -6144,20 +9853,20 @@
               </a:rPr>
               <a:t>2</a:t>
             </a:r>
-            <a:endParaRPr lang="en-US" sz="1600" dirty="0"/>
-          </a:p>
-        </p:txBody>
-      </p:sp>
-      <p:sp>
-        <p:nvSpPr>
-          <p:cNvPr id="7" name="Text 5"/>
-          <p:cNvSpPr txBox="1"/>
-          <p:nvPr/>
-        </p:nvSpPr>
-        <p:spPr>
-          <a:xfrm>
-            <a:off x="1371600" y="2212848"/>
-            <a:ext cx="7040880" cy="548640"/>
+            <a:endParaRPr lang="en-US" sz="1500" dirty="0"/>
+          </a:p>
+        </p:txBody>
+      </p:sp>
+      <p:sp>
+        <p:nvSpPr>
+          <p:cNvPr id="10" name="Text 7"/>
+          <p:cNvSpPr txBox="1"/>
+          <p:nvPr/>
+        </p:nvSpPr>
+        <p:spPr>
+          <a:xfrm>
+            <a:off x="1508760" y="2103120"/>
+            <a:ext cx="6766560" cy="548640"/>
           </a:xfrm>
           <a:prstGeom prst="rect">
             <a:avLst/>
@@ -6173,7 +9882,7 @@
               <a:buNone/>
             </a:pPr>
             <a:r>
-              <a:rPr lang="en-US" sz="1400" dirty="0">
+              <a:rPr lang="en-US" sz="1300" dirty="0">
                 <a:solidFill>
                   <a:srgbClr val="FFFFFF"/>
                 </a:solidFill>
@@ -6183,28 +9892,50 @@
               </a:rPr>
               <a:t>Sécurité imbattable : le réseau Bitcoin est protégé par une quantité d'énergie colossale. L'attaquer coûterait des dizaines de milliards de dollars...</a:t>
             </a:r>
-            <a:endParaRPr lang="en-US" sz="1400" dirty="0"/>
-          </a:p>
-        </p:txBody>
-      </p:sp>
-      <p:sp>
-        <p:nvSpPr>
-          <p:cNvPr id="8" name="Text 6"/>
-          <p:cNvSpPr txBox="1"/>
-          <p:nvPr/>
-        </p:nvSpPr>
-        <p:spPr>
-          <a:xfrm>
-            <a:off x="731520" y="2871216"/>
-            <a:ext cx="457200" cy="548640"/>
+            <a:endParaRPr lang="en-US" sz="1300" dirty="0"/>
+          </a:p>
+        </p:txBody>
+      </p:sp>
+      <p:sp>
+        <p:nvSpPr>
+          <p:cNvPr id="11" name="Shape 8"/>
+          <p:cNvSpPr/>
+          <p:nvPr/>
+        </p:nvSpPr>
+        <p:spPr>
+          <a:xfrm>
+            <a:off x="731520" y="2743200"/>
+            <a:ext cx="7680960" cy="548640"/>
           </a:xfrm>
           <a:prstGeom prst="roundRect">
             <a:avLst>
-              <a:gd name="adj" fmla="val 50000"/>
+              <a:gd name="adj" fmla="val 13333"/>
             </a:avLst>
           </a:prstGeom>
           <a:solidFill>
-            <a:srgbClr val="00BFA6"/>
+            <a:srgbClr val="0F1419"/>
+          </a:solidFill>
+          <a:ln/>
+        </p:spPr>
+      </p:sp>
+      <p:sp>
+        <p:nvSpPr>
+          <p:cNvPr id="12" name="Text 9"/>
+          <p:cNvSpPr txBox="1"/>
+          <p:nvPr/>
+        </p:nvSpPr>
+        <p:spPr>
+          <a:xfrm>
+            <a:off x="914400" y="2743200"/>
+            <a:ext cx="411480" cy="548640"/>
+          </a:xfrm>
+          <a:prstGeom prst="roundRect">
+            <a:avLst>
+              <a:gd name="adj" fmla="val 48889"/>
+            </a:avLst>
+          </a:prstGeom>
+          <a:solidFill>
+            <a:srgbClr val="22C55E"/>
           </a:solidFill>
           <a:ln/>
         </p:spPr>
@@ -6216,7 +9947,7 @@
               <a:buNone/>
             </a:pPr>
             <a:r>
-              <a:rPr lang="en-US" sz="1600" b="1" dirty="0">
+              <a:rPr lang="en-US" sz="1500" b="1" dirty="0">
                 <a:solidFill>
                   <a:srgbClr val="0F1419"/>
                 </a:solidFill>
@@ -6226,20 +9957,20 @@
               </a:rPr>
               <a:t>3</a:t>
             </a:r>
-            <a:endParaRPr lang="en-US" sz="1600" dirty="0"/>
-          </a:p>
-        </p:txBody>
-      </p:sp>
-      <p:sp>
-        <p:nvSpPr>
-          <p:cNvPr id="9" name="Text 7"/>
-          <p:cNvSpPr txBox="1"/>
-          <p:nvPr/>
-        </p:nvSpPr>
-        <p:spPr>
-          <a:xfrm>
-            <a:off x="1371600" y="2871216"/>
-            <a:ext cx="7040880" cy="548640"/>
+            <a:endParaRPr lang="en-US" sz="1500" dirty="0"/>
+          </a:p>
+        </p:txBody>
+      </p:sp>
+      <p:sp>
+        <p:nvSpPr>
+          <p:cNvPr id="13" name="Text 10"/>
+          <p:cNvSpPr txBox="1"/>
+          <p:nvPr/>
+        </p:nvSpPr>
+        <p:spPr>
+          <a:xfrm>
+            <a:off x="1508760" y="2743200"/>
+            <a:ext cx="6766560" cy="548640"/>
           </a:xfrm>
           <a:prstGeom prst="rect">
             <a:avLst/>
@@ -6255,7 +9986,7 @@
               <a:buNone/>
             </a:pPr>
             <a:r>
-              <a:rPr lang="en-US" sz="1400" dirty="0">
+              <a:rPr lang="en-US" sz="1300" dirty="0">
                 <a:solidFill>
                   <a:srgbClr val="FFFFFF"/>
                 </a:solidFill>
@@ -6265,28 +9996,50 @@
               </a:rPr>
               <a:t>Simplicité voulue : Bitcoin ne fait qu'une chose, mais il la fait bien : transférer de la valeur. Il n'y a pas de « smart contracts » complexes. C'...</a:t>
             </a:r>
-            <a:endParaRPr lang="en-US" sz="1400" dirty="0"/>
-          </a:p>
-        </p:txBody>
-      </p:sp>
-      <p:sp>
-        <p:nvSpPr>
-          <p:cNvPr id="10" name="Text 8"/>
-          <p:cNvSpPr txBox="1"/>
-          <p:nvPr/>
-        </p:nvSpPr>
-        <p:spPr>
-          <a:xfrm>
-            <a:off x="731520" y="3529584"/>
-            <a:ext cx="457200" cy="548640"/>
+            <a:endParaRPr lang="en-US" sz="1300" dirty="0"/>
+          </a:p>
+        </p:txBody>
+      </p:sp>
+      <p:sp>
+        <p:nvSpPr>
+          <p:cNvPr id="14" name="Shape 11"/>
+          <p:cNvSpPr/>
+          <p:nvPr/>
+        </p:nvSpPr>
+        <p:spPr>
+          <a:xfrm>
+            <a:off x="731520" y="3383280"/>
+            <a:ext cx="7680960" cy="548640"/>
           </a:xfrm>
           <a:prstGeom prst="roundRect">
             <a:avLst>
-              <a:gd name="adj" fmla="val 50000"/>
+              <a:gd name="adj" fmla="val 13333"/>
             </a:avLst>
           </a:prstGeom>
           <a:solidFill>
-            <a:srgbClr val="00BFA6"/>
+            <a:srgbClr val="0F1419"/>
+          </a:solidFill>
+          <a:ln/>
+        </p:spPr>
+      </p:sp>
+      <p:sp>
+        <p:nvSpPr>
+          <p:cNvPr id="15" name="Text 12"/>
+          <p:cNvSpPr txBox="1"/>
+          <p:nvPr/>
+        </p:nvSpPr>
+        <p:spPr>
+          <a:xfrm>
+            <a:off x="914400" y="3383280"/>
+            <a:ext cx="411480" cy="548640"/>
+          </a:xfrm>
+          <a:prstGeom prst="roundRect">
+            <a:avLst>
+              <a:gd name="adj" fmla="val 48889"/>
+            </a:avLst>
+          </a:prstGeom>
+          <a:solidFill>
+            <a:srgbClr val="22C55E"/>
           </a:solidFill>
           <a:ln/>
         </p:spPr>
@@ -6298,7 +10051,7 @@
               <a:buNone/>
             </a:pPr>
             <a:r>
-              <a:rPr lang="en-US" sz="1600" b="1" dirty="0">
+              <a:rPr lang="en-US" sz="1500" b="1" dirty="0">
                 <a:solidFill>
                   <a:srgbClr val="0F1419"/>
                 </a:solidFill>
@@ -6308,20 +10061,20 @@
               </a:rPr>
               <a:t>4</a:t>
             </a:r>
-            <a:endParaRPr lang="en-US" sz="1600" dirty="0"/>
-          </a:p>
-        </p:txBody>
-      </p:sp>
-      <p:sp>
-        <p:nvSpPr>
-          <p:cNvPr id="11" name="Text 9"/>
-          <p:cNvSpPr txBox="1"/>
-          <p:nvPr/>
-        </p:nvSpPr>
-        <p:spPr>
-          <a:xfrm>
-            <a:off x="1371600" y="3529584"/>
-            <a:ext cx="7040880" cy="548640"/>
+            <a:endParaRPr lang="en-US" sz="1500" dirty="0"/>
+          </a:p>
+        </p:txBody>
+      </p:sp>
+      <p:sp>
+        <p:nvSpPr>
+          <p:cNvPr id="16" name="Text 13"/>
+          <p:cNvSpPr txBox="1"/>
+          <p:nvPr/>
+        </p:nvSpPr>
+        <p:spPr>
+          <a:xfrm>
+            <a:off x="1508760" y="3383280"/>
+            <a:ext cx="6766560" cy="548640"/>
           </a:xfrm>
           <a:prstGeom prst="rect">
             <a:avLst/>
@@ -6337,7 +10090,7 @@
               <a:buNone/>
             </a:pPr>
             <a:r>
-              <a:rPr lang="en-US" sz="1400" dirty="0">
+              <a:rPr lang="en-US" sz="1300" dirty="0">
                 <a:solidFill>
                   <a:srgbClr val="FFFFFF"/>
                 </a:solidFill>
@@ -6347,28 +10100,50 @@
               </a:rPr>
               <a:t>Réserve de valeur à long terme : de plus en plus d'entreprises et de particuliers en détiennent comme protection contre l'inflation.</a:t>
             </a:r>
-            <a:endParaRPr lang="en-US" sz="1400" dirty="0"/>
-          </a:p>
-        </p:txBody>
-      </p:sp>
-      <p:sp>
-        <p:nvSpPr>
-          <p:cNvPr id="12" name="Text 10"/>
-          <p:cNvSpPr txBox="1"/>
-          <p:nvPr/>
-        </p:nvSpPr>
-        <p:spPr>
-          <a:xfrm>
-            <a:off x="731520" y="4187952"/>
-            <a:ext cx="457200" cy="548640"/>
+            <a:endParaRPr lang="en-US" sz="1300" dirty="0"/>
+          </a:p>
+        </p:txBody>
+      </p:sp>
+      <p:sp>
+        <p:nvSpPr>
+          <p:cNvPr id="17" name="Shape 14"/>
+          <p:cNvSpPr/>
+          <p:nvPr/>
+        </p:nvSpPr>
+        <p:spPr>
+          <a:xfrm>
+            <a:off x="731520" y="4023360"/>
+            <a:ext cx="7680960" cy="548640"/>
           </a:xfrm>
           <a:prstGeom prst="roundRect">
             <a:avLst>
-              <a:gd name="adj" fmla="val 50000"/>
+              <a:gd name="adj" fmla="val 13333"/>
             </a:avLst>
           </a:prstGeom>
           <a:solidFill>
-            <a:srgbClr val="00BFA6"/>
+            <a:srgbClr val="0F1419"/>
+          </a:solidFill>
+          <a:ln/>
+        </p:spPr>
+      </p:sp>
+      <p:sp>
+        <p:nvSpPr>
+          <p:cNvPr id="18" name="Text 15"/>
+          <p:cNvSpPr txBox="1"/>
+          <p:nvPr/>
+        </p:nvSpPr>
+        <p:spPr>
+          <a:xfrm>
+            <a:off x="914400" y="4023360"/>
+            <a:ext cx="411480" cy="548640"/>
+          </a:xfrm>
+          <a:prstGeom prst="roundRect">
+            <a:avLst>
+              <a:gd name="adj" fmla="val 48889"/>
+            </a:avLst>
+          </a:prstGeom>
+          <a:solidFill>
+            <a:srgbClr val="22C55E"/>
           </a:solidFill>
           <a:ln/>
         </p:spPr>
@@ -6380,7 +10155,7 @@
               <a:buNone/>
             </a:pPr>
             <a:r>
-              <a:rPr lang="en-US" sz="1600" b="1" dirty="0">
+              <a:rPr lang="en-US" sz="1500" b="1" dirty="0">
                 <a:solidFill>
                   <a:srgbClr val="0F1419"/>
                 </a:solidFill>
@@ -6390,20 +10165,20 @@
               </a:rPr>
               <a:t>5</a:t>
             </a:r>
-            <a:endParaRPr lang="en-US" sz="1600" dirty="0"/>
-          </a:p>
-        </p:txBody>
-      </p:sp>
-      <p:sp>
-        <p:nvSpPr>
-          <p:cNvPr id="13" name="Text 11"/>
-          <p:cNvSpPr txBox="1"/>
-          <p:nvPr/>
-        </p:nvSpPr>
-        <p:spPr>
-          <a:xfrm>
-            <a:off x="1371600" y="4187952"/>
-            <a:ext cx="7040880" cy="548640"/>
+            <a:endParaRPr lang="en-US" sz="1500" dirty="0"/>
+          </a:p>
+        </p:txBody>
+      </p:sp>
+      <p:sp>
+        <p:nvSpPr>
+          <p:cNvPr id="19" name="Text 16"/>
+          <p:cNvSpPr txBox="1"/>
+          <p:nvPr/>
+        </p:nvSpPr>
+        <p:spPr>
+          <a:xfrm>
+            <a:off x="1508760" y="4023360"/>
+            <a:ext cx="6766560" cy="548640"/>
           </a:xfrm>
           <a:prstGeom prst="rect">
             <a:avLst/>
@@ -6419,7 +10194,7 @@
               <a:buNone/>
             </a:pPr>
             <a:r>
-              <a:rPr lang="en-US" sz="1400" dirty="0">
+              <a:rPr lang="en-US" sz="1300" dirty="0">
                 <a:solidFill>
                   <a:srgbClr val="FFFFFF"/>
                 </a:solidFill>
@@ -6429,7 +10204,7 @@
               </a:rPr>
               <a:t>Envoi international : envoyer 10 000$ à Dubaï en 20 minutes, pour 2$ de frais, sans passer par une banque.</a:t>
             </a:r>
-            <a:endParaRPr lang="en-US" sz="1400" dirty="0"/>
+            <a:endParaRPr lang="en-US" sz="1300" dirty="0"/>
           </a:p>
         </p:txBody>
       </p:sp>
@@ -6473,12 +10248,12 @@
         </p:nvSpPr>
         <p:spPr>
           <a:xfrm>
-            <a:off x="548640" y="731520"/>
-            <a:ext cx="8046720" cy="3657600"/>
+            <a:off x="548640" y="548640"/>
+            <a:ext cx="8046720" cy="3840480"/>
           </a:xfrm>
           <a:prstGeom prst="roundRect">
             <a:avLst>
-              <a:gd name="adj" fmla="val 3750"/>
+              <a:gd name="adj" fmla="val 3571"/>
             </a:avLst>
           </a:prstGeom>
           <a:solidFill>
@@ -6489,14 +10264,58 @@
       </p:sp>
       <p:sp>
         <p:nvSpPr>
-          <p:cNvPr id="3" name="Text 1"/>
-          <p:cNvSpPr txBox="1"/>
-          <p:nvPr/>
-        </p:nvSpPr>
-        <p:spPr>
-          <a:xfrm>
-            <a:off x="822960" y="914400"/>
-            <a:ext cx="2743200" cy="411480"/>
+          <p:cNvPr id="3" name="Shape 1"/>
+          <p:cNvSpPr/>
+          <p:nvPr/>
+        </p:nvSpPr>
+        <p:spPr>
+          <a:xfrm>
+            <a:off x="548640" y="548640"/>
+            <a:ext cx="54864" cy="3840480"/>
+          </a:xfrm>
+          <a:prstGeom prst="rect">
+            <a:avLst/>
+          </a:prstGeom>
+          <a:solidFill>
+            <a:srgbClr val="EF4444"/>
+          </a:solidFill>
+          <a:ln/>
+        </p:spPr>
+      </p:sp>
+      <p:pic>
+        <p:nvPicPr>
+          <p:cNvPr id="4" name="Image 0" descr="preencoded.png">    </p:cNvPr>
+          <p:cNvPicPr>
+            <a:picLocks noChangeAspect="1"/>
+          </p:cNvPicPr>
+          <p:nvPr/>
+        </p:nvPicPr>
+        <p:blipFill>
+          <a:blip r:embed="rId1"/>
+          <a:stretch>
+            <a:fillRect/>
+          </a:stretch>
+        </p:blipFill>
+        <p:spPr>
+          <a:xfrm>
+            <a:off x="914400" y="777240"/>
+            <a:ext cx="548640" cy="548640"/>
+          </a:xfrm>
+          <a:prstGeom prst="rect">
+            <a:avLst/>
+          </a:prstGeom>
+        </p:spPr>
+      </p:pic>
+      <p:sp>
+        <p:nvSpPr>
+          <p:cNvPr id="5" name="Text 2"/>
+          <p:cNvSpPr txBox="1"/>
+          <p:nvPr/>
+        </p:nvSpPr>
+        <p:spPr>
+          <a:xfrm>
+            <a:off x="1600200" y="777240"/>
+            <a:ext cx="2743200" cy="320040"/>
           </a:xfrm>
           <a:prstGeom prst="rect">
             <a:avLst/>
@@ -6512,7 +10331,7 @@
               <a:buNone/>
             </a:pPr>
             <a:r>
-              <a:rPr lang="en-US" sz="1400" b="1" spc="300" kern="0" dirty="0">
+              <a:rPr lang="en-US" sz="1200" b="1" spc="300" kern="0" dirty="0">
                 <a:solidFill>
                   <a:srgbClr val="EF4444"/>
                 </a:solidFill>
@@ -6522,20 +10341,20 @@
               </a:rPr>
               <a:t>ATTENTION</a:t>
             </a:r>
-            <a:endParaRPr lang="en-US" sz="1400" dirty="0"/>
-          </a:p>
-        </p:txBody>
-      </p:sp>
-      <p:sp>
-        <p:nvSpPr>
-          <p:cNvPr id="4" name="Text 2"/>
-          <p:cNvSpPr txBox="1"/>
-          <p:nvPr/>
-        </p:nvSpPr>
-        <p:spPr>
-          <a:xfrm>
-            <a:off x="822960" y="1371600"/>
-            <a:ext cx="7498080" cy="2194560"/>
+            <a:endParaRPr lang="en-US" sz="1200" dirty="0"/>
+          </a:p>
+        </p:txBody>
+      </p:sp>
+      <p:sp>
+        <p:nvSpPr>
+          <p:cNvPr id="6" name="Text 3"/>
+          <p:cNvSpPr txBox="1"/>
+          <p:nvPr/>
+        </p:nvSpPr>
+        <p:spPr>
+          <a:xfrm>
+            <a:off x="914400" y="1371600"/>
+            <a:ext cx="7406640" cy="2286000"/>
           </a:xfrm>
           <a:prstGeom prst="rect">
             <a:avLst/>
@@ -6597,35 +10416,105 @@
           <a:chExt cx="0" cy="0"/>
         </a:xfrm>
       </p:grpSpPr>
-      <p:sp>
-        <p:nvSpPr>
-          <p:cNvPr id="2" name="Shape 0"/>
+      <p:pic>
+        <p:nvPicPr>
+          <p:cNvPr id="2" name="Image 0" descr="preencoded.png">    </p:cNvPr>
+          <p:cNvPicPr>
+            <a:picLocks noChangeAspect="1"/>
+          </p:cNvPicPr>
+          <p:nvPr/>
+        </p:nvPicPr>
+        <p:blipFill>
+          <a:blip r:embed="rId1"/>
+          <a:stretch>
+            <a:fillRect/>
+          </a:stretch>
+        </p:blipFill>
+        <p:spPr>
+          <a:xfrm>
+            <a:off x="7315200" y="548640"/>
+            <a:ext cx="1280160" cy="1280160"/>
+          </a:xfrm>
+          <a:prstGeom prst="rect">
+            <a:avLst/>
+          </a:prstGeom>
+        </p:spPr>
+      </p:pic>
+      <p:pic>
+        <p:nvPicPr>
+          <p:cNvPr id="3" name="Image 1" descr="preencoded.png">    </p:cNvPr>
+          <p:cNvPicPr>
+            <a:picLocks noChangeAspect="1"/>
+          </p:cNvPicPr>
+          <p:nvPr/>
+        </p:nvPicPr>
+        <p:blipFill>
+          <a:blip r:embed="rId2"/>
+          <a:stretch>
+            <a:fillRect/>
+          </a:stretch>
+        </p:blipFill>
+        <p:spPr>
+          <a:xfrm>
+            <a:off x="7772400" y="2011680"/>
+            <a:ext cx="822960" cy="822960"/>
+          </a:xfrm>
+          <a:prstGeom prst="rect">
+            <a:avLst/>
+          </a:prstGeom>
+        </p:spPr>
+      </p:pic>
+      <p:sp>
+        <p:nvSpPr>
+          <p:cNvPr id="4" name="Shape 0"/>
           <p:cNvSpPr/>
           <p:nvPr/>
         </p:nvSpPr>
         <p:spPr>
           <a:xfrm>
-            <a:off x="548640" y="914400"/>
-            <a:ext cx="45720" cy="2560320"/>
-          </a:xfrm>
-          <a:prstGeom prst="rect">
+            <a:off x="6583680" y="-274320"/>
+            <a:ext cx="3200400" cy="3200400"/>
+          </a:xfrm>
+          <a:prstGeom prst="ellipse">
             <a:avLst/>
           </a:prstGeom>
           <a:solidFill>
-            <a:srgbClr val="00BFA6"/>
+            <a:srgbClr val="22C55E">
+              <a:alpha val="6000"/>
+            </a:srgbClr>
           </a:solidFill>
           <a:ln/>
         </p:spPr>
       </p:sp>
       <p:sp>
         <p:nvSpPr>
-          <p:cNvPr id="3" name="Text 1"/>
-          <p:cNvSpPr txBox="1"/>
-          <p:nvPr/>
-        </p:nvSpPr>
-        <p:spPr>
-          <a:xfrm>
-            <a:off x="822960" y="1097280"/>
+          <p:cNvPr id="5" name="Shape 1"/>
+          <p:cNvSpPr/>
+          <p:nvPr/>
+        </p:nvSpPr>
+        <p:spPr>
+          <a:xfrm>
+            <a:off x="731520" y="914400"/>
+            <a:ext cx="45720" cy="2194560"/>
+          </a:xfrm>
+          <a:prstGeom prst="rect">
+            <a:avLst/>
+          </a:prstGeom>
+          <a:solidFill>
+            <a:srgbClr val="22C55E"/>
+          </a:solidFill>
+          <a:ln/>
+        </p:spPr>
+      </p:sp>
+      <p:sp>
+        <p:nvSpPr>
+          <p:cNvPr id="6" name="Text 2"/>
+          <p:cNvSpPr txBox="1"/>
+          <p:nvPr/>
+        </p:nvSpPr>
+        <p:spPr>
+          <a:xfrm>
+            <a:off x="960120" y="914400"/>
             <a:ext cx="2743200" cy="365760"/>
           </a:xfrm>
           <a:prstGeom prst="rect">
@@ -6644,13 +10533,13 @@
             <a:r>
               <a:rPr lang="en-US" sz="1200" b="1" spc="200" kern="0" dirty="0">
                 <a:solidFill>
-                  <a:srgbClr val="00BFA6"/>
-                </a:solidFill>
-                <a:latin typeface="Calibri" pitchFamily="34" charset="0"/>
-                <a:ea typeface="Calibri" pitchFamily="34" charset="-122"/>
-                <a:cs typeface="Calibri" pitchFamily="34" charset="-120"/>
-              </a:rPr>
-              <a:t>Lecon 2 / 3</a:t>
+                  <a:srgbClr val="22C55E"/>
+                </a:solidFill>
+                <a:latin typeface="Calibri" pitchFamily="34" charset="0"/>
+                <a:ea typeface="Calibri" pitchFamily="34" charset="-122"/>
+                <a:cs typeface="Calibri" pitchFamily="34" charset="-120"/>
+              </a:rPr>
+              <a:t>Leçon 2 / 3</a:t>
             </a:r>
             <a:endParaRPr lang="en-US" sz="1200" dirty="0"/>
           </a:p>
@@ -6658,14 +10547,14 @@
       </p:sp>
       <p:sp>
         <p:nvSpPr>
-          <p:cNvPr id="4" name="Text 2"/>
-          <p:cNvSpPr txBox="1"/>
-          <p:nvPr/>
-        </p:nvSpPr>
-        <p:spPr>
-          <a:xfrm>
-            <a:off x="822960" y="1645920"/>
-            <a:ext cx="7498080" cy="1280160"/>
+          <p:cNvPr id="7" name="Text 3"/>
+          <p:cNvSpPr txBox="1"/>
+          <p:nvPr/>
+        </p:nvSpPr>
+        <p:spPr>
+          <a:xfrm>
+            <a:off x="960120" y="1371600"/>
+            <a:ext cx="6217920" cy="1463040"/>
           </a:xfrm>
           <a:prstGeom prst="rect">
             <a:avLst/>
@@ -6681,7 +10570,7 @@
               <a:buNone/>
             </a:pPr>
             <a:r>
-              <a:rPr lang="en-US" sz="3000" b="1" dirty="0">
+              <a:rPr lang="en-US" sz="2800" b="1" dirty="0">
                 <a:solidFill>
                   <a:srgbClr val="FFFFFF"/>
                 </a:solidFill>
@@ -6691,19 +10580,19 @@
               </a:rPr>
               <a:t>Ethereum (ETH) — l'ordinateur mondial</a:t>
             </a:r>
-            <a:endParaRPr lang="en-US" sz="3000" dirty="0"/>
-          </a:p>
-        </p:txBody>
-      </p:sp>
-      <p:sp>
-        <p:nvSpPr>
-          <p:cNvPr id="5" name="Text 3"/>
-          <p:cNvSpPr txBox="1"/>
-          <p:nvPr/>
-        </p:nvSpPr>
-        <p:spPr>
-          <a:xfrm>
-            <a:off x="822960" y="4206240"/>
+            <a:endParaRPr lang="en-US" sz="2800" dirty="0"/>
+          </a:p>
+        </p:txBody>
+      </p:sp>
+      <p:sp>
+        <p:nvSpPr>
+          <p:cNvPr id="8" name="Text 4"/>
+          <p:cNvSpPr txBox="1"/>
+          <p:nvPr/>
+        </p:nvSpPr>
+        <p:spPr>
+          <a:xfrm>
+            <a:off x="960120" y="4114800"/>
             <a:ext cx="5486400" cy="320040"/>
           </a:xfrm>
           <a:prstGeom prst="rect">

--- a/public/course-materials/pptx/Module-05-Bitcoin-Ethereum-les-grandes-cryptos.pptx
+++ b/public/course-materials/pptx/Module-05-Bitcoin-Ethereum-les-grandes-cryptos.pptx
@@ -2815,7 +2815,7 @@
     <p:bg>
       <p:bgPr>
         <a:solidFill>
-          <a:srgbClr val="0F1419"/>
+          <a:srgbClr val="0F1214"/>
         </a:solidFill>
       </p:bgPr>
     </p:bg>
@@ -2848,7 +2848,7 @@
             <a:avLst/>
           </a:prstGeom>
           <a:solidFill>
-            <a:srgbClr val="22C55E">
+            <a:srgbClr val="3B968F">
               <a:alpha val="8000"/>
             </a:srgbClr>
           </a:solidFill>
@@ -2870,7 +2870,7 @@
             <a:avLst/>
           </a:prstGeom>
           <a:solidFill>
-            <a:srgbClr val="22C55E">
+            <a:srgbClr val="3B968F">
               <a:alpha val="5000"/>
             </a:srgbClr>
           </a:solidFill>
@@ -2892,7 +2892,7 @@
             <a:avLst/>
           </a:prstGeom>
           <a:solidFill>
-            <a:srgbClr val="22C55E"/>
+            <a:srgbClr val="3B968F"/>
           </a:solidFill>
           <a:ln/>
         </p:spPr>
@@ -2948,7 +2948,7 @@
             <a:r>
               <a:rPr lang="en-US" sz="1300" b="1" spc="400" kern="0" dirty="0">
                 <a:solidFill>
-                  <a:srgbClr val="22C55E"/>
+                  <a:srgbClr val="3B968F"/>
                 </a:solidFill>
                 <a:latin typeface="Calibri" pitchFamily="34" charset="0"/>
                 <a:ea typeface="Calibri" pitchFamily="34" charset="-122"/>
@@ -3014,7 +3014,7 @@
             <a:avLst/>
           </a:prstGeom>
           <a:solidFill>
-            <a:srgbClr val="22C55E"/>
+            <a:srgbClr val="3B968F"/>
           </a:solidFill>
           <a:ln/>
         </p:spPr>
@@ -3046,7 +3046,7 @@
             <a:r>
               <a:rPr lang="en-US" sz="1100" spc="300" kern="0" dirty="0">
                 <a:solidFill>
-                  <a:srgbClr val="64748B"/>
+                  <a:srgbClr val="5B6672"/>
                 </a:solidFill>
                 <a:latin typeface="Calibri" pitchFamily="34" charset="0"/>
                 <a:ea typeface="Calibri" pitchFamily="34" charset="-122"/>
@@ -3085,7 +3085,7 @@
             <a:r>
               <a:rPr lang="en-US" sz="1100" dirty="0">
                 <a:solidFill>
-                  <a:srgbClr val="94A3B8"/>
+                  <a:srgbClr val="8994A0"/>
                 </a:solidFill>
                 <a:latin typeface="Calibri" pitchFamily="34" charset="0"/>
                 <a:ea typeface="Calibri" pitchFamily="34" charset="-122"/>
@@ -3111,7 +3111,7 @@
     <p:bg>
       <p:bgPr>
         <a:solidFill>
-          <a:srgbClr val="0F1419"/>
+          <a:srgbClr val="0F1214"/>
         </a:solidFill>
       </p:bgPr>
     </p:bg>
@@ -3144,7 +3144,7 @@
             <a:avLst/>
           </a:prstGeom>
           <a:solidFill>
-            <a:srgbClr val="22C55E">
+            <a:srgbClr val="3B968F">
               <a:alpha val="12000"/>
             </a:srgbClr>
           </a:solidFill>
@@ -3266,7 +3266,7 @@
             <a:r>
               <a:rPr lang="en-US" sz="900" dirty="0">
                 <a:solidFill>
-                  <a:srgbClr val="64748B"/>
+                  <a:srgbClr val="5B6672"/>
                 </a:solidFill>
                 <a:latin typeface="Calibri" pitchFamily="34" charset="0"/>
                 <a:ea typeface="Calibri" pitchFamily="34" charset="-122"/>
@@ -3292,7 +3292,7 @@
     <p:bg>
       <p:bgPr>
         <a:solidFill>
-          <a:srgbClr val="0F1419"/>
+          <a:srgbClr val="0F1214"/>
         </a:solidFill>
       </p:bgPr>
     </p:bg>
@@ -3337,7 +3337,7 @@
             <a:r>
               <a:rPr lang="en-US" sz="2000" b="1" dirty="0">
                 <a:solidFill>
-                  <a:srgbClr val="22C55E"/>
+                  <a:srgbClr val="3B968F"/>
                 </a:solidFill>
                 <a:latin typeface="Calibri" pitchFamily="34" charset="0"/>
                 <a:ea typeface="Calibri" pitchFamily="34" charset="-122"/>
@@ -3451,7 +3451,7 @@
             </a:avLst>
           </a:prstGeom>
           <a:solidFill>
-            <a:srgbClr val="1A2332"/>
+            <a:srgbClr val="1A2026"/>
           </a:solidFill>
           <a:ln/>
         </p:spPr>
@@ -3536,7 +3536,7 @@
             </a:avLst>
           </a:prstGeom>
           <a:solidFill>
-            <a:srgbClr val="1A2332"/>
+            <a:srgbClr val="1A2026"/>
           </a:solidFill>
           <a:ln/>
         </p:spPr>
@@ -3618,7 +3618,7 @@
     <p:bg>
       <p:bgPr>
         <a:solidFill>
-          <a:srgbClr val="0F1419"/>
+          <a:srgbClr val="0F1214"/>
         </a:solidFill>
       </p:bgPr>
     </p:bg>
@@ -3651,7 +3651,7 @@
             <a:avLst/>
           </a:prstGeom>
           <a:solidFill>
-            <a:srgbClr val="22C55E">
+            <a:srgbClr val="3B968F">
               <a:alpha val="12000"/>
             </a:srgbClr>
           </a:solidFill>
@@ -3709,7 +3709,7 @@
             <a:r>
               <a:rPr lang="en-US" sz="2000" b="1" dirty="0">
                 <a:solidFill>
-                  <a:srgbClr val="22C55E"/>
+                  <a:srgbClr val="3B968F"/>
                 </a:solidFill>
                 <a:latin typeface="Calibri" pitchFamily="34" charset="0"/>
                 <a:ea typeface="Calibri" pitchFamily="34" charset="-122"/>
@@ -3917,7 +3917,7 @@
             <a:r>
               <a:rPr lang="en-US" sz="900" dirty="0">
                 <a:solidFill>
-                  <a:srgbClr val="64748B"/>
+                  <a:srgbClr val="5B6672"/>
                 </a:solidFill>
                 <a:latin typeface="Calibri" pitchFamily="34" charset="0"/>
                 <a:ea typeface="Calibri" pitchFamily="34" charset="-122"/>
@@ -3943,7 +3943,7 @@
     <p:bg>
       <p:bgPr>
         <a:solidFill>
-          <a:srgbClr val="1A2332"/>
+          <a:srgbClr val="1A2026"/>
         </a:solidFill>
       </p:bgPr>
     </p:bg>
@@ -4012,7 +4012,7 @@
             <a:r>
               <a:rPr lang="en-US" sz="1200" b="1" spc="300" kern="0" dirty="0">
                 <a:solidFill>
-                  <a:srgbClr val="F59E0B"/>
+                  <a:srgbClr val="5BC1B8"/>
                 </a:solidFill>
                 <a:latin typeface="Calibri" pitchFamily="34" charset="0"/>
                 <a:ea typeface="Calibri" pitchFamily="34" charset="-122"/>
@@ -4080,7 +4080,7 @@
             </a:avLst>
           </a:prstGeom>
           <a:solidFill>
-            <a:srgbClr val="0F1419"/>
+            <a:srgbClr val="0F1214"/>
           </a:solidFill>
           <a:ln/>
         </p:spPr>
@@ -4102,7 +4102,7 @@
             </a:avLst>
           </a:prstGeom>
           <a:solidFill>
-            <a:srgbClr val="22C55E"/>
+            <a:srgbClr val="3B968F"/>
           </a:solidFill>
           <a:ln/>
         </p:spPr>
@@ -4116,7 +4116,7 @@
             <a:r>
               <a:rPr lang="en-US" sz="1500" b="1" dirty="0">
                 <a:solidFill>
-                  <a:srgbClr val="0F1419"/>
+                  <a:srgbClr val="0F1214"/>
                 </a:solidFill>
                 <a:latin typeface="Calibri" pitchFamily="34" charset="0"/>
                 <a:ea typeface="Calibri" pitchFamily="34" charset="-122"/>
@@ -4184,7 +4184,7 @@
             </a:avLst>
           </a:prstGeom>
           <a:solidFill>
-            <a:srgbClr val="0F1419"/>
+            <a:srgbClr val="0F1214"/>
           </a:solidFill>
           <a:ln/>
         </p:spPr>
@@ -4206,7 +4206,7 @@
             </a:avLst>
           </a:prstGeom>
           <a:solidFill>
-            <a:srgbClr val="22C55E"/>
+            <a:srgbClr val="3B968F"/>
           </a:solidFill>
           <a:ln/>
         </p:spPr>
@@ -4220,7 +4220,7 @@
             <a:r>
               <a:rPr lang="en-US" sz="1500" b="1" dirty="0">
                 <a:solidFill>
-                  <a:srgbClr val="0F1419"/>
+                  <a:srgbClr val="0F1214"/>
                 </a:solidFill>
                 <a:latin typeface="Calibri" pitchFamily="34" charset="0"/>
                 <a:ea typeface="Calibri" pitchFamily="34" charset="-122"/>
@@ -4288,7 +4288,7 @@
             </a:avLst>
           </a:prstGeom>
           <a:solidFill>
-            <a:srgbClr val="0F1419"/>
+            <a:srgbClr val="0F1214"/>
           </a:solidFill>
           <a:ln/>
         </p:spPr>
@@ -4310,7 +4310,7 @@
             </a:avLst>
           </a:prstGeom>
           <a:solidFill>
-            <a:srgbClr val="22C55E"/>
+            <a:srgbClr val="3B968F"/>
           </a:solidFill>
           <a:ln/>
         </p:spPr>
@@ -4324,7 +4324,7 @@
             <a:r>
               <a:rPr lang="en-US" sz="1500" b="1" dirty="0">
                 <a:solidFill>
-                  <a:srgbClr val="0F1419"/>
+                  <a:srgbClr val="0F1214"/>
                 </a:solidFill>
                 <a:latin typeface="Calibri" pitchFamily="34" charset="0"/>
                 <a:ea typeface="Calibri" pitchFamily="34" charset="-122"/>
@@ -4392,7 +4392,7 @@
             </a:avLst>
           </a:prstGeom>
           <a:solidFill>
-            <a:srgbClr val="0F1419"/>
+            <a:srgbClr val="0F1214"/>
           </a:solidFill>
           <a:ln/>
         </p:spPr>
@@ -4414,7 +4414,7 @@
             </a:avLst>
           </a:prstGeom>
           <a:solidFill>
-            <a:srgbClr val="22C55E"/>
+            <a:srgbClr val="3B968F"/>
           </a:solidFill>
           <a:ln/>
         </p:spPr>
@@ -4428,7 +4428,7 @@
             <a:r>
               <a:rPr lang="en-US" sz="1500" b="1" dirty="0">
                 <a:solidFill>
-                  <a:srgbClr val="0F1419"/>
+                  <a:srgbClr val="0F1214"/>
                 </a:solidFill>
                 <a:latin typeface="Calibri" pitchFamily="34" charset="0"/>
                 <a:ea typeface="Calibri" pitchFamily="34" charset="-122"/>
@@ -4496,7 +4496,7 @@
             </a:avLst>
           </a:prstGeom>
           <a:solidFill>
-            <a:srgbClr val="0F1419"/>
+            <a:srgbClr val="0F1214"/>
           </a:solidFill>
           <a:ln/>
         </p:spPr>
@@ -4518,7 +4518,7 @@
             </a:avLst>
           </a:prstGeom>
           <a:solidFill>
-            <a:srgbClr val="22C55E"/>
+            <a:srgbClr val="3B968F"/>
           </a:solidFill>
           <a:ln/>
         </p:spPr>
@@ -4532,7 +4532,7 @@
             <a:r>
               <a:rPr lang="en-US" sz="1500" b="1" dirty="0">
                 <a:solidFill>
-                  <a:srgbClr val="0F1419"/>
+                  <a:srgbClr val="0F1214"/>
                 </a:solidFill>
                 <a:latin typeface="Calibri" pitchFamily="34" charset="0"/>
                 <a:ea typeface="Calibri" pitchFamily="34" charset="-122"/>
@@ -4597,7 +4597,7 @@
     <p:bg>
       <p:bgPr>
         <a:solidFill>
-          <a:srgbClr val="0D2137"/>
+          <a:srgbClr val="12181D"/>
         </a:solidFill>
       </p:bgPr>
     </p:bg>
@@ -4678,7 +4678,7 @@
             <a:avLst/>
           </a:prstGeom>
           <a:solidFill>
-            <a:srgbClr val="22C55E">
+            <a:srgbClr val="3B968F">
               <a:alpha val="6000"/>
             </a:srgbClr>
           </a:solidFill>
@@ -4700,7 +4700,7 @@
             <a:avLst/>
           </a:prstGeom>
           <a:solidFill>
-            <a:srgbClr val="22C55E"/>
+            <a:srgbClr val="3B968F"/>
           </a:solidFill>
           <a:ln/>
         </p:spPr>
@@ -4732,7 +4732,7 @@
             <a:r>
               <a:rPr lang="en-US" sz="1200" b="1" spc="200" kern="0" dirty="0">
                 <a:solidFill>
-                  <a:srgbClr val="22C55E"/>
+                  <a:srgbClr val="3B968F"/>
                 </a:solidFill>
                 <a:latin typeface="Calibri" pitchFamily="34" charset="0"/>
                 <a:ea typeface="Calibri" pitchFamily="34" charset="-122"/>
@@ -4810,7 +4810,7 @@
             <a:r>
               <a:rPr lang="en-US" sz="1100" dirty="0">
                 <a:solidFill>
-                  <a:srgbClr val="64748B"/>
+                  <a:srgbClr val="5B6672"/>
                 </a:solidFill>
                 <a:latin typeface="Calibri" pitchFamily="34" charset="0"/>
                 <a:ea typeface="Calibri" pitchFamily="34" charset="-122"/>
@@ -4836,7 +4836,7 @@
     <p:bg>
       <p:bgPr>
         <a:solidFill>
-          <a:srgbClr val="0F1419"/>
+          <a:srgbClr val="0F1214"/>
         </a:solidFill>
       </p:bgPr>
     </p:bg>
@@ -4869,7 +4869,7 @@
             <a:avLst/>
           </a:prstGeom>
           <a:solidFill>
-            <a:srgbClr val="22C55E">
+            <a:srgbClr val="3B968F">
               <a:alpha val="12000"/>
             </a:srgbClr>
           </a:solidFill>
@@ -4970,7 +4970,7 @@
             <a:r>
               <a:rPr lang="en-US" sz="900" dirty="0">
                 <a:solidFill>
-                  <a:srgbClr val="64748B"/>
+                  <a:srgbClr val="5B6672"/>
                 </a:solidFill>
                 <a:latin typeface="Calibri" pitchFamily="34" charset="0"/>
                 <a:ea typeface="Calibri" pitchFamily="34" charset="-122"/>
@@ -4996,7 +4996,7 @@
     <p:bg>
       <p:bgPr>
         <a:solidFill>
-          <a:srgbClr val="0F1419"/>
+          <a:srgbClr val="0F1214"/>
         </a:solidFill>
       </p:bgPr>
     </p:bg>
@@ -5041,7 +5041,7 @@
             <a:r>
               <a:rPr lang="en-US" sz="2000" b="1" dirty="0">
                 <a:solidFill>
-                  <a:srgbClr val="22C55E"/>
+                  <a:srgbClr val="3B968F"/>
                 </a:solidFill>
                 <a:latin typeface="Calibri" pitchFamily="34" charset="0"/>
                 <a:ea typeface="Calibri" pitchFamily="34" charset="-122"/>
@@ -5155,7 +5155,7 @@
             </a:avLst>
           </a:prstGeom>
           <a:solidFill>
-            <a:srgbClr val="1A2332"/>
+            <a:srgbClr val="1A2026"/>
           </a:solidFill>
           <a:ln/>
         </p:spPr>
@@ -5240,7 +5240,7 @@
             </a:avLst>
           </a:prstGeom>
           <a:solidFill>
-            <a:srgbClr val="1A2332"/>
+            <a:srgbClr val="1A2026"/>
           </a:solidFill>
           <a:ln/>
         </p:spPr>
@@ -5322,7 +5322,7 @@
     <p:bg>
       <p:bgPr>
         <a:solidFill>
-          <a:srgbClr val="0F1419"/>
+          <a:srgbClr val="0F1214"/>
         </a:solidFill>
       </p:bgPr>
     </p:bg>
@@ -5367,7 +5367,7 @@
             <a:r>
               <a:rPr lang="en-US" sz="2000" b="1" dirty="0">
                 <a:solidFill>
-                  <a:srgbClr val="22C55E"/>
+                  <a:srgbClr val="3B968F"/>
                 </a:solidFill>
                 <a:latin typeface="Calibri" pitchFamily="34" charset="0"/>
                 <a:ea typeface="Calibri" pitchFamily="34" charset="-122"/>
@@ -5396,7 +5396,7 @@
             </a:avLst>
           </a:prstGeom>
           <a:solidFill>
-            <a:srgbClr val="1A2332"/>
+            <a:srgbClr val="1A2026"/>
           </a:solidFill>
           <a:ln/>
         </p:spPr>
@@ -5481,7 +5481,7 @@
             </a:avLst>
           </a:prstGeom>
           <a:solidFill>
-            <a:srgbClr val="1A2332"/>
+            <a:srgbClr val="1A2026"/>
           </a:solidFill>
           <a:ln/>
         </p:spPr>
@@ -5566,7 +5566,7 @@
             </a:avLst>
           </a:prstGeom>
           <a:solidFill>
-            <a:srgbClr val="1A2332"/>
+            <a:srgbClr val="1A2026"/>
           </a:solidFill>
           <a:ln/>
         </p:spPr>
@@ -5661,7 +5661,7 @@
             <a:r>
               <a:rPr lang="en-US" sz="900" dirty="0">
                 <a:solidFill>
-                  <a:srgbClr val="94A3B8"/>
+                  <a:srgbClr val="8994A0"/>
                 </a:solidFill>
                 <a:latin typeface="Calibri" pitchFamily="34" charset="0"/>
                 <a:ea typeface="Calibri" pitchFamily="34" charset="-122"/>
@@ -5690,7 +5690,7 @@
             </a:avLst>
           </a:prstGeom>
           <a:solidFill>
-            <a:srgbClr val="1A2332"/>
+            <a:srgbClr val="1A2026"/>
           </a:solidFill>
           <a:ln/>
         </p:spPr>
@@ -5772,7 +5772,7 @@
     <p:bg>
       <p:bgPr>
         <a:solidFill>
-          <a:srgbClr val="0F1419"/>
+          <a:srgbClr val="0F1214"/>
         </a:solidFill>
       </p:bgPr>
     </p:bg>
@@ -5805,7 +5805,7 @@
             <a:avLst/>
           </a:prstGeom>
           <a:solidFill>
-            <a:srgbClr val="22C55E">
+            <a:srgbClr val="3B968F">
               <a:alpha val="12000"/>
             </a:srgbClr>
           </a:solidFill>
@@ -5863,7 +5863,7 @@
             <a:r>
               <a:rPr lang="en-US" sz="2000" b="1" dirty="0">
                 <a:solidFill>
-                  <a:srgbClr val="22C55E"/>
+                  <a:srgbClr val="3B968F"/>
                 </a:solidFill>
                 <a:latin typeface="Calibri" pitchFamily="34" charset="0"/>
                 <a:ea typeface="Calibri" pitchFamily="34" charset="-122"/>
@@ -6029,7 +6029,7 @@
             <a:r>
               <a:rPr lang="en-US" sz="900" dirty="0">
                 <a:solidFill>
-                  <a:srgbClr val="64748B"/>
+                  <a:srgbClr val="5B6672"/>
                 </a:solidFill>
                 <a:latin typeface="Calibri" pitchFamily="34" charset="0"/>
                 <a:ea typeface="Calibri" pitchFamily="34" charset="-122"/>
@@ -6055,7 +6055,7 @@
     <p:bg>
       <p:bgPr>
         <a:solidFill>
-          <a:srgbClr val="0F1419"/>
+          <a:srgbClr val="0F1214"/>
         </a:solidFill>
       </p:bgPr>
     </p:bg>
@@ -6100,7 +6100,7 @@
             <a:r>
               <a:rPr lang="en-US" sz="2000" b="1" dirty="0">
                 <a:solidFill>
-                  <a:srgbClr val="22C55E"/>
+                  <a:srgbClr val="3B968F"/>
                 </a:solidFill>
                 <a:latin typeface="Calibri" pitchFamily="34" charset="0"/>
                 <a:ea typeface="Calibri" pitchFamily="34" charset="-122"/>
@@ -6193,7 +6193,7 @@
             </a:avLst>
           </a:prstGeom>
           <a:solidFill>
-            <a:srgbClr val="1A2332"/>
+            <a:srgbClr val="1A2026"/>
           </a:solidFill>
           <a:ln/>
         </p:spPr>
@@ -6275,7 +6275,7 @@
     <p:bg>
       <p:bgPr>
         <a:solidFill>
-          <a:srgbClr val="0F1419"/>
+          <a:srgbClr val="0F1214"/>
         </a:solidFill>
       </p:bgPr>
     </p:bg>
@@ -6320,7 +6320,7 @@
             <a:r>
               <a:rPr lang="en-US" sz="1200" b="1" spc="300" kern="0" dirty="0">
                 <a:solidFill>
-                  <a:srgbClr val="22C55E"/>
+                  <a:srgbClr val="3B968F"/>
                 </a:solidFill>
                 <a:latin typeface="Calibri" pitchFamily="34" charset="0"/>
                 <a:ea typeface="Calibri" pitchFamily="34" charset="-122"/>
@@ -6388,7 +6388,7 @@
             </a:avLst>
           </a:prstGeom>
           <a:solidFill>
-            <a:srgbClr val="1A2332"/>
+            <a:srgbClr val="1A2026"/>
           </a:solidFill>
           <a:ln/>
         </p:spPr>
@@ -6420,7 +6420,7 @@
             <a:r>
               <a:rPr lang="en-US" sz="1300" b="1" dirty="0">
                 <a:solidFill>
-                  <a:srgbClr val="22C55E"/>
+                  <a:srgbClr val="3B968F"/>
                 </a:solidFill>
                 <a:latin typeface="Calibri" pitchFamily="34" charset="0"/>
                 <a:ea typeface="Calibri" pitchFamily="34" charset="-122"/>
@@ -6512,7 +6512,7 @@
             </a:avLst>
           </a:prstGeom>
           <a:solidFill>
-            <a:srgbClr val="1A2332"/>
+            <a:srgbClr val="1A2026"/>
           </a:solidFill>
           <a:ln/>
         </p:spPr>
@@ -6544,7 +6544,7 @@
             <a:r>
               <a:rPr lang="en-US" sz="1300" b="1" dirty="0">
                 <a:solidFill>
-                  <a:srgbClr val="22C55E"/>
+                  <a:srgbClr val="3B968F"/>
                 </a:solidFill>
                 <a:latin typeface="Calibri" pitchFamily="34" charset="0"/>
                 <a:ea typeface="Calibri" pitchFamily="34" charset="-122"/>
@@ -6636,7 +6636,7 @@
             </a:avLst>
           </a:prstGeom>
           <a:solidFill>
-            <a:srgbClr val="1A2332"/>
+            <a:srgbClr val="1A2026"/>
           </a:solidFill>
           <a:ln/>
         </p:spPr>
@@ -6668,7 +6668,7 @@
             <a:r>
               <a:rPr lang="en-US" sz="1300" b="1" dirty="0">
                 <a:solidFill>
-                  <a:srgbClr val="22C55E"/>
+                  <a:srgbClr val="3B968F"/>
                 </a:solidFill>
                 <a:latin typeface="Calibri" pitchFamily="34" charset="0"/>
                 <a:ea typeface="Calibri" pitchFamily="34" charset="-122"/>
@@ -6757,7 +6757,7 @@
     <p:bg>
       <p:bgPr>
         <a:solidFill>
-          <a:srgbClr val="0F1419"/>
+          <a:srgbClr val="0F1214"/>
         </a:solidFill>
       </p:bgPr>
     </p:bg>
@@ -6802,7 +6802,7 @@
             <a:r>
               <a:rPr lang="en-US" sz="2000" b="1" dirty="0">
                 <a:solidFill>
-                  <a:srgbClr val="22C55E"/>
+                  <a:srgbClr val="3B968F"/>
                 </a:solidFill>
                 <a:latin typeface="Calibri" pitchFamily="34" charset="0"/>
                 <a:ea typeface="Calibri" pitchFamily="34" charset="-122"/>
@@ -6831,7 +6831,7 @@
             </a:avLst>
           </a:prstGeom>
           <a:solidFill>
-            <a:srgbClr val="1A2332"/>
+            <a:srgbClr val="1A2026"/>
           </a:solidFill>
           <a:ln/>
         </p:spPr>
@@ -6916,7 +6916,7 @@
             </a:avLst>
           </a:prstGeom>
           <a:solidFill>
-            <a:srgbClr val="1A2332"/>
+            <a:srgbClr val="1A2026"/>
           </a:solidFill>
           <a:ln/>
         </p:spPr>
@@ -7001,7 +7001,7 @@
             </a:avLst>
           </a:prstGeom>
           <a:solidFill>
-            <a:srgbClr val="1A2332"/>
+            <a:srgbClr val="1A2026"/>
           </a:solidFill>
           <a:ln/>
         </p:spPr>
@@ -7086,7 +7086,7 @@
             </a:avLst>
           </a:prstGeom>
           <a:solidFill>
-            <a:srgbClr val="1A2332"/>
+            <a:srgbClr val="1A2026"/>
           </a:solidFill>
           <a:ln/>
         </p:spPr>
@@ -7168,7 +7168,7 @@
     <p:bg>
       <p:bgPr>
         <a:solidFill>
-          <a:srgbClr val="0F1419"/>
+          <a:srgbClr val="0F1214"/>
         </a:solidFill>
       </p:bgPr>
     </p:bg>
@@ -7201,7 +7201,7 @@
             <a:avLst/>
           </a:prstGeom>
           <a:solidFill>
-            <a:srgbClr val="22C55E">
+            <a:srgbClr val="3B968F">
               <a:alpha val="12000"/>
             </a:srgbClr>
           </a:solidFill>
@@ -7259,7 +7259,7 @@
             <a:r>
               <a:rPr lang="en-US" sz="2000" b="1" dirty="0">
                 <a:solidFill>
-                  <a:srgbClr val="22C55E"/>
+                  <a:srgbClr val="3B968F"/>
                 </a:solidFill>
                 <a:latin typeface="Calibri" pitchFamily="34" charset="0"/>
                 <a:ea typeface="Calibri" pitchFamily="34" charset="-122"/>
@@ -7446,7 +7446,7 @@
             <a:r>
               <a:rPr lang="en-US" sz="900" dirty="0">
                 <a:solidFill>
-                  <a:srgbClr val="64748B"/>
+                  <a:srgbClr val="5B6672"/>
                 </a:solidFill>
                 <a:latin typeface="Calibri" pitchFamily="34" charset="0"/>
                 <a:ea typeface="Calibri" pitchFamily="34" charset="-122"/>
@@ -7472,7 +7472,7 @@
     <p:bg>
       <p:bgPr>
         <a:solidFill>
-          <a:srgbClr val="1A2332"/>
+          <a:srgbClr val="1A2026"/>
         </a:solidFill>
       </p:bgPr>
     </p:bg>
@@ -7541,7 +7541,7 @@
             <a:r>
               <a:rPr lang="en-US" sz="1200" b="1" spc="300" kern="0" dirty="0">
                 <a:solidFill>
-                  <a:srgbClr val="F59E0B"/>
+                  <a:srgbClr val="5BC1B8"/>
                 </a:solidFill>
                 <a:latin typeface="Calibri" pitchFamily="34" charset="0"/>
                 <a:ea typeface="Calibri" pitchFamily="34" charset="-122"/>
@@ -7609,7 +7609,7 @@
             </a:avLst>
           </a:prstGeom>
           <a:solidFill>
-            <a:srgbClr val="0F1419"/>
+            <a:srgbClr val="0F1214"/>
           </a:solidFill>
           <a:ln/>
         </p:spPr>
@@ -7631,7 +7631,7 @@
             </a:avLst>
           </a:prstGeom>
           <a:solidFill>
-            <a:srgbClr val="22C55E"/>
+            <a:srgbClr val="3B968F"/>
           </a:solidFill>
           <a:ln/>
         </p:spPr>
@@ -7645,7 +7645,7 @@
             <a:r>
               <a:rPr lang="en-US" sz="1500" b="1" dirty="0">
                 <a:solidFill>
-                  <a:srgbClr val="0F1419"/>
+                  <a:srgbClr val="0F1214"/>
                 </a:solidFill>
                 <a:latin typeface="Calibri" pitchFamily="34" charset="0"/>
                 <a:ea typeface="Calibri" pitchFamily="34" charset="-122"/>
@@ -7713,7 +7713,7 @@
             </a:avLst>
           </a:prstGeom>
           <a:solidFill>
-            <a:srgbClr val="0F1419"/>
+            <a:srgbClr val="0F1214"/>
           </a:solidFill>
           <a:ln/>
         </p:spPr>
@@ -7735,7 +7735,7 @@
             </a:avLst>
           </a:prstGeom>
           <a:solidFill>
-            <a:srgbClr val="22C55E"/>
+            <a:srgbClr val="3B968F"/>
           </a:solidFill>
           <a:ln/>
         </p:spPr>
@@ -7749,7 +7749,7 @@
             <a:r>
               <a:rPr lang="en-US" sz="1500" b="1" dirty="0">
                 <a:solidFill>
-                  <a:srgbClr val="0F1419"/>
+                  <a:srgbClr val="0F1214"/>
                 </a:solidFill>
                 <a:latin typeface="Calibri" pitchFamily="34" charset="0"/>
                 <a:ea typeface="Calibri" pitchFamily="34" charset="-122"/>
@@ -7817,7 +7817,7 @@
             </a:avLst>
           </a:prstGeom>
           <a:solidFill>
-            <a:srgbClr val="0F1419"/>
+            <a:srgbClr val="0F1214"/>
           </a:solidFill>
           <a:ln/>
         </p:spPr>
@@ -7839,7 +7839,7 @@
             </a:avLst>
           </a:prstGeom>
           <a:solidFill>
-            <a:srgbClr val="22C55E"/>
+            <a:srgbClr val="3B968F"/>
           </a:solidFill>
           <a:ln/>
         </p:spPr>
@@ -7853,7 +7853,7 @@
             <a:r>
               <a:rPr lang="en-US" sz="1500" b="1" dirty="0">
                 <a:solidFill>
-                  <a:srgbClr val="0F1419"/>
+                  <a:srgbClr val="0F1214"/>
                 </a:solidFill>
                 <a:latin typeface="Calibri" pitchFamily="34" charset="0"/>
                 <a:ea typeface="Calibri" pitchFamily="34" charset="-122"/>
@@ -7921,7 +7921,7 @@
             </a:avLst>
           </a:prstGeom>
           <a:solidFill>
-            <a:srgbClr val="0F1419"/>
+            <a:srgbClr val="0F1214"/>
           </a:solidFill>
           <a:ln/>
         </p:spPr>
@@ -7943,7 +7943,7 @@
             </a:avLst>
           </a:prstGeom>
           <a:solidFill>
-            <a:srgbClr val="22C55E"/>
+            <a:srgbClr val="3B968F"/>
           </a:solidFill>
           <a:ln/>
         </p:spPr>
@@ -7957,7 +7957,7 @@
             <a:r>
               <a:rPr lang="en-US" sz="1500" b="1" dirty="0">
                 <a:solidFill>
-                  <a:srgbClr val="0F1419"/>
+                  <a:srgbClr val="0F1214"/>
                 </a:solidFill>
                 <a:latin typeface="Calibri" pitchFamily="34" charset="0"/>
                 <a:ea typeface="Calibri" pitchFamily="34" charset="-122"/>
@@ -8022,7 +8022,7 @@
     <p:bg>
       <p:bgPr>
         <a:solidFill>
-          <a:srgbClr val="0F1419"/>
+          <a:srgbClr val="0F1214"/>
         </a:solidFill>
       </p:bgPr>
     </p:bg>
@@ -8055,7 +8055,7 @@
             <a:avLst/>
           </a:prstGeom>
           <a:solidFill>
-            <a:srgbClr val="22C55E">
+            <a:srgbClr val="3B968F">
               <a:alpha val="6000"/>
             </a:srgbClr>
           </a:solidFill>
@@ -8152,7 +8152,7 @@
             <a:r>
               <a:rPr lang="en-US" sz="1300" dirty="0">
                 <a:solidFill>
-                  <a:srgbClr val="94A3B8"/>
+                  <a:srgbClr val="8994A0"/>
                 </a:solidFill>
                 <a:latin typeface="Calibri" pitchFamily="34" charset="0"/>
                 <a:ea typeface="Calibri" pitchFamily="34" charset="-122"/>
@@ -8179,7 +8179,7 @@
             <a:avLst/>
           </a:prstGeom>
           <a:solidFill>
-            <a:srgbClr val="22C55E"/>
+            <a:srgbClr val="3B968F"/>
           </a:solidFill>
           <a:ln/>
         </p:spPr>
@@ -8211,7 +8211,7 @@
             <a:r>
               <a:rPr lang="en-US" sz="1100" spc="300" kern="0" dirty="0">
                 <a:solidFill>
-                  <a:srgbClr val="64748B"/>
+                  <a:srgbClr val="5B6672"/>
                 </a:solidFill>
                 <a:latin typeface="Calibri" pitchFamily="34" charset="0"/>
                 <a:ea typeface="Calibri" pitchFamily="34" charset="-122"/>
@@ -8250,7 +8250,7 @@
             <a:r>
               <a:rPr lang="en-US" sz="1100" dirty="0">
                 <a:solidFill>
-                  <a:srgbClr val="009E8B"/>
+                  <a:srgbClr val="000000"/>
                 </a:solidFill>
                 <a:latin typeface="Calibri" pitchFamily="34" charset="0"/>
                 <a:ea typeface="Calibri" pitchFamily="34" charset="-122"/>
@@ -8276,7 +8276,7 @@
     <p:bg>
       <p:bgPr>
         <a:solidFill>
-          <a:srgbClr val="0D2137"/>
+          <a:srgbClr val="12181D"/>
         </a:solidFill>
       </p:bgPr>
     </p:bg>
@@ -8357,7 +8357,7 @@
             <a:avLst/>
           </a:prstGeom>
           <a:solidFill>
-            <a:srgbClr val="22C55E">
+            <a:srgbClr val="3B968F">
               <a:alpha val="6000"/>
             </a:srgbClr>
           </a:solidFill>
@@ -8379,7 +8379,7 @@
             <a:avLst/>
           </a:prstGeom>
           <a:solidFill>
-            <a:srgbClr val="22C55E"/>
+            <a:srgbClr val="3B968F"/>
           </a:solidFill>
           <a:ln/>
         </p:spPr>
@@ -8411,7 +8411,7 @@
             <a:r>
               <a:rPr lang="en-US" sz="1200" b="1" spc="200" kern="0" dirty="0">
                 <a:solidFill>
-                  <a:srgbClr val="22C55E"/>
+                  <a:srgbClr val="3B968F"/>
                 </a:solidFill>
                 <a:latin typeface="Calibri" pitchFamily="34" charset="0"/>
                 <a:ea typeface="Calibri" pitchFamily="34" charset="-122"/>
@@ -8489,7 +8489,7 @@
             <a:r>
               <a:rPr lang="en-US" sz="1100" dirty="0">
                 <a:solidFill>
-                  <a:srgbClr val="64748B"/>
+                  <a:srgbClr val="5B6672"/>
                 </a:solidFill>
                 <a:latin typeface="Calibri" pitchFamily="34" charset="0"/>
                 <a:ea typeface="Calibri" pitchFamily="34" charset="-122"/>
@@ -8515,7 +8515,7 @@
     <p:bg>
       <p:bgPr>
         <a:solidFill>
-          <a:srgbClr val="0F1419"/>
+          <a:srgbClr val="0F1214"/>
         </a:solidFill>
       </p:bgPr>
     </p:bg>
@@ -8548,7 +8548,7 @@
             <a:avLst/>
           </a:prstGeom>
           <a:solidFill>
-            <a:srgbClr val="22C55E">
+            <a:srgbClr val="3B968F">
               <a:alpha val="12000"/>
             </a:srgbClr>
           </a:solidFill>
@@ -8670,7 +8670,7 @@
             <a:r>
               <a:rPr lang="en-US" sz="900" dirty="0">
                 <a:solidFill>
-                  <a:srgbClr val="64748B"/>
+                  <a:srgbClr val="5B6672"/>
                 </a:solidFill>
                 <a:latin typeface="Calibri" pitchFamily="34" charset="0"/>
                 <a:ea typeface="Calibri" pitchFamily="34" charset="-122"/>
@@ -8696,7 +8696,7 @@
     <p:bg>
       <p:bgPr>
         <a:solidFill>
-          <a:srgbClr val="0F1419"/>
+          <a:srgbClr val="0F1214"/>
         </a:solidFill>
       </p:bgPr>
     </p:bg>
@@ -8741,7 +8741,7 @@
             <a:r>
               <a:rPr lang="en-US" sz="2000" b="1" dirty="0">
                 <a:solidFill>
-                  <a:srgbClr val="22C55E"/>
+                  <a:srgbClr val="3B968F"/>
                 </a:solidFill>
                 <a:latin typeface="Calibri" pitchFamily="34" charset="0"/>
                 <a:ea typeface="Calibri" pitchFamily="34" charset="-122"/>
@@ -8834,7 +8834,7 @@
             </a:avLst>
           </a:prstGeom>
           <a:solidFill>
-            <a:srgbClr val="1A2332"/>
+            <a:srgbClr val="1A2026"/>
           </a:solidFill>
           <a:ln/>
         </p:spPr>
@@ -8919,7 +8919,7 @@
             </a:avLst>
           </a:prstGeom>
           <a:solidFill>
-            <a:srgbClr val="1A2332"/>
+            <a:srgbClr val="1A2026"/>
           </a:solidFill>
           <a:ln/>
         </p:spPr>
@@ -9001,7 +9001,7 @@
     <p:bg>
       <p:bgPr>
         <a:solidFill>
-          <a:srgbClr val="0F1419"/>
+          <a:srgbClr val="0F1214"/>
         </a:solidFill>
       </p:bgPr>
     </p:bg>
@@ -9046,7 +9046,7 @@
             <a:r>
               <a:rPr lang="en-US" sz="2000" b="1" dirty="0">
                 <a:solidFill>
-                  <a:srgbClr val="22C55E"/>
+                  <a:srgbClr val="3B968F"/>
                 </a:solidFill>
                 <a:latin typeface="Calibri" pitchFamily="34" charset="0"/>
                 <a:ea typeface="Calibri" pitchFamily="34" charset="-122"/>
@@ -9075,7 +9075,7 @@
             </a:avLst>
           </a:prstGeom>
           <a:solidFill>
-            <a:srgbClr val="1A2332"/>
+            <a:srgbClr val="1A2026"/>
           </a:solidFill>
           <a:ln/>
         </p:spPr>
@@ -9170,7 +9170,7 @@
             <a:r>
               <a:rPr lang="en-US" sz="900" dirty="0">
                 <a:solidFill>
-                  <a:srgbClr val="94A3B8"/>
+                  <a:srgbClr val="8994A0"/>
                 </a:solidFill>
                 <a:latin typeface="Calibri" pitchFamily="34" charset="0"/>
                 <a:ea typeface="Calibri" pitchFamily="34" charset="-122"/>
@@ -9199,7 +9199,7 @@
             </a:avLst>
           </a:prstGeom>
           <a:solidFill>
-            <a:srgbClr val="1A2332"/>
+            <a:srgbClr val="1A2026"/>
           </a:solidFill>
           <a:ln/>
         </p:spPr>
@@ -9294,7 +9294,7 @@
             <a:r>
               <a:rPr lang="en-US" sz="900" dirty="0">
                 <a:solidFill>
-                  <a:srgbClr val="94A3B8"/>
+                  <a:srgbClr val="8994A0"/>
                 </a:solidFill>
                 <a:latin typeface="Calibri" pitchFamily="34" charset="0"/>
                 <a:ea typeface="Calibri" pitchFamily="34" charset="-122"/>
@@ -9323,7 +9323,7 @@
             </a:avLst>
           </a:prstGeom>
           <a:solidFill>
-            <a:srgbClr val="1A2332"/>
+            <a:srgbClr val="1A2026"/>
           </a:solidFill>
           <a:ln/>
         </p:spPr>
@@ -9418,7 +9418,7 @@
             <a:r>
               <a:rPr lang="en-US" sz="900" dirty="0">
                 <a:solidFill>
-                  <a:srgbClr val="94A3B8"/>
+                  <a:srgbClr val="8994A0"/>
                 </a:solidFill>
                 <a:latin typeface="Calibri" pitchFamily="34" charset="0"/>
                 <a:ea typeface="Calibri" pitchFamily="34" charset="-122"/>
@@ -9447,7 +9447,7 @@
             </a:avLst>
           </a:prstGeom>
           <a:solidFill>
-            <a:srgbClr val="1A2332"/>
+            <a:srgbClr val="1A2026"/>
           </a:solidFill>
           <a:ln/>
         </p:spPr>
@@ -9542,7 +9542,7 @@
             <a:r>
               <a:rPr lang="en-US" sz="900" dirty="0">
                 <a:solidFill>
-                  <a:srgbClr val="94A3B8"/>
+                  <a:srgbClr val="8994A0"/>
                 </a:solidFill>
                 <a:latin typeface="Calibri" pitchFamily="34" charset="0"/>
                 <a:ea typeface="Calibri" pitchFamily="34" charset="-122"/>
@@ -9568,7 +9568,7 @@
     <p:bg>
       <p:bgPr>
         <a:solidFill>
-          <a:srgbClr val="1A2332"/>
+          <a:srgbClr val="1A2026"/>
         </a:solidFill>
       </p:bgPr>
     </p:bg>
@@ -9637,7 +9637,7 @@
             <a:r>
               <a:rPr lang="en-US" sz="1200" b="1" spc="300" kern="0" dirty="0">
                 <a:solidFill>
-                  <a:srgbClr val="F59E0B"/>
+                  <a:srgbClr val="5BC1B8"/>
                 </a:solidFill>
                 <a:latin typeface="Calibri" pitchFamily="34" charset="0"/>
                 <a:ea typeface="Calibri" pitchFamily="34" charset="-122"/>
@@ -9705,7 +9705,7 @@
             </a:avLst>
           </a:prstGeom>
           <a:solidFill>
-            <a:srgbClr val="0F1419"/>
+            <a:srgbClr val="0F1214"/>
           </a:solidFill>
           <a:ln/>
         </p:spPr>
@@ -9727,7 +9727,7 @@
             </a:avLst>
           </a:prstGeom>
           <a:solidFill>
-            <a:srgbClr val="22C55E"/>
+            <a:srgbClr val="3B968F"/>
           </a:solidFill>
           <a:ln/>
         </p:spPr>
@@ -9741,7 +9741,7 @@
             <a:r>
               <a:rPr lang="en-US" sz="1500" b="1" dirty="0">
                 <a:solidFill>
-                  <a:srgbClr val="0F1419"/>
+                  <a:srgbClr val="0F1214"/>
                 </a:solidFill>
                 <a:latin typeface="Calibri" pitchFamily="34" charset="0"/>
                 <a:ea typeface="Calibri" pitchFamily="34" charset="-122"/>
@@ -9809,7 +9809,7 @@
             </a:avLst>
           </a:prstGeom>
           <a:solidFill>
-            <a:srgbClr val="0F1419"/>
+            <a:srgbClr val="0F1214"/>
           </a:solidFill>
           <a:ln/>
         </p:spPr>
@@ -9831,7 +9831,7 @@
             </a:avLst>
           </a:prstGeom>
           <a:solidFill>
-            <a:srgbClr val="22C55E"/>
+            <a:srgbClr val="3B968F"/>
           </a:solidFill>
           <a:ln/>
         </p:spPr>
@@ -9845,7 +9845,7 @@
             <a:r>
               <a:rPr lang="en-US" sz="1500" b="1" dirty="0">
                 <a:solidFill>
-                  <a:srgbClr val="0F1419"/>
+                  <a:srgbClr val="0F1214"/>
                 </a:solidFill>
                 <a:latin typeface="Calibri" pitchFamily="34" charset="0"/>
                 <a:ea typeface="Calibri" pitchFamily="34" charset="-122"/>
@@ -9913,7 +9913,7 @@
             </a:avLst>
           </a:prstGeom>
           <a:solidFill>
-            <a:srgbClr val="0F1419"/>
+            <a:srgbClr val="0F1214"/>
           </a:solidFill>
           <a:ln/>
         </p:spPr>
@@ -9935,7 +9935,7 @@
             </a:avLst>
           </a:prstGeom>
           <a:solidFill>
-            <a:srgbClr val="22C55E"/>
+            <a:srgbClr val="3B968F"/>
           </a:solidFill>
           <a:ln/>
         </p:spPr>
@@ -9949,7 +9949,7 @@
             <a:r>
               <a:rPr lang="en-US" sz="1500" b="1" dirty="0">
                 <a:solidFill>
-                  <a:srgbClr val="0F1419"/>
+                  <a:srgbClr val="0F1214"/>
                 </a:solidFill>
                 <a:latin typeface="Calibri" pitchFamily="34" charset="0"/>
                 <a:ea typeface="Calibri" pitchFamily="34" charset="-122"/>
@@ -10017,7 +10017,7 @@
             </a:avLst>
           </a:prstGeom>
           <a:solidFill>
-            <a:srgbClr val="0F1419"/>
+            <a:srgbClr val="0F1214"/>
           </a:solidFill>
           <a:ln/>
         </p:spPr>
@@ -10039,7 +10039,7 @@
             </a:avLst>
           </a:prstGeom>
           <a:solidFill>
-            <a:srgbClr val="22C55E"/>
+            <a:srgbClr val="3B968F"/>
           </a:solidFill>
           <a:ln/>
         </p:spPr>
@@ -10053,7 +10053,7 @@
             <a:r>
               <a:rPr lang="en-US" sz="1500" b="1" dirty="0">
                 <a:solidFill>
-                  <a:srgbClr val="0F1419"/>
+                  <a:srgbClr val="0F1214"/>
                 </a:solidFill>
                 <a:latin typeface="Calibri" pitchFamily="34" charset="0"/>
                 <a:ea typeface="Calibri" pitchFamily="34" charset="-122"/>
@@ -10121,7 +10121,7 @@
             </a:avLst>
           </a:prstGeom>
           <a:solidFill>
-            <a:srgbClr val="0F1419"/>
+            <a:srgbClr val="0F1214"/>
           </a:solidFill>
           <a:ln/>
         </p:spPr>
@@ -10143,7 +10143,7 @@
             </a:avLst>
           </a:prstGeom>
           <a:solidFill>
-            <a:srgbClr val="22C55E"/>
+            <a:srgbClr val="3B968F"/>
           </a:solidFill>
           <a:ln/>
         </p:spPr>
@@ -10157,7 +10157,7 @@
             <a:r>
               <a:rPr lang="en-US" sz="1500" b="1" dirty="0">
                 <a:solidFill>
-                  <a:srgbClr val="0F1419"/>
+                  <a:srgbClr val="0F1214"/>
                 </a:solidFill>
                 <a:latin typeface="Calibri" pitchFamily="34" charset="0"/>
                 <a:ea typeface="Calibri" pitchFamily="34" charset="-122"/>
@@ -10222,7 +10222,7 @@
     <p:bg>
       <p:bgPr>
         <a:solidFill>
-          <a:srgbClr val="0F1419"/>
+          <a:srgbClr val="0F1214"/>
         </a:solidFill>
       </p:bgPr>
     </p:bg>
@@ -10257,7 +10257,7 @@
             </a:avLst>
           </a:prstGeom>
           <a:solidFill>
-            <a:srgbClr val="2D1B1B"/>
+            <a:srgbClr val="2A1414"/>
           </a:solidFill>
           <a:ln/>
         </p:spPr>
@@ -10277,7 +10277,7 @@
             <a:avLst/>
           </a:prstGeom>
           <a:solidFill>
-            <a:srgbClr val="EF4444"/>
+            <a:srgbClr val="DC2626"/>
           </a:solidFill>
           <a:ln/>
         </p:spPr>
@@ -10333,7 +10333,7 @@
             <a:r>
               <a:rPr lang="en-US" sz="1200" b="1" spc="300" kern="0" dirty="0">
                 <a:solidFill>
-                  <a:srgbClr val="EF4444"/>
+                  <a:srgbClr val="DC2626"/>
                 </a:solidFill>
                 <a:latin typeface="Calibri" pitchFamily="34" charset="0"/>
                 <a:ea typeface="Calibri" pitchFamily="34" charset="-122"/>
@@ -10398,7 +10398,7 @@
     <p:bg>
       <p:bgPr>
         <a:solidFill>
-          <a:srgbClr val="0D2137"/>
+          <a:srgbClr val="12181D"/>
         </a:solidFill>
       </p:bgPr>
     </p:bg>
@@ -10479,7 +10479,7 @@
             <a:avLst/>
           </a:prstGeom>
           <a:solidFill>
-            <a:srgbClr val="22C55E">
+            <a:srgbClr val="3B968F">
               <a:alpha val="6000"/>
             </a:srgbClr>
           </a:solidFill>
@@ -10501,7 +10501,7 @@
             <a:avLst/>
           </a:prstGeom>
           <a:solidFill>
-            <a:srgbClr val="22C55E"/>
+            <a:srgbClr val="3B968F"/>
           </a:solidFill>
           <a:ln/>
         </p:spPr>
@@ -10533,7 +10533,7 @@
             <a:r>
               <a:rPr lang="en-US" sz="1200" b="1" spc="200" kern="0" dirty="0">
                 <a:solidFill>
-                  <a:srgbClr val="22C55E"/>
+                  <a:srgbClr val="3B968F"/>
                 </a:solidFill>
                 <a:latin typeface="Calibri" pitchFamily="34" charset="0"/>
                 <a:ea typeface="Calibri" pitchFamily="34" charset="-122"/>
@@ -10611,7 +10611,7 @@
             <a:r>
               <a:rPr lang="en-US" sz="1100" dirty="0">
                 <a:solidFill>
-                  <a:srgbClr val="64748B"/>
+                  <a:srgbClr val="5B6672"/>
                 </a:solidFill>
                 <a:latin typeface="Calibri" pitchFamily="34" charset="0"/>
                 <a:ea typeface="Calibri" pitchFamily="34" charset="-122"/>
